--- a/presentations/m5-session-3-building-a-harness.pptx
+++ b/presentations/m5-session-3-building-a-harness.pptx
@@ -871,7 +871,7 @@
           <a:lstStyle/>
           <a:p>
             <a:r>
-              <a:t>This is the smallest possible guardrail: a Python function that returns a problem string when the answer has no [source: ...] tag. The loop does the rest - it writes the problem back as a user message and gives the model another turn; the lazy policy then does the research it skipped, three tool calls and about 2,163 tokens in all. Point at the 'note validator' row: that is the guardrail leaving a footprint in the trace. Then the bottom line: the same validator on a bare model rejects, retries, and still gets a wrong answer for 73 tokens - a guard can refuse, it cannot research. Ask the class: what validator would you write for an agent that must answer in Dutch?</a:t>
+              <a:t>This is the smallest possible guardrail: a Python function that returns a problem string when the answer has no [source: ...] tag. The loop does the rest - it writes the problem back as a user message and gives the model another turn; the lazy policy then does the research it skipped, three tool calls and about 2,163 tokens in all. Point at the 'note validator' row: that is the guardrail leaving a footprint in the trace. Then the bottom line: the same validator on a bare model rejects, retries, and still gets a wrong answer for 73 tokens - a guard can refuse, it cannot research. Ask the class: what validator would you write for an agent that must answer in Dutch? The figures on this slide are the notebook's reference run on the deterministic stand-in; the notebook then repeats the comparison live on Claude, which varies and prints real token usage.</a:t>
             </a:r>
           </a:p>
         </p:txBody>
@@ -941,7 +941,7 @@
           <a:lstStyle/>
           <a:p>
             <a:r>
-              <a:t>Two very different questions, one entry point. The router is an agent whose only job is to emit a label; the specialists carry the tools. 0.799102 is a number the students met in M2: the share of passengers left after the 179-row test split. The research branch pulls the function-calling date from the library with a source tag. Ask the class: what happens to a question the router labels 'general' - and is that the right default?</a:t>
+              <a:t>Two very different questions, one entry point. The router is an agent whose only job is to emit a label; the specialists carry the tools. 0.799102 is a number the students met in M2: the share of passengers left after the 179-row test split. The research branch pulls the function-calling date from the library with a source tag. Ask the class: what happens to a question the router labels 'general' - and is that the right default? The figures on this slide are the notebook's reference run on the deterministic stand-in; the notebook then repeats the comparison live on Claude, which varies and prints real token usage.</a:t>
             </a:r>
           </a:p>
         </p:txBody>
@@ -1011,7 +1011,7 @@
           <a:lstStyle/>
           <a:p>
             <a:r>
-              <a:t>This is the payoff of the whole session in one chart. The bare model fails everything because our ScriptedModel, like a real model with a cutoff, remembers wrong dates and cannot cite. Adding search and read tools jumps to eleven of twelve. Adding one verification tool gets the last one. Ask the class: is a 91.7% harness good enough? For what kind of question would you say yes, and for which would you say no?</a:t>
+              <a:t>This is the payoff of the whole session in one chart. The bare model fails everything because our ScriptedModel, like a real model with a cutoff, remembers wrong dates and cannot cite. Adding search and read tools jumps to eleven of twelve. Adding one verification tool gets the last one. Ask the class: is a 91.7% harness good enough? For what kind of question would you say yes, and for which would you say no? The figures on this slide are the notebook's reference run on the deterministic stand-in; the notebook then repeats the comparison live on Claude, which varies and prints real token usage.</a:t>
             </a:r>
           </a:p>
         </p:txBody>
@@ -1081,7 +1081,7 @@
           <a:lstStyle/>
           <a:p>
             <a:r>
-              <a:t>Now the other axis. Tokens rise by a factor of about seventy from A to B and double again from B to C. The engineering question is not 'is C better' - it is - but 'is one extra correct answer in twelve worth doubling the bill'. For a medical or legal assistant, obviously yes. For a chatbot suggesting playlists, probably not. Ask the class: how could you get most of C's accuracy at B's price? Hint: routing.</a:t>
+              <a:t>Now the other axis. Tokens rise by a factor of about seventy from A to B and double again from B to C. The engineering question is not 'is C better' - it is - but 'is one extra correct answer in twelve worth doubling the bill'. For a medical or legal assistant, obviously yes. For a chatbot suggesting playlists, probably not. Ask the class: how could you get most of C's accuracy at B's price? Hint: routing. The figures on this slide are the notebook's reference run on the deterministic stand-in; the notebook then repeats the comparison live on Claude, which varies and prints real token usage.</a:t>
             </a:r>
           </a:p>
         </p:txBody>
@@ -1151,7 +1151,7 @@
           <a:lstStyle/>
           <a:p>
             <a:r>
-              <a:t>The most important case in the suite is the one with no answer. B's failure is not a bug in search - search did what search does, it returned the nearest thing. The bug is that nothing checked whether the nearest thing supported the claim. C adds that check and the honest answer falls out. Notice the eval design: we graded for 'could not verify', so not-knowing was rewarded. Ask the class: how many of your own test cases have no right answer on purpose?</a:t>
+              <a:t>The most important case in the suite is the one with no answer. B's failure is not a bug in search - search did what search does, it returned the nearest thing. The bug is that nothing checked whether the nearest thing supported the claim. C adds that check and the honest answer falls out. Notice the eval design: we graded for 'could not verify', so not-knowing was rewarded. Ask the class: how many of your own test cases have no right answer on purpose? The figures on this slide are the notebook's reference run on the deterministic stand-in; the notebook then repeats the comparison live on Claude, which varies and prints real token usage.</a:t>
             </a:r>
           </a:p>
         </p:txBody>
@@ -1221,7 +1221,7 @@
           <a:lstStyle/>
           <a:p>
             <a:r>
-              <a:t>Do the arithmetic on the slide: 24,600 tokens at three dollars per million is about seven cents for the whole suite - trivial once, seventy-four dollars per thousand runs, and the twelve cases stand in for real traffic. The point is the habit: every configuration gets a pass rate and a price, and the decision is made with both numbers on the table. Ask the class: at what price per wrong answer does C become cheaper than B?</a:t>
+              <a:t>Do the arithmetic on the slide: 24,600 tokens at three dollars per million is about seven cents for the whole suite - trivial once, seventy-four dollars per thousand runs, and the twelve cases stand in for real traffic. The point is the habit: every configuration gets a pass rate and a price, and the decision is made with both numbers on the table. Ask the class: at what price per wrong answer does C become cheaper than B? The figures on this slide are the notebook's reference run on the deterministic stand-in; the notebook then repeats the comparison live on Claude, which varies and prints real token usage.</a:t>
             </a:r>
           </a:p>
         </p:txBody>
@@ -7259,7 +7259,7 @@
                 </a:solidFill>
                 <a:latin typeface="Arial"/>
               </a:rPr>
-              <a:t>Notebook 03: Hooks.validate_answer on a lazy research policy; trace condensed, research turns 2-4 folded into one row. 5 model calls, 3 tool calls, ~2,163 tokens.</a:t>
+              <a:t>Notebook 03 reference run on the deterministic stand-in (the live Claude run varies and reports real tokens); trace condensed, turns 2-4 folded into one row.</a:t>
             </a:r>
           </a:p>
         </p:txBody>
@@ -7756,7 +7756,7 @@
                 </a:solidFill>
                 <a:latin typeface="Arial"/>
               </a:rPr>
-              <a:t>patterns.route() in the course library, notebook 03; labels: calculation, research, general. Pattern: Anthropic, Building effective agents, Dec 2024.</a:t>
+              <a:t>patterns.route() in notebook 03, reference run on the stand-in; live Claude varies. Labels: calculation, research, general. Anthropic, Building effective agents, Dec 2024.</a:t>
             </a:r>
           </a:p>
         </p:txBody>
@@ -8192,6 +8192,26 @@
               <a:t>Only the harness changed; the model and the questions are identical</a:t>
             </a:r>
           </a:p>
+          <a:p>
+            <a:pPr algn="l" indent="-228600" marL="228600">
+              <a:spcAft>
+                <a:spcPts val="800"/>
+              </a:spcAft>
+              <a:buClr>
+                <a:srgbClr val="1E5EF3"/>
+              </a:buClr>
+              <a:buChar char="—"/>
+            </a:pPr>
+            <a:r>
+              <a:rPr sz="1450" b="0">
+                <a:solidFill>
+                  <a:srgbClr val="202B38"/>
+                </a:solidFill>
+                <a:latin typeface="Arial"/>
+              </a:rPr>
+              <a:t>The notebook then reruns the same 12 cases on Claude: an eval is run, not assumed</a:t>
+            </a:r>
+          </a:p>
         </p:txBody>
       </p:sp>
       <p:pic>
@@ -8253,7 +8273,7 @@
                 </a:solidFill>
                 <a:latin typeface="Arial"/>
               </a:rPr>
-              <a:t>Eval suite of 12 cases in notebook 03 (harness.evals.compare). Graders: contains(...) plus cites(...) per case.</a:t>
+              <a:t>12-case eval suite, notebook 03 (harness.evals.compare); graders contains + cites. Reference run on the deterministic stand-in; the live Claude run varies, real tokens.</a:t>
             </a:r>
           </a:p>
         </p:txBody>
@@ -8770,7 +8790,7 @@
                 </a:solidFill>
                 <a:latin typeface="Arial"/>
               </a:rPr>
-              <a:t>Estimated tokens from the traces, notebook 03 (prints 172 / 11,766 / 24,580). 24,600 / 11,800 = 2.1. Prices vary by model; the ratio is the lesson.</a:t>
+              <a:t>Notebook 03 reference run on the stand-in (prints 172 / 11,766 / 24,580; 24,600 / 11,800 = 2.1). The live Claude run varies and reports real tokens; the ratio is the lesson.</a:t>
             </a:r>
           </a:p>
         </p:txBody>
@@ -9534,7 +9554,7 @@
                 </a:solidFill>
                 <a:latin typeface="Arial"/>
               </a:rPr>
-              <a:t>Notebook 03, eval case 'no-answer'; grader contains('could not verify'). Lesson: write the trap into the suite, or you will never see it.</a:t>
+              <a:t>Notebook 03, eval case 'no-answer'; grader contains('could not verify'); reference run on the stand-in, the live Claude run varies. Lesson: write the trap into the suite, or you will never see it.</a:t>
             </a:r>
           </a:p>
         </p:txBody>
@@ -10765,7 +10785,7 @@
                 </a:solidFill>
                 <a:latin typeface="Arial"/>
               </a:rPr>
-              <a:t>Cost = tokens / 1,000,000 x 3, as in trace.cost(3.0) in the course library. The $3 price is a stand-in; real prices differ by model and between input and output tokens.</a:t>
+              <a:t>Cost = tokens / 1,000,000 x 3, as in trace.cost(3.0). Dollar figures use estimated tokens at a stand-in price; the notebook's live Claude runs show real usage, and real prices differ by model and by input vs output.</a:t>
             </a:r>
           </a:p>
         </p:txBody>

--- a/presentations/m5-session-3-building-a-harness.pptx
+++ b/presentations/m5-session-3-building-a-harness.pptx
@@ -25,6 +25,8 @@
     <p:sldId id="273" r:id="rId25"/>
     <p:sldId id="274" r:id="rId26"/>
     <p:sldId id="275" r:id="rId27"/>
+    <p:sldId id="276" r:id="rId28"/>
+    <p:sldId id="277" r:id="rId29"/>
   </p:sldIdLst>
   <p:sldSz cx="12191695" cy="6858000" type="screen4x3"/>
   <p:notesSz cx="6858000" cy="9144000"/>
@@ -521,7 +523,7 @@
           <a:lstStyle/>
           <a:p>
             <a:r>
-              <a:t>Frame the session: last time we looked at the parts on the bench - models, context, tools, skills. Today we bolt them into a car that drives and, more importantly, brakes. Part 1 is the theory of the loop, guardrails, patterns and evals; Part 2 is notebook 03, where one model runs through three harnesses and the pass rate goes from 0% to 100%. Ask the class: if the same model gives three different results, what exactly are we testing?</a:t>
+              <a:t>Frame the session: last time we looked at the parts on the bench - models, context, tools, skills. Today we bolt them into a car that drives and, more importantly, brakes. Part 1 is the theory of the loop, guardrails, patterns and evals; Part 2 is notebook 03, where the harness package runs on real Claude models and the same model passes 3, 14 and 13 of 14 cases depending only on the harness around it. Class question: if the same model gives three different results, what exactly are we testing?</a:t>
             </a:r>
           </a:p>
         </p:txBody>
@@ -591,7 +593,7 @@
           <a:lstStyle/>
           <a:p>
             <a:r>
-              <a:t>This is the post that named the discipline. The striking number is one million lines with zero by hand, but the lesson is the left-bottom bullet: the repository became the harness. Design docs, decision records and plans are written for the agent to read, and every constraint that matters is enforced by a linter or a structural test, because a markdown rule is optional to a model. Ask the class: what is one rule in your own projects that is only written down, and how would you turn it into a test?</a:t>
+              <a:t>This is the post that named the discipline. The striking number is one million lines with zero by hand, but the lesson is the left-bottom bullet: the repository became the harness. Design docs, decision records and plans are written for the agent to read, and every constraint that matters is enforced by a linter or a structural test, because a markdown rule is optional to a model. Class question: what is one rule in your own projects that is only written down, and how would you turn it into a test?</a:t>
             </a:r>
           </a:p>
         </p:txBody>
@@ -661,7 +663,7 @@
           <a:lstStyle/>
           <a:p>
             <a:r>
-              <a:t>Let the line sit for a moment. It only holds when the guards are real: an agent can be allowed to act freely because the linters, tests and permissions catch the damage cheaply. Without those, waiting for approval is the only brake you have - and the approval paradox says that brake wears out. Ask the class: for which actions would you still insist on waiting, whatever the cost?</a:t>
+              <a:t>Let the line sit for a moment. It only holds when the guards are real: an agent can be allowed to act freely because the linters, tests and permissions catch the damage cheaply. Without those, waiting for approval is the only brake you have - and the approval paradox says that brake wears out. Class question: for which actions would you still insist on waiting, whatever the cost?</a:t>
             </a:r>
           </a:p>
         </p:txBody>
@@ -731,7 +733,7 @@
           <a:lstStyle/>
           <a:p>
             <a:r>
-              <a:t>Put the two halves of the session together: OpenAI says enforce mechanically; the field survey says almost nobody does. 4.4% means that if you write twenty security rules in your CLAUDE.md, statistically one of them has a control behind it. And 60% of harnesses cannot even tell whether a change made them better or worse. This is the gap the course wants you to close. Ask the class: which is worse - a rule with no control, or no rule at all?</a:t>
+              <a:t>Put the two halves of the session together: OpenAI says enforce mechanically; the field survey says almost nobody does. 4.4% means that if you write twenty security rules in your CLAUDE.md, statistically one of them has a control behind it. And 60% of harnesses cannot even tell whether a change made them better or worse. This is the gap the course wants you to close. Class question: which is worse - a rule with no control, or no rule at all?</a:t>
             </a:r>
           </a:p>
         </p:txBody>
@@ -801,7 +803,7 @@
           <a:lstStyle/>
           <a:p>
             <a:r>
-              <a:t>Open notebook 03. Everything runs without an API key on the ScriptedModel, so the numbers on the next slides are the numbers students will see. Ask the class: before we run it, what pass rate do you expect from the bare model?</a:t>
+              <a:t>Open notebook 03. Everything in Part 2 ran on real Claude models against this repository, with the key read from .env; the recorded run cost about two and a half dollars, most of it the eval suite. Live runs vary, so the point of each slide is the shape of what happened and the reason, not the exact digit. Class question: before we run it, what pass rate do you expect from the model without tools?</a:t>
             </a:r>
           </a:p>
         </p:txBody>
@@ -871,7 +873,7 @@
           <a:lstStyle/>
           <a:p>
             <a:r>
-              <a:t>This is the smallest possible guardrail: a Python function that returns a problem string when the answer has no [source: ...] tag. The loop does the rest - it writes the problem back as a user message and gives the model another turn; the lazy policy then does the research it skipped, three tool calls and about 2,163 tokens in all. Point at the 'note validator' row: that is the guardrail leaving a footprint in the trace. Then the bottom line: the same validator on a bare model rejects, retries, and still gets a wrong answer for 73 tokens - a guard can refuse, it cannot research. Ask the class: what validator would you write for an agent that must answer in Dutch? The figures on this slide are the notebook's reference run on the deterministic stand-in; the notebook then repeats the comparison live on Claude, which varies and prints real token usage.</a:t>
+              <a:t>A harness is a program, not a notebook, so the notebook imports a package the students can read in full. Go down the table with the car in mind: fuel, hands, brakes, dashboard, steering. Only loop.py is over two hundred lines, and the run method the students print is about forty of them. Nothing here is simulated: the client is the official Anthropic SDK, the tools are real functions on this repository, the prices are the list prices. Class question: which file would you open first to find out why a run stopped?</a:t>
             </a:r>
           </a:p>
         </p:txBody>
@@ -941,7 +943,7 @@
           <a:lstStyle/>
           <a:p>
             <a:r>
-              <a:t>Two very different questions, one entry point. The router is an agent whose only job is to emit a label; the specialists carry the tools. 0.799102 is a number the students met in M2: the share of passengers left after the 179-row test split. The research branch pulls the function-calling date from the library with a source tag. Ask the class: what happens to a question the router labels 'general' - and is that the right default? The figures on this slide are the notebook's reference run on the deterministic stand-in; the notebook then repeats the comparison live on Claude, which varies and prints real token usage.</a:t>
+              <a:t>Left: the researcher lists the workflows folder, reads notebooks.yml and answers on turn three - Python 3.12, nine notebooks, the file path - so the loop returns done; 3,536 input tokens in all because every turn re-sends the whole conversation. Middle: the same agent with max_turns=2 spends both turns on tools and the harness cuts it with an empty answer; that is the seatbelt working. Right: a 3,000-token budget; after README.md comes back, count_tokens says the next call would carry 7,342 tokens, so the harness stops before sending it and nothing is billed for that call. Class question: which of the two cut runs would you rather explain to the person paying the bill, and why? Figures on this slide are quoted from the recorded run of notebook 03 on 30 Sep 2026 (claude-opus-5 main agents, claude-sonnet-5 workers); live runs vary, so compare shapes and reasons, not digits.</a:t>
             </a:r>
           </a:p>
         </p:txBody>
@@ -1011,7 +1013,7 @@
           <a:lstStyle/>
           <a:p>
             <a:r>
-              <a:t>This is the payoff of the whole session in one chart. The bare model fails everything because our ScriptedModel, like a real model with a cutoff, remembers wrong dates and cannot cite. Adding search and read tools jumps to eleven of twelve. Adding one verification tool gets the last one. Ask the class: is a 91.7% harness good enough? For what kind of question would you say yes, and for which would you say no? The figures on this slide are the notebook's reference run on the deterministic stand-in; the notebook then repeats the comparison live on Claude, which varies and prints real token usage.</a:t>
+              <a:t>Two guardrails, two checkpoints, both real. On the left the model was asked, politely, to read the key file; the hook saw the path before the tool ran and returned a reason, which the model received as an is_error tool result. It adapted and said so. On the right the task invited the shortcut - counting lines is what wc is for - and the permission rule refused run_shell without looking at the command. The model fell back to reading the file and counted by eye: right this time, and exactly the kind of task a model gets slightly wrong. The last bullet is the layered version: allow dangerous tools, then narrow with a hook to one safe command. Class question: why is a hook that denies with a reason better than silently dropping the call? Figures on this slide are quoted from the recorded run of notebook 03 on 30 Sep 2026 (claude-opus-5 main agents, claude-sonnet-5 workers); live runs vary, so compare shapes and reasons, not digits.</a:t>
             </a:r>
           </a:p>
         </p:txBody>
@@ -1081,7 +1083,7 @@
           <a:lstStyle/>
           <a:p>
             <a:r>
-              <a:t>Now the other axis. Tokens rise by a factor of about seventy from A to B and double again from B to C. The engineering question is not 'is C better' - it is - but 'is one extra correct answer in twelve worth doubling the bill'. For a medical or legal assistant, obviously yes. For a chatbot suggesting playlists, probably not. Ask the class: how could you get most of C's accuracy at B's price? Hint: routing. The figures on this slide are the notebook's reference run on the deterministic stand-in; the notebook then repeats the comparison live on Claude, which varies and prints real token usage.</a:t>
+              <a:t>Be honest about what happened here: in the recorded run the validator never fired. The agent with tools read the workflow and cited it; the agent without tools said it could not know and set found to false, which is exactly what the schema is for. In another run the no-tools agent may guess a path, and then sources_exist bounces it once - the notebook text covers both outcomes. The lesson does not depend on which happened: the validator is the standard, the tools are the ability, and a guard cannot add ability. Class question: what validator would you write for an agent that must answer in Dutch, and what would it do to an agent that only knows English? Figures on this slide are quoted from the recorded run of notebook 03 on 30 Sep 2026 (claude-opus-5 main agents, claude-sonnet-5 workers); live runs vary, so compare shapes and reasons, not digits.</a:t>
             </a:r>
           </a:p>
         </p:txBody>
@@ -1151,7 +1153,7 @@
           <a:lstStyle/>
           <a:p>
             <a:r>
-              <a:t>The most important case in the suite is the one with no answer. B's failure is not a bug in search - search did what search does, it returned the nearest thing. The bug is that nothing checked whether the nearest thing supported the claim. C adds that check and the honest answer falls out. Notice the eval design: we graded for 'could not verify', so not-knowing was rewarded. Ask the class: how many of your own test cases have no right answer on purpose? The figures on this slide are the notebook's reference run on the deterministic stand-in; the notebook then repeats the comparison live on Claude, which varies and prints real token usage.</a:t>
+              <a:t>Each row is a few lines of Python composing Agent objects; the small roles run on sonnet-5 with low effort, the main agents on opus-5. Read the result column for the recurring trick: structured outputs. The judge returns pass and reason, the router returns an enum, the planner returns a list - code can read a model's decision without parsing prose. Routing shows the cheap path paying off: the arithmetic went to the small model and an exact tool. Parallel: three workers finished in the time of the slowest one. The evaluator caught a real embellishment - 'pinned' dependencies that the file never claims - and the second draft passed. Class question: which of these five would you remove first if your budget halved, and what would you lose? Figures on this slide are quoted from the recorded run of notebook 03 on 30 Sep 2026 (claude-opus-5 main agents, claude-sonnet-5 workers); live runs vary, so compare shapes and reasons, not digits.</a:t>
             </a:r>
           </a:p>
         </p:txBody>
@@ -1221,7 +1223,7 @@
           <a:lstStyle/>
           <a:p>
             <a:r>
-              <a:t>Do the arithmetic on the slide: 24,600 tokens at three dollars per million is about seven cents for the whole suite - trivial once, seventy-four dollars per thousand runs, and the twelve cases stand in for real traffic. The point is the habit: every configuration gets a pass rate and a price, and the decision is made with both numbers on the table. Ask the class: at what price per wrong answer does C become cheaper than B? The figures on this slide are the notebook's reference run on the deterministic stand-in; the notebook then repeats the comparison live on Claude, which varies and prints real token usage.</a:t>
+              <a:t>This is the payoff of the session in one picture, and it did not come out the way the old story said. Without tools the model passes three cases - exactly the three traps, because not knowing is the right answer there. With tools it passes everything. With tools and the validator it passes one fewer, and costs more. Resist tidying that up: the next slide reads the failures one by one. Also notice the price axis: passing costs tokens, because reading files is what passing is made of. Class question: is a configuration that scores lower but enforces a standard worse, or just differently measured? Figures on this slide are quoted from the recorded run of notebook 03 on 30 Sep 2026 (claude-opus-5 main agents, claude-sonnet-5 workers); live runs vary, so compare shapes and reasons, not digits.</a:t>
             </a:r>
           </a:p>
         </p:txBody>
@@ -1291,7 +1293,7 @@
           <a:lstStyle/>
           <a:p>
             <a:r>
-              <a:t>Four ideas in Part 1: the loop and its exits, guardrails at three checkpoints, five workflow patterns, and evals plus traces as the proof. Ask the class: which of the eight pieces from Session 1 have we not yet built?</a:t>
+              <a:t>Four ideas in Part 1: the loop and its exits, guardrails at three checkpoints, five workflow patterns, and evals plus traces as the proof. Class question: which of the eight pieces from Session 1 have we not yet built?</a:t>
             </a:r>
           </a:p>
         </p:txBody>
@@ -1361,7 +1363,147 @@
           <a:lstStyle/>
           <a:p>
             <a:r>
-              <a:t>Recap in one breath: a loop with exits, guards in code, patterns before agents, evals before opinions, traces before invoices. Homework is notebook 03's exercises - they add a case to the eval suite and a validator to the harness. Ask the class: which single piece from today would you add first to an agent you already use?</a:t>
+              <a:t>A scoreboard hides the interesting part. The left column is not a hallucination story: A never invented a fact, it said it could not know, eleven times, and the grader rightly failed it because the fact is in the repository. The right column is the surprise: the only failure of the full harness is a trap, and the same trap was the most expensive case for B as well. Eight turns of listing and reading for a grade that does not exist. B happened to answer on its last turn; C was still calling tools when the seatbelt engaged. Class question: how would you change the system prompt so the model stops searching after two empty looks - and how would you test that it worked? Figures on this slide are quoted from the recorded run of notebook 03 on 30 Sep 2026 (claude-opus-5 main agents, claude-sonnet-5 workers); live runs vary, so compare shapes and reasons, not digits.</a:t>
+            </a:r>
+          </a:p>
+        </p:txBody>
+      </p:sp>
+      <p:sp>
+        <p:nvSpPr>
+          <p:cNvPr id="4" name="Slide Number Placeholder 3"/>
+          <p:cNvSpPr>
+            <a:spLocks noGrp="1"/>
+          </p:cNvSpPr>
+          <p:nvPr>
+            <p:ph type="sldNum" idx="5" sz="quarter"/>
+          </p:nvPr>
+        </p:nvSpPr>
+        <p:spPr/>
+      </p:sp>
+    </p:spTree>
+  </p:cSld>
+  <p:clrMapOvr>
+    <a:masterClrMapping/>
+  </p:clrMapOvr>
+</p:notes>
+</file>
+
+<file path=ppt/notesSlides/notesSlide21.xml><?xml version="1.0" encoding="utf-8"?>
+<p:notes xmlns:a="http://schemas.openxmlformats.org/drawingml/2006/main" xmlns:p="http://schemas.openxmlformats.org/presentationml/2006/main" xmlns:r="http://schemas.openxmlformats.org/officeDocument/2006/relationships">
+  <p:cSld>
+    <p:spTree>
+      <p:nvGrpSpPr>
+        <p:cNvPr id="1" name=""/>
+        <p:cNvGrpSpPr/>
+        <p:nvPr/>
+      </p:nvGrpSpPr>
+      <p:grpSpPr>
+        <a:xfrm>
+          <a:off x="0" y="0"/>
+          <a:ext cx="0" cy="0"/>
+          <a:chOff x="0" y="0"/>
+          <a:chExt cx="0" cy="0"/>
+        </a:xfrm>
+      </p:grpSpPr>
+      <p:sp>
+        <p:nvSpPr>
+          <p:cNvPr id="2" name="Slide Image Placeholder 1"/>
+          <p:cNvSpPr>
+            <a:spLocks noGrp="1"/>
+          </p:cNvSpPr>
+          <p:nvPr>
+            <p:ph type="sldImg" idx="2"/>
+          </p:nvPr>
+        </p:nvSpPr>
+        <p:spPr/>
+      </p:sp>
+      <p:sp>
+        <p:nvSpPr>
+          <p:cNvPr id="3" name="Notes Placeholder 2"/>
+          <p:cNvSpPr>
+            <a:spLocks noGrp="1"/>
+          </p:cNvSpPr>
+          <p:nvPr>
+            <p:ph type="body" idx="3" sz="quarter"/>
+          </p:nvPr>
+        </p:nvSpPr>
+        <p:spPr/>
+        <p:txBody>
+          <a:bodyPr/>
+          <a:lstStyle/>
+          <a:p>
+            <a:r>
+              <a:t>Anthropic's eval post makes the operational point: evals run like tests in CI so a change to a prompt, a tool or a model shows its effect before users see it. Marmelab found sixty percent of harnesses ship without tests or evals. This workflow is the smallest honest version: unit tests that need no key and always run, and the eval suite that needs the secret and skips cleanly without it, so forks do not fail. The scoreboard lands in the job summary and results.json is kept as an artifact - the pass rate of every configuration on record for every change, which is OpenAI's 'repository as system of record' in miniature. Class question: what would you put in the pull request template so a reviewer compares the new scoreboard with the old one? Figures on this slide are quoted from the recorded run of notebook 03 on 30 Sep 2026 (claude-opus-5 main agents, claude-sonnet-5 workers); live runs vary, so compare shapes and reasons, not digits.</a:t>
+            </a:r>
+          </a:p>
+        </p:txBody>
+      </p:sp>
+      <p:sp>
+        <p:nvSpPr>
+          <p:cNvPr id="4" name="Slide Number Placeholder 3"/>
+          <p:cNvSpPr>
+            <a:spLocks noGrp="1"/>
+          </p:cNvSpPr>
+          <p:nvPr>
+            <p:ph type="sldNum" idx="5" sz="quarter"/>
+          </p:nvPr>
+        </p:nvSpPr>
+        <p:spPr/>
+      </p:sp>
+    </p:spTree>
+  </p:cSld>
+  <p:clrMapOvr>
+    <a:masterClrMapping/>
+  </p:clrMapOvr>
+</p:notes>
+</file>
+
+<file path=ppt/notesSlides/notesSlide22.xml><?xml version="1.0" encoding="utf-8"?>
+<p:notes xmlns:a="http://schemas.openxmlformats.org/drawingml/2006/main" xmlns:p="http://schemas.openxmlformats.org/presentationml/2006/main" xmlns:r="http://schemas.openxmlformats.org/officeDocument/2006/relationships">
+  <p:cSld>
+    <p:spTree>
+      <p:nvGrpSpPr>
+        <p:cNvPr id="1" name=""/>
+        <p:cNvGrpSpPr/>
+        <p:nvPr/>
+      </p:nvGrpSpPr>
+      <p:grpSpPr>
+        <a:xfrm>
+          <a:off x="0" y="0"/>
+          <a:ext cx="0" cy="0"/>
+          <a:chOff x="0" y="0"/>
+          <a:chExt cx="0" cy="0"/>
+        </a:xfrm>
+      </p:grpSpPr>
+      <p:sp>
+        <p:nvSpPr>
+          <p:cNvPr id="2" name="Slide Image Placeholder 1"/>
+          <p:cNvSpPr>
+            <a:spLocks noGrp="1"/>
+          </p:cNvSpPr>
+          <p:nvPr>
+            <p:ph type="sldImg" idx="2"/>
+          </p:nvPr>
+        </p:nvSpPr>
+        <p:spPr/>
+      </p:sp>
+      <p:sp>
+        <p:nvSpPr>
+          <p:cNvPr id="3" name="Notes Placeholder 2"/>
+          <p:cNvSpPr>
+            <a:spLocks noGrp="1"/>
+          </p:cNvSpPr>
+          <p:nvPr>
+            <p:ph type="body" idx="3" sz="quarter"/>
+          </p:nvPr>
+        </p:nvSpPr>
+        <p:spPr/>
+        <p:txBody>
+          <a:bodyPr/>
+          <a:lstStyle/>
+          <a:p>
+            <a:r>
+              <a:t>Recap in one breath: a loop with exits, guards in code, patterns before agents, evals before opinions, traces before invoices. Homework is notebook 03's exercises: add an eval case and a trap, write a hook that denies write tools, and run the evaluator-optimizer with one, two and four rounds. Class question: which single piece from today would you add first to an agent you already use?</a:t>
             </a:r>
           </a:p>
         </p:txBody>
@@ -1431,7 +1573,7 @@
           <a:lstStyle/>
           <a:p>
             <a:r>
-              <a:t>Walk the picture clockwise: gather, act, verify, repeat. Point at the three exits and insist on them - most demos online have only 'done'. Max turns protects against a model that never finishes; budget protects your wallet. In the library this is Agent.run(): a for-loop over turns, a model call, tool execution, validators, and the RunResult with stopped_because. Ask the class: which exit would you hit first if the model kept calling the same tool with the same arguments?</a:t>
+              <a:t>Walk the picture clockwise: gather, act, verify, repeat. Point at the three exits and insist on them - most demos online have only 'done'. Max turns protects against a model that never finishes; budget protects your wallet, and it asks the API's count_tokens endpoint before sending the call. The API itself adds refusal and max_tokens as stop reasons, which the harness records so a cut answer is never mistaken for a finished one. In the package this is Agent.run() in harness/loop.py: a for-loop over turns, one messages.create call, tool execution, validators, and the RunResult with stopped_because. Class question: which exit would you hit first if the model kept calling the same tool with the same arguments?</a:t>
             </a:r>
           </a:p>
         </p:txBody>
@@ -1501,7 +1643,7 @@
           <a:lstStyle/>
           <a:p>
             <a:r>
-              <a:t>Three places to put a check, and only three. Before input is cheap and catches the obvious. Before a tool is where the damage happens: reading is safe, writing needs a look, deleting or running code is denied unless someone opts in. After the answer is where you validate and retry. Then the paradox: when people are asked to approve 93% of the time, they stop reading - the prompt becomes theatre. Real controls are code, not questions. Ask the class: which of the three checkpoints would have stopped an agent that emailed a customer by mistake?</a:t>
+              <a:t>Three places to put a check, and only three. Before input is cheap and catches the obvious. Before a tool is where the damage happens: reading is safe, writing needs a look, deleting or running code is denied unless someone opts in. After the answer is where you validate and retry. Then the paradox: when people are asked to approve 93% of the time, they stop reading - the prompt becomes theatre. Real controls are code, not questions. Class question: which of the three checkpoints would have stopped an agent that emailed a customer by mistake?</a:t>
             </a:r>
           </a:p>
         </p:txBody>
@@ -1571,7 +1713,7 @@
           <a:lstStyle/>
           <a:p>
             <a:r>
-              <a:t>Read the table as a shopping list, not a theory. Two of the seven need a model (the classifiers); the other five are regular code - regexes, lookups, schemas. That is the point: most safety is deterministic. In the course library the tool safeguard is the risk level on each @tool, the rules-based protection is a before_tool hook, and output validation is validate_answer. Ask the class: which two of the seven would you add first to a homework-helper agent, and why those two?</a:t>
+              <a:t>Read the table as a shopping list, not a theory. Two of the seven need a model (the classifiers); the other five are regular code - regexes, lookups, schemas. That is the point: most safety is deterministic. In the harness package the tool safeguard is the risk level on each @tool plus the permission rule, the rules-based protection is a before_tool hook, and output validation is validate_answer. Class question: which two of the seven would you add first to a homework-helper agent, and why those two?</a:t>
             </a:r>
           </a:p>
         </p:txBody>
@@ -1641,7 +1783,7 @@
           <a:lstStyle/>
           <a:p>
             <a:r>
-              <a:t>Left to right, increasing freedom. Chaining: fixed steps with a check between them. Routing: a cheap classifier sends each input to a specialist. Parallelization: split the work or ask several times and vote. Orchestrator-workers: a model decides the sub-tasks, code runs the workers, a model merges. Evaluator-optimizer: one produces, one critiques, until accepted. In plain words: the first four are routes drawn on the map; only an agent chooses the roads itself. Ask the class: which pattern is a spell-checker that rewrites a paragraph until a grammar tool is satisfied?</a:t>
+              <a:t>Left to right, increasing freedom. Chaining: fixed steps with a check between them. Routing: a cheap classifier sends each input to a specialist. Parallelization: split the work or ask several times and vote. Orchestrator-workers: a model decides the sub-tasks, code runs the workers, a model merges. Evaluator-optimizer: one produces, one critiques, until accepted. In plain words: the first four are routes drawn on the map; only an agent chooses the roads itself. Class question: which pattern is a spell-checker that rewrites a paragraph until a grammar tool is satisfied?</a:t>
             </a:r>
           </a:p>
         </p:txBody>
@@ -1711,7 +1853,7 @@
           <a:lstStyle/>
           <a:p>
             <a:r>
-              <a:t>The rule from Anthropic's post is blunt: find the simplest solution possible and add complexity only when it demonstrably improves results. Workflows are predictable and cheap to test; agents are flexible and expensive. The right column maps each pattern to a cell the students will run. Ask the class: a support bot that must answer billing, shipping and returns questions - workflow or agent, and which pattern?</a:t>
+              <a:t>The rule from Anthropic's post is blunt: find the simplest solution possible and add complexity only when it demonstrably improves results. Workflows are predictable and cheap to test; agents are flexible and expensive. The right column maps each pattern to a cell the students will run on real Claude models in notebook 03. Class question: a support bot that must answer billing, shipping and returns questions - workflow or agent, and which pattern?</a:t>
             </a:r>
           </a:p>
         </p:txBody>
@@ -1781,7 +1923,7 @@
           <a:lstStyle/>
           <a:p>
             <a:r>
-              <a:t>Students know unit tests; an eval is the same idea for a system that is not deterministic, so you measure a rate over many cases instead of one pass/fail. Outcome grading asks whether the answer is right; trajectory grading asks whether the steps were reasonable - a right answer reached by guessing is a failure waiting to happen. Code graders are cheap and exact; LLM judges are flexible but drift, so you calibrate them on human-labelled examples. Ask the class: what would the grader be for 'the agent must never run code'?</a:t>
+              <a:t>Students know unit tests; an eval is the same idea for a system that is not deterministic, so you measure a rate over many cases instead of one pass/fail. Outcome grading asks whether the answer is right; trajectory grading asks whether the steps were reasonable - a right answer reached by guessing is a failure waiting to happen. Code graders are cheap and exact; LLM judges are flexible but drift, so you calibrate them on human-labelled examples. Class question: what would the grader be for 'the agent must never run code'?</a:t>
             </a:r>
           </a:p>
         </p:txBody>
@@ -1851,7 +1993,7 @@
           <a:lstStyle/>
           <a:p>
             <a:r>
-              <a:t>Every run in the notebooks ends with result.trace.show(): one line per event with the turn number, the kind, who acted and what happened. That is observability at teaching scale; in production the same record goes to a tracing tool. The right column is why you bother: you cannot price, debug or compare what you did not record. Ask the class: a run cost ten times more than yesterday - which three lines of the trace would you read first?</a:t>
+              <a:t>Every run in the notebooks ends with result.trace.show(): one line per event with the turn number, the kind, who acted and what happened, and the token counts are the ones the API returned, not estimates. That is observability at teaching scale; in production the same record goes to a tracing tool. The right column is why you bother: you cannot price, debug or compare what you did not record. Class question: a run cost ten times more than yesterday - which three lines of the trace would you read first?</a:t>
             </a:r>
           </a:p>
         </p:txBody>
@@ -5060,7 +5202,7 @@
                 </a:solidFill>
                 <a:latin typeface="Arial"/>
               </a:rPr>
-              <a:t>Sessions 1 and 2 named the pieces. Today we assemble them: a loop that knows when to stop, guards that run outside the model, five workflow patterns, and an eval suite that puts a number on every change. Then notebook 03 runs the same model through three harnesses.</a:t>
+              <a:t>Sessions 1 and 2 named the pieces. Today we assemble them: a loop that knows when to stop, guards that run outside the model, five workflow patterns, and an eval suite that puts a number on every change. Then notebook 03 runs one real model through three harnesses on this repository and reads the scoreboard honestly.</a:t>
             </a:r>
           </a:p>
         </p:txBody>
@@ -6742,7 +6884,7 @@
                 </a:solidFill>
                 <a:latin typeface="Arial"/>
               </a:rPr>
-              <a:t>Patterns you can run, a validator that retries, and an eval suite that puts a number and a price on three configurations of one harness.</a:t>
+              <a:t>A readable package, three recorded exits, guardrails that fired for real, five patterns with a price, and an eval suite of fourteen cases run live on Claude - then the failures, read honestly.</a:t>
             </a:r>
           </a:p>
         </p:txBody>
@@ -6968,7 +7110,7 @@
                 </a:solidFill>
                 <a:latin typeface="Arial"/>
               </a:rPr>
-              <a:t>NOTEBOOK 03 - HOOKS</a:t>
+              <a:t>NOTEBOOK 03 - THE PACKAGE</a:t>
             </a:r>
           </a:p>
         </p:txBody>
@@ -7008,7 +7150,7 @@
                 </a:solidFill>
                 <a:latin typeface="Arial"/>
               </a:rPr>
-              <a:t>Checkpoint 3 in action: the validator rejects, the loop retries</a:t>
+              <a:t>The harness package: eight short files, one per piece of the car</a:t>
             </a:r>
           </a:p>
         </p:txBody>
@@ -7057,2818 +7199,6 @@
           </a:p>
         </p:txBody>
       </p:sp>
-      <p:sp>
-        <p:nvSpPr>
-          <p:cNvPr id="7" name="TextBox 6"/>
-          <p:cNvSpPr txBox="1"/>
-          <p:nvPr/>
-        </p:nvSpPr>
-        <p:spPr>
-          <a:xfrm>
-            <a:off x="548640" y="1874519"/>
-            <a:ext cx="4297680" cy="4206240"/>
-          </a:xfrm>
-          <a:prstGeom prst="rect">
-            <a:avLst/>
-          </a:prstGeom>
-          <a:noFill/>
-        </p:spPr>
-        <p:txBody>
-          <a:bodyPr wrap="square">
-            <a:spAutoFit/>
-          </a:bodyPr>
-          <a:lstStyle/>
-          <a:p>
-            <a:pPr algn="l" indent="-228600" marL="228600">
-              <a:spcAft>
-                <a:spcPts val="800"/>
-              </a:spcAft>
-              <a:buClr>
-                <a:srgbClr val="1E5EF3"/>
-              </a:buClr>
-              <a:buChar char="—"/>
-            </a:pPr>
-            <a:r>
-              <a:rPr sz="1450" b="0">
-                <a:solidFill>
-                  <a:srgbClr val="202B38"/>
-                </a:solidFill>
-                <a:latin typeface="Arial"/>
-              </a:rPr>
-              <a:t>How to read it: one row per trace event - turn, kind, who, what</a:t>
-            </a:r>
-          </a:p>
-          <a:p>
-            <a:pPr algn="l" indent="-228600" marL="228600">
-              <a:spcAft>
-                <a:spcPts val="800"/>
-              </a:spcAft>
-              <a:buClr>
-                <a:srgbClr val="1E5EF3"/>
-              </a:buClr>
-              <a:buChar char="—"/>
-            </a:pPr>
-            <a:r>
-              <a:rPr sz="1450" b="0">
-                <a:solidFill>
-                  <a:srgbClr val="202B38"/>
-                </a:solidFill>
-                <a:latin typeface="Arial"/>
-              </a:rPr>
-              <a:t>Turn 1: a lazy policy answers from memory, no source; the validator rejects it</a:t>
-            </a:r>
-          </a:p>
-          <a:p>
-            <a:pPr algn="l" indent="-228600" marL="228600">
-              <a:spcAft>
-                <a:spcPts val="800"/>
-              </a:spcAft>
-              <a:buClr>
-                <a:srgbClr val="1E5EF3"/>
-              </a:buClr>
-              <a:buChar char="—"/>
-            </a:pPr>
-            <a:r>
-              <a:rPr sz="1450" b="0">
-                <a:solidFill>
-                  <a:srgbClr val="202B38"/>
-                </a:solidFill>
-                <a:latin typeface="Arial"/>
-              </a:rPr>
-              <a:t>The harness appends 'Your answer was rejected ... Fix it and answer again'</a:t>
-            </a:r>
-          </a:p>
-          <a:p>
-            <a:pPr algn="l" indent="-228600" marL="228600">
-              <a:spcAft>
-                <a:spcPts val="800"/>
-              </a:spcAft>
-              <a:buClr>
-                <a:srgbClr val="1E5EF3"/>
-              </a:buClr>
-              <a:buChar char="—"/>
-            </a:pPr>
-            <a:r>
-              <a:rPr sz="1450" b="0">
-                <a:solidFill>
-                  <a:srgbClr val="202B38"/>
-                </a:solidFill>
-                <a:latin typeface="Arial"/>
-              </a:rPr>
-              <a:t>Turns 2-5: the model searches, reads, checks and answers with a citation</a:t>
-            </a:r>
-          </a:p>
-          <a:p>
-            <a:pPr algn="l" indent="-228600" marL="228600">
-              <a:spcAft>
-                <a:spcPts val="800"/>
-              </a:spcAft>
-              <a:buClr>
-                <a:srgbClr val="1E5EF3"/>
-              </a:buClr>
-              <a:buChar char="—"/>
-            </a:pPr>
-            <a:r>
-              <a:rPr sz="1450" b="0">
-                <a:solidFill>
-                  <a:srgbClr val="202B38"/>
-                </a:solidFill>
-                <a:latin typeface="Arial"/>
-              </a:rPr>
-              <a:t>Whole run: 5 model calls, 3 tool calls, ~2,163 tokens; stopped_because = 'done'</a:t>
-            </a:r>
-          </a:p>
-          <a:p>
-            <a:pPr algn="l" indent="-228600" marL="228600">
-              <a:spcAft>
-                <a:spcPts val="800"/>
-              </a:spcAft>
-              <a:buClr>
-                <a:srgbClr val="1E5EF3"/>
-              </a:buClr>
-              <a:buChar char="—"/>
-            </a:pPr>
-            <a:r>
-              <a:rPr sz="1450" b="0">
-                <a:solidFill>
-                  <a:srgbClr val="202B38"/>
-                </a:solidFill>
-                <a:latin typeface="Arial"/>
-              </a:rPr>
-              <a:t>A bare model with the same validator: 2 calls, ~73 tokens, still wrong - a guard cannot add ability</a:t>
-            </a:r>
-          </a:p>
-        </p:txBody>
-      </p:sp>
-      <p:pic>
-        <p:nvPicPr>
-          <p:cNvPr id="8" name="Picture 7" descr="s3_validator_trace.png"/>
-          <p:cNvPicPr>
-            <a:picLocks noChangeAspect="1"/>
-          </p:cNvPicPr>
-          <p:nvPr/>
-        </p:nvPicPr>
-        <p:blipFill>
-          <a:blip r:embed="rId2"/>
-          <a:stretch>
-            <a:fillRect/>
-          </a:stretch>
-        </p:blipFill>
-        <p:spPr>
-          <a:xfrm>
-            <a:off x="5120640" y="1874519"/>
-            <a:ext cx="6492240" cy="4105077"/>
-          </a:xfrm>
-          <a:prstGeom prst="rect">
-            <a:avLst/>
-          </a:prstGeom>
-        </p:spPr>
-      </p:pic>
-      <p:sp>
-        <p:nvSpPr>
-          <p:cNvPr id="9" name="TextBox 8"/>
-          <p:cNvSpPr txBox="1"/>
-          <p:nvPr/>
-        </p:nvSpPr>
-        <p:spPr>
-          <a:xfrm>
-            <a:off x="5120640" y="6062471"/>
-            <a:ext cx="6492240" cy="365760"/>
-          </a:xfrm>
-          <a:prstGeom prst="rect">
-            <a:avLst/>
-          </a:prstGeom>
-          <a:noFill/>
-        </p:spPr>
-        <p:txBody>
-          <a:bodyPr wrap="square">
-            <a:spAutoFit/>
-          </a:bodyPr>
-          <a:lstStyle/>
-          <a:p>
-            <a:pPr algn="ctr">
-              <a:spcAft>
-                <a:spcPts val="600"/>
-              </a:spcAft>
-              <a:buNone/>
-            </a:pPr>
-            <a:r>
-              <a:rPr sz="1100" b="0">
-                <a:solidFill>
-                  <a:srgbClr val="5B6774"/>
-                </a:solidFill>
-                <a:latin typeface="Arial"/>
-              </a:rPr>
-              <a:t>Notebook 03 reference run on the deterministic stand-in (the live Claude run varies and reports real tokens); trace condensed, turns 2-4 folded into one row.</a:t>
-            </a:r>
-          </a:p>
-        </p:txBody>
-      </p:sp>
-      <p:sp>
-        <p:nvSpPr>
-          <p:cNvPr id="10" name="TextBox 9"/>
-          <p:cNvSpPr txBox="1"/>
-          <p:nvPr/>
-        </p:nvSpPr>
-        <p:spPr>
-          <a:xfrm>
-            <a:off x="548640" y="6473952"/>
-            <a:ext cx="7315200" cy="292608"/>
-          </a:xfrm>
-          <a:prstGeom prst="rect">
-            <a:avLst/>
-          </a:prstGeom>
-          <a:noFill/>
-        </p:spPr>
-        <p:txBody>
-          <a:bodyPr wrap="square">
-            <a:spAutoFit/>
-          </a:bodyPr>
-          <a:lstStyle/>
-          <a:p>
-            <a:pPr algn="l">
-              <a:spcAft>
-                <a:spcPts val="600"/>
-              </a:spcAft>
-              <a:buNone/>
-            </a:pPr>
-            <a:r>
-              <a:rPr sz="900" b="0">
-                <a:solidFill>
-                  <a:srgbClr val="5B6774"/>
-                </a:solidFill>
-                <a:latin typeface="Arial"/>
-              </a:rPr>
-              <a:t>M5 Session 3 - Building a Harness</a:t>
-            </a:r>
-          </a:p>
-        </p:txBody>
-      </p:sp>
-      <p:sp>
-        <p:nvSpPr>
-          <p:cNvPr id="11" name="TextBox 10"/>
-          <p:cNvSpPr txBox="1"/>
-          <p:nvPr/>
-        </p:nvSpPr>
-        <p:spPr>
-          <a:xfrm>
-            <a:off x="11292840" y="6473952"/>
-            <a:ext cx="548640" cy="292608"/>
-          </a:xfrm>
-          <a:prstGeom prst="rect">
-            <a:avLst/>
-          </a:prstGeom>
-          <a:noFill/>
-        </p:spPr>
-        <p:txBody>
-          <a:bodyPr wrap="square">
-            <a:spAutoFit/>
-          </a:bodyPr>
-          <a:lstStyle/>
-          <a:p>
-            <a:pPr algn="r">
-              <a:spcAft>
-                <a:spcPts val="600"/>
-              </a:spcAft>
-              <a:buNone/>
-            </a:pPr>
-            <a:r>
-              <a:rPr sz="900" b="0">
-                <a:solidFill>
-                  <a:srgbClr val="5B6774"/>
-                </a:solidFill>
-                <a:latin typeface="Arial"/>
-              </a:rPr>
-              <a:t>14</a:t>
-            </a:r>
-          </a:p>
-        </p:txBody>
-      </p:sp>
-    </p:spTree>
-  </p:cSld>
-  <p:clrMapOvr>
-    <a:masterClrMapping/>
-  </p:clrMapOvr>
-</p:sld>
-</file>
-
-<file path=ppt/slides/slide15.xml><?xml version="1.0" encoding="utf-8"?>
-<p:sld xmlns:a="http://schemas.openxmlformats.org/drawingml/2006/main" xmlns:p="http://schemas.openxmlformats.org/presentationml/2006/main" xmlns:r="http://schemas.openxmlformats.org/officeDocument/2006/relationships">
-  <p:cSld>
-    <p:spTree>
-      <p:nvGrpSpPr>
-        <p:cNvPr id="1" name=""/>
-        <p:cNvGrpSpPr/>
-        <p:nvPr/>
-      </p:nvGrpSpPr>
-      <p:grpSpPr/>
-      <p:sp>
-        <p:nvSpPr>
-          <p:cNvPr id="2" name="Rectangle 1"/>
-          <p:cNvSpPr/>
-          <p:nvPr/>
-        </p:nvSpPr>
-        <p:spPr>
-          <a:xfrm>
-            <a:off x="0" y="0"/>
-            <a:ext cx="12191695" cy="6858000"/>
-          </a:xfrm>
-          <a:prstGeom prst="rect">
-            <a:avLst/>
-          </a:prstGeom>
-          <a:solidFill>
-            <a:srgbClr val="FFFFFF"/>
-          </a:solidFill>
-          <a:ln>
-            <a:noFill/>
-          </a:ln>
-          <a:effectLst/>
-        </p:spPr>
-        <p:style>
-          <a:lnRef idx="1">
-            <a:schemeClr val="accent1"/>
-          </a:lnRef>
-          <a:fillRef idx="3">
-            <a:schemeClr val="accent1"/>
-          </a:fillRef>
-          <a:effectRef idx="2">
-            <a:schemeClr val="accent1"/>
-          </a:effectRef>
-          <a:fontRef idx="minor">
-            <a:schemeClr val="lt1"/>
-          </a:fontRef>
-        </p:style>
-        <p:txBody>
-          <a:bodyPr rtlCol="0" anchor="ctr"/>
-          <a:lstStyle/>
-          <a:p>
-            <a:pPr algn="ctr"/>
-          </a:p>
-        </p:txBody>
-      </p:sp>
-      <p:sp>
-        <p:nvSpPr>
-          <p:cNvPr id="3" name="Rectangle 2"/>
-          <p:cNvSpPr/>
-          <p:nvPr/>
-        </p:nvSpPr>
-        <p:spPr>
-          <a:xfrm>
-            <a:off x="548640" y="475488"/>
-            <a:ext cx="457200" cy="54864"/>
-          </a:xfrm>
-          <a:prstGeom prst="rect">
-            <a:avLst/>
-          </a:prstGeom>
-          <a:solidFill>
-            <a:srgbClr val="1E5EF3"/>
-          </a:solidFill>
-          <a:ln>
-            <a:noFill/>
-          </a:ln>
-          <a:effectLst/>
-        </p:spPr>
-        <p:style>
-          <a:lnRef idx="1">
-            <a:schemeClr val="accent1"/>
-          </a:lnRef>
-          <a:fillRef idx="3">
-            <a:schemeClr val="accent1"/>
-          </a:fillRef>
-          <a:effectRef idx="2">
-            <a:schemeClr val="accent1"/>
-          </a:effectRef>
-          <a:fontRef idx="minor">
-            <a:schemeClr val="lt1"/>
-          </a:fontRef>
-        </p:style>
-        <p:txBody>
-          <a:bodyPr rtlCol="0" anchor="ctr"/>
-          <a:lstStyle/>
-          <a:p>
-            <a:pPr algn="ctr"/>
-          </a:p>
-        </p:txBody>
-      </p:sp>
-      <p:sp>
-        <p:nvSpPr>
-          <p:cNvPr id="4" name="TextBox 3"/>
-          <p:cNvSpPr txBox="1"/>
-          <p:nvPr/>
-        </p:nvSpPr>
-        <p:spPr>
-          <a:xfrm>
-            <a:off x="548640" y="603504"/>
-            <a:ext cx="11091672" cy="274320"/>
-          </a:xfrm>
-          <a:prstGeom prst="rect">
-            <a:avLst/>
-          </a:prstGeom>
-          <a:noFill/>
-        </p:spPr>
-        <p:txBody>
-          <a:bodyPr wrap="square">
-            <a:spAutoFit/>
-          </a:bodyPr>
-          <a:lstStyle/>
-          <a:p>
-            <a:pPr algn="l">
-              <a:spcAft>
-                <a:spcPts val="600"/>
-              </a:spcAft>
-              <a:buNone/>
-            </a:pPr>
-            <a:r>
-              <a:rPr sz="1100" b="1">
-                <a:solidFill>
-                  <a:srgbClr val="1E5EF3"/>
-                </a:solidFill>
-                <a:latin typeface="Arial"/>
-              </a:rPr>
-              <a:t>NOTEBOOK 03 - PATTERNS.ROUTE</a:t>
-            </a:r>
-          </a:p>
-        </p:txBody>
-      </p:sp>
-      <p:sp>
-        <p:nvSpPr>
-          <p:cNvPr id="5" name="TextBox 4"/>
-          <p:cNvSpPr txBox="1"/>
-          <p:nvPr/>
-        </p:nvSpPr>
-        <p:spPr>
-          <a:xfrm>
-            <a:off x="548640" y="868680"/>
-            <a:ext cx="11091672" cy="777240"/>
-          </a:xfrm>
-          <a:prstGeom prst="rect">
-            <a:avLst/>
-          </a:prstGeom>
-          <a:noFill/>
-        </p:spPr>
-        <p:txBody>
-          <a:bodyPr wrap="square">
-            <a:spAutoFit/>
-          </a:bodyPr>
-          <a:lstStyle/>
-          <a:p>
-            <a:pPr algn="l">
-              <a:spcAft>
-                <a:spcPts val="0"/>
-              </a:spcAft>
-              <a:buNone/>
-            </a:pPr>
-            <a:r>
-              <a:rPr sz="2600" b="1">
-                <a:solidFill>
-                  <a:srgbClr val="0A2540"/>
-                </a:solidFill>
-                <a:latin typeface="Arial"/>
-              </a:rPr>
-              <a:t>Routing sends each question to the agent built for it</a:t>
-            </a:r>
-          </a:p>
-        </p:txBody>
-      </p:sp>
-      <p:sp>
-        <p:nvSpPr>
-          <p:cNvPr id="6" name="Rectangle 5"/>
-          <p:cNvSpPr/>
-          <p:nvPr/>
-        </p:nvSpPr>
-        <p:spPr>
-          <a:xfrm>
-            <a:off x="548640" y="1664208"/>
-            <a:ext cx="11091672" cy="12801"/>
-          </a:xfrm>
-          <a:prstGeom prst="rect">
-            <a:avLst/>
-          </a:prstGeom>
-          <a:solidFill>
-            <a:srgbClr val="B9D0FA"/>
-          </a:solidFill>
-          <a:ln>
-            <a:noFill/>
-          </a:ln>
-          <a:effectLst/>
-        </p:spPr>
-        <p:style>
-          <a:lnRef idx="1">
-            <a:schemeClr val="accent1"/>
-          </a:lnRef>
-          <a:fillRef idx="3">
-            <a:schemeClr val="accent1"/>
-          </a:fillRef>
-          <a:effectRef idx="2">
-            <a:schemeClr val="accent1"/>
-          </a:effectRef>
-          <a:fontRef idx="minor">
-            <a:schemeClr val="lt1"/>
-          </a:fontRef>
-        </p:style>
-        <p:txBody>
-          <a:bodyPr rtlCol="0" anchor="ctr"/>
-          <a:lstStyle/>
-          <a:p>
-            <a:pPr algn="ctr"/>
-          </a:p>
-        </p:txBody>
-      </p:sp>
-      <p:sp>
-        <p:nvSpPr>
-          <p:cNvPr id="7" name="TextBox 6"/>
-          <p:cNvSpPr txBox="1"/>
-          <p:nvPr/>
-        </p:nvSpPr>
-        <p:spPr>
-          <a:xfrm>
-            <a:off x="548640" y="1874519"/>
-            <a:ext cx="4297680" cy="4206240"/>
-          </a:xfrm>
-          <a:prstGeom prst="rect">
-            <a:avLst/>
-          </a:prstGeom>
-          <a:noFill/>
-        </p:spPr>
-        <p:txBody>
-          <a:bodyPr wrap="square">
-            <a:spAutoFit/>
-          </a:bodyPr>
-          <a:lstStyle/>
-          <a:p>
-            <a:pPr algn="l" indent="-228600" marL="228600">
-              <a:spcAft>
-                <a:spcPts val="800"/>
-              </a:spcAft>
-              <a:buClr>
-                <a:srgbClr val="1E5EF3"/>
-              </a:buClr>
-              <a:buChar char="—"/>
-            </a:pPr>
-            <a:r>
-              <a:rPr sz="1450" b="0">
-                <a:solidFill>
-                  <a:srgbClr val="202B38"/>
-                </a:solidFill>
-                <a:latin typeface="Arial"/>
-              </a:rPr>
-              <a:t>How to read it: a cheap classifier picks a label; each label owns a specialist agent</a:t>
-            </a:r>
-          </a:p>
-          <a:p>
-            <a:pPr algn="l" indent="-228600" marL="228600">
-              <a:spcAft>
-                <a:spcPts val="800"/>
-              </a:spcAft>
-              <a:buClr>
-                <a:srgbClr val="1E5EF3"/>
-              </a:buClr>
-              <a:buChar char="—"/>
-            </a:pPr>
-            <a:r>
-              <a:rPr sz="1450" b="0">
-                <a:solidFill>
-                  <a:srgbClr val="202B38"/>
-                </a:solidFill>
-                <a:latin typeface="Arial"/>
-              </a:rPr>
-              <a:t>'What is (891 - 179) / 891?' -&gt; calculation -&gt; calculator tool -&gt; 0.799102</a:t>
-            </a:r>
-          </a:p>
-          <a:p>
-            <a:pPr algn="l" indent="-228600" marL="228600">
-              <a:spcAft>
-                <a:spcPts val="800"/>
-              </a:spcAft>
-              <a:buClr>
-                <a:srgbClr val="1E5EF3"/>
-              </a:buClr>
-              <a:buChar char="—"/>
-            </a:pPr>
-            <a:r>
-              <a:rPr sz="1450" b="0">
-                <a:solidFill>
-                  <a:srgbClr val="202B38"/>
-                </a:solidFill>
-                <a:latin typeface="Arial"/>
-              </a:rPr>
-              <a:t>'When was function calling introduced by OpenAI?' -&gt; research -&gt; 13 June 2023, cited</a:t>
-            </a:r>
-          </a:p>
-          <a:p>
-            <a:pPr algn="l" indent="-228600" marL="228600">
-              <a:spcAft>
-                <a:spcPts val="800"/>
-              </a:spcAft>
-              <a:buClr>
-                <a:srgbClr val="1E5EF3"/>
-              </a:buClr>
-              <a:buChar char="—"/>
-            </a:pPr>
-            <a:r>
-              <a:rPr sz="1450" b="0">
-                <a:solidFill>
-                  <a:srgbClr val="202B38"/>
-                </a:solidFill>
-                <a:latin typeface="Arial"/>
-              </a:rPr>
-              <a:t>The router never answers; it only chooses. Small model, big saving</a:t>
-            </a:r>
-          </a:p>
-          <a:p>
-            <a:pPr algn="l" indent="-228600" marL="228600">
-              <a:spcAft>
-                <a:spcPts val="800"/>
-              </a:spcAft>
-              <a:buClr>
-                <a:srgbClr val="1E5EF3"/>
-              </a:buClr>
-              <a:buChar char="—"/>
-            </a:pPr>
-            <a:r>
-              <a:rPr sz="1450" b="0">
-                <a:solidFill>
-                  <a:srgbClr val="202B38"/>
-                </a:solidFill>
-                <a:latin typeface="Arial"/>
-              </a:rPr>
-              <a:t>In plain words: a signpost at the junction - each road has its own driver</a:t>
-            </a:r>
-          </a:p>
-        </p:txBody>
-      </p:sp>
-      <p:pic>
-        <p:nvPicPr>
-          <p:cNvPr id="8" name="Picture 7" descr="s3_routing.png"/>
-          <p:cNvPicPr>
-            <a:picLocks noChangeAspect="1"/>
-          </p:cNvPicPr>
-          <p:nvPr/>
-        </p:nvPicPr>
-        <p:blipFill>
-          <a:blip r:embed="rId2"/>
-          <a:stretch>
-            <a:fillRect/>
-          </a:stretch>
-        </p:blipFill>
-        <p:spPr>
-          <a:xfrm>
-            <a:off x="5136721" y="1874519"/>
-            <a:ext cx="6460077" cy="4114800"/>
-          </a:xfrm>
-          <a:prstGeom prst="rect">
-            <a:avLst/>
-          </a:prstGeom>
-        </p:spPr>
-      </p:pic>
-      <p:sp>
-        <p:nvSpPr>
-          <p:cNvPr id="9" name="TextBox 8"/>
-          <p:cNvSpPr txBox="1"/>
-          <p:nvPr/>
-        </p:nvSpPr>
-        <p:spPr>
-          <a:xfrm>
-            <a:off x="5120640" y="6062471"/>
-            <a:ext cx="6492240" cy="365760"/>
-          </a:xfrm>
-          <a:prstGeom prst="rect">
-            <a:avLst/>
-          </a:prstGeom>
-          <a:noFill/>
-        </p:spPr>
-        <p:txBody>
-          <a:bodyPr wrap="square">
-            <a:spAutoFit/>
-          </a:bodyPr>
-          <a:lstStyle/>
-          <a:p>
-            <a:pPr algn="ctr">
-              <a:spcAft>
-                <a:spcPts val="600"/>
-              </a:spcAft>
-              <a:buNone/>
-            </a:pPr>
-            <a:r>
-              <a:rPr sz="1100" b="0">
-                <a:solidFill>
-                  <a:srgbClr val="5B6774"/>
-                </a:solidFill>
-                <a:latin typeface="Arial"/>
-              </a:rPr>
-              <a:t>patterns.route() in notebook 03, reference run on the stand-in; live Claude varies. Labels: calculation, research, general. Anthropic, Building effective agents, Dec 2024.</a:t>
-            </a:r>
-          </a:p>
-        </p:txBody>
-      </p:sp>
-      <p:sp>
-        <p:nvSpPr>
-          <p:cNvPr id="10" name="TextBox 9"/>
-          <p:cNvSpPr txBox="1"/>
-          <p:nvPr/>
-        </p:nvSpPr>
-        <p:spPr>
-          <a:xfrm>
-            <a:off x="548640" y="6473952"/>
-            <a:ext cx="7315200" cy="292608"/>
-          </a:xfrm>
-          <a:prstGeom prst="rect">
-            <a:avLst/>
-          </a:prstGeom>
-          <a:noFill/>
-        </p:spPr>
-        <p:txBody>
-          <a:bodyPr wrap="square">
-            <a:spAutoFit/>
-          </a:bodyPr>
-          <a:lstStyle/>
-          <a:p>
-            <a:pPr algn="l">
-              <a:spcAft>
-                <a:spcPts val="600"/>
-              </a:spcAft>
-              <a:buNone/>
-            </a:pPr>
-            <a:r>
-              <a:rPr sz="900" b="0">
-                <a:solidFill>
-                  <a:srgbClr val="5B6774"/>
-                </a:solidFill>
-                <a:latin typeface="Arial"/>
-              </a:rPr>
-              <a:t>M5 Session 3 - Building a Harness</a:t>
-            </a:r>
-          </a:p>
-        </p:txBody>
-      </p:sp>
-      <p:sp>
-        <p:nvSpPr>
-          <p:cNvPr id="11" name="TextBox 10"/>
-          <p:cNvSpPr txBox="1"/>
-          <p:nvPr/>
-        </p:nvSpPr>
-        <p:spPr>
-          <a:xfrm>
-            <a:off x="11292840" y="6473952"/>
-            <a:ext cx="548640" cy="292608"/>
-          </a:xfrm>
-          <a:prstGeom prst="rect">
-            <a:avLst/>
-          </a:prstGeom>
-          <a:noFill/>
-        </p:spPr>
-        <p:txBody>
-          <a:bodyPr wrap="square">
-            <a:spAutoFit/>
-          </a:bodyPr>
-          <a:lstStyle/>
-          <a:p>
-            <a:pPr algn="r">
-              <a:spcAft>
-                <a:spcPts val="600"/>
-              </a:spcAft>
-              <a:buNone/>
-            </a:pPr>
-            <a:r>
-              <a:rPr sz="900" b="0">
-                <a:solidFill>
-                  <a:srgbClr val="5B6774"/>
-                </a:solidFill>
-                <a:latin typeface="Arial"/>
-              </a:rPr>
-              <a:t>15</a:t>
-            </a:r>
-          </a:p>
-        </p:txBody>
-      </p:sp>
-    </p:spTree>
-  </p:cSld>
-  <p:clrMapOvr>
-    <a:masterClrMapping/>
-  </p:clrMapOvr>
-</p:sld>
-</file>
-
-<file path=ppt/slides/slide16.xml><?xml version="1.0" encoding="utf-8"?>
-<p:sld xmlns:a="http://schemas.openxmlformats.org/drawingml/2006/main" xmlns:p="http://schemas.openxmlformats.org/presentationml/2006/main" xmlns:r="http://schemas.openxmlformats.org/officeDocument/2006/relationships">
-  <p:cSld>
-    <p:spTree>
-      <p:nvGrpSpPr>
-        <p:cNvPr id="1" name=""/>
-        <p:cNvGrpSpPr/>
-        <p:nvPr/>
-      </p:nvGrpSpPr>
-      <p:grpSpPr/>
-      <p:sp>
-        <p:nvSpPr>
-          <p:cNvPr id="2" name="Rectangle 1"/>
-          <p:cNvSpPr/>
-          <p:nvPr/>
-        </p:nvSpPr>
-        <p:spPr>
-          <a:xfrm>
-            <a:off x="0" y="0"/>
-            <a:ext cx="12191695" cy="6858000"/>
-          </a:xfrm>
-          <a:prstGeom prst="rect">
-            <a:avLst/>
-          </a:prstGeom>
-          <a:solidFill>
-            <a:srgbClr val="FFFFFF"/>
-          </a:solidFill>
-          <a:ln>
-            <a:noFill/>
-          </a:ln>
-          <a:effectLst/>
-        </p:spPr>
-        <p:style>
-          <a:lnRef idx="1">
-            <a:schemeClr val="accent1"/>
-          </a:lnRef>
-          <a:fillRef idx="3">
-            <a:schemeClr val="accent1"/>
-          </a:fillRef>
-          <a:effectRef idx="2">
-            <a:schemeClr val="accent1"/>
-          </a:effectRef>
-          <a:fontRef idx="minor">
-            <a:schemeClr val="lt1"/>
-          </a:fontRef>
-        </p:style>
-        <p:txBody>
-          <a:bodyPr rtlCol="0" anchor="ctr"/>
-          <a:lstStyle/>
-          <a:p>
-            <a:pPr algn="ctr"/>
-          </a:p>
-        </p:txBody>
-      </p:sp>
-      <p:sp>
-        <p:nvSpPr>
-          <p:cNvPr id="3" name="Rectangle 2"/>
-          <p:cNvSpPr/>
-          <p:nvPr/>
-        </p:nvSpPr>
-        <p:spPr>
-          <a:xfrm>
-            <a:off x="548640" y="475488"/>
-            <a:ext cx="457200" cy="54864"/>
-          </a:xfrm>
-          <a:prstGeom prst="rect">
-            <a:avLst/>
-          </a:prstGeom>
-          <a:solidFill>
-            <a:srgbClr val="1E5EF3"/>
-          </a:solidFill>
-          <a:ln>
-            <a:noFill/>
-          </a:ln>
-          <a:effectLst/>
-        </p:spPr>
-        <p:style>
-          <a:lnRef idx="1">
-            <a:schemeClr val="accent1"/>
-          </a:lnRef>
-          <a:fillRef idx="3">
-            <a:schemeClr val="accent1"/>
-          </a:fillRef>
-          <a:effectRef idx="2">
-            <a:schemeClr val="accent1"/>
-          </a:effectRef>
-          <a:fontRef idx="minor">
-            <a:schemeClr val="lt1"/>
-          </a:fontRef>
-        </p:style>
-        <p:txBody>
-          <a:bodyPr rtlCol="0" anchor="ctr"/>
-          <a:lstStyle/>
-          <a:p>
-            <a:pPr algn="ctr"/>
-          </a:p>
-        </p:txBody>
-      </p:sp>
-      <p:sp>
-        <p:nvSpPr>
-          <p:cNvPr id="4" name="TextBox 3"/>
-          <p:cNvSpPr txBox="1"/>
-          <p:nvPr/>
-        </p:nvSpPr>
-        <p:spPr>
-          <a:xfrm>
-            <a:off x="548640" y="603504"/>
-            <a:ext cx="11091672" cy="274320"/>
-          </a:xfrm>
-          <a:prstGeom prst="rect">
-            <a:avLst/>
-          </a:prstGeom>
-          <a:noFill/>
-        </p:spPr>
-        <p:txBody>
-          <a:bodyPr wrap="square">
-            <a:spAutoFit/>
-          </a:bodyPr>
-          <a:lstStyle/>
-          <a:p>
-            <a:pPr algn="l">
-              <a:spcAft>
-                <a:spcPts val="600"/>
-              </a:spcAft>
-              <a:buNone/>
-            </a:pPr>
-            <a:r>
-              <a:rPr sz="1100" b="1">
-                <a:solidFill>
-                  <a:srgbClr val="1E5EF3"/>
-                </a:solidFill>
-                <a:latin typeface="Arial"/>
-              </a:rPr>
-              <a:t>NOTEBOOK 03 - THE A/B/C EVAL</a:t>
-            </a:r>
-          </a:p>
-        </p:txBody>
-      </p:sp>
-      <p:sp>
-        <p:nvSpPr>
-          <p:cNvPr id="5" name="TextBox 4"/>
-          <p:cNvSpPr txBox="1"/>
-          <p:nvPr/>
-        </p:nvSpPr>
-        <p:spPr>
-          <a:xfrm>
-            <a:off x="548640" y="868680"/>
-            <a:ext cx="11091672" cy="777240"/>
-          </a:xfrm>
-          <a:prstGeom prst="rect">
-            <a:avLst/>
-          </a:prstGeom>
-          <a:noFill/>
-        </p:spPr>
-        <p:txBody>
-          <a:bodyPr wrap="square">
-            <a:spAutoFit/>
-          </a:bodyPr>
-          <a:lstStyle/>
-          <a:p>
-            <a:pPr algn="l">
-              <a:spcAft>
-                <a:spcPts val="0"/>
-              </a:spcAft>
-              <a:buNone/>
-            </a:pPr>
-            <a:r>
-              <a:rPr sz="2600" b="1">
-                <a:solidFill>
-                  <a:srgbClr val="0A2540"/>
-                </a:solidFill>
-                <a:latin typeface="Arial"/>
-              </a:rPr>
-              <a:t>Same model, three harnesses: 0%, 91.7%, 100% on twelve cases</a:t>
-            </a:r>
-          </a:p>
-        </p:txBody>
-      </p:sp>
-      <p:sp>
-        <p:nvSpPr>
-          <p:cNvPr id="6" name="Rectangle 5"/>
-          <p:cNvSpPr/>
-          <p:nvPr/>
-        </p:nvSpPr>
-        <p:spPr>
-          <a:xfrm>
-            <a:off x="548640" y="1664208"/>
-            <a:ext cx="11091672" cy="12801"/>
-          </a:xfrm>
-          <a:prstGeom prst="rect">
-            <a:avLst/>
-          </a:prstGeom>
-          <a:solidFill>
-            <a:srgbClr val="B9D0FA"/>
-          </a:solidFill>
-          <a:ln>
-            <a:noFill/>
-          </a:ln>
-          <a:effectLst/>
-        </p:spPr>
-        <p:style>
-          <a:lnRef idx="1">
-            <a:schemeClr val="accent1"/>
-          </a:lnRef>
-          <a:fillRef idx="3">
-            <a:schemeClr val="accent1"/>
-          </a:fillRef>
-          <a:effectRef idx="2">
-            <a:schemeClr val="accent1"/>
-          </a:effectRef>
-          <a:fontRef idx="minor">
-            <a:schemeClr val="lt1"/>
-          </a:fontRef>
-        </p:style>
-        <p:txBody>
-          <a:bodyPr rtlCol="0" anchor="ctr"/>
-          <a:lstStyle/>
-          <a:p>
-            <a:pPr algn="ctr"/>
-          </a:p>
-        </p:txBody>
-      </p:sp>
-      <p:sp>
-        <p:nvSpPr>
-          <p:cNvPr id="7" name="TextBox 6"/>
-          <p:cNvSpPr txBox="1"/>
-          <p:nvPr/>
-        </p:nvSpPr>
-        <p:spPr>
-          <a:xfrm>
-            <a:off x="548640" y="1874519"/>
-            <a:ext cx="4297680" cy="4206240"/>
-          </a:xfrm>
-          <a:prstGeom prst="rect">
-            <a:avLst/>
-          </a:prstGeom>
-          <a:noFill/>
-        </p:spPr>
-        <p:txBody>
-          <a:bodyPr wrap="square">
-            <a:spAutoFit/>
-          </a:bodyPr>
-          <a:lstStyle/>
-          <a:p>
-            <a:pPr algn="l" indent="-228600" marL="228600">
-              <a:spcAft>
-                <a:spcPts val="800"/>
-              </a:spcAft>
-              <a:buClr>
-                <a:srgbClr val="1E5EF3"/>
-              </a:buClr>
-              <a:buChar char="—"/>
-            </a:pPr>
-            <a:r>
-              <a:rPr sz="1450" b="0">
-                <a:solidFill>
-                  <a:srgbClr val="202B38"/>
-                </a:solidFill>
-                <a:latin typeface="Arial"/>
-              </a:rPr>
-              <a:t>How to read it: one bar per configuration; length = share of the 12 cases passed</a:t>
-            </a:r>
-          </a:p>
-          <a:p>
-            <a:pPr algn="l" indent="-228600" marL="228600">
-              <a:spcAft>
-                <a:spcPts val="800"/>
-              </a:spcAft>
-              <a:buClr>
-                <a:srgbClr val="1E5EF3"/>
-              </a:buClr>
-              <a:buChar char="—"/>
-            </a:pPr>
-            <a:r>
-              <a:rPr sz="1450" b="0">
-                <a:solidFill>
-                  <a:srgbClr val="202B38"/>
-                </a:solidFill>
-                <a:latin typeface="Arial"/>
-              </a:rPr>
-              <a:t>A, bare model: 0 of 12 - stale memory, no source to cite</a:t>
-            </a:r>
-          </a:p>
-          <a:p>
-            <a:pPr algn="l" indent="-228600" marL="228600">
-              <a:spcAft>
-                <a:spcPts val="800"/>
-              </a:spcAft>
-              <a:buClr>
-                <a:srgbClr val="1E5EF3"/>
-              </a:buClr>
-              <a:buChar char="—"/>
-            </a:pPr>
-            <a:r>
-              <a:rPr sz="1450" b="0">
-                <a:solidFill>
-                  <a:srgbClr val="202B38"/>
-                </a:solidFill>
-                <a:latin typeface="Arial"/>
-              </a:rPr>
-              <a:t>B, tools without verification: 11 of 12 - it searches and reads but never checks</a:t>
-            </a:r>
-          </a:p>
-          <a:p>
-            <a:pPr algn="l" indent="-228600" marL="228600">
-              <a:spcAft>
-                <a:spcPts val="800"/>
-              </a:spcAft>
-              <a:buClr>
-                <a:srgbClr val="1E5EF3"/>
-              </a:buClr>
-              <a:buChar char="—"/>
-            </a:pPr>
-            <a:r>
-              <a:rPr sz="1450" b="0">
-                <a:solidFill>
-                  <a:srgbClr val="202B38"/>
-                </a:solidFill>
-                <a:latin typeface="Arial"/>
-              </a:rPr>
-              <a:t>C, tools + verification: 12 of 12 - check_citation catches the trap</a:t>
-            </a:r>
-          </a:p>
-          <a:p>
-            <a:pPr algn="l" indent="-228600" marL="228600">
-              <a:spcAft>
-                <a:spcPts val="800"/>
-              </a:spcAft>
-              <a:buClr>
-                <a:srgbClr val="1E5EF3"/>
-              </a:buClr>
-              <a:buChar char="—"/>
-            </a:pPr>
-            <a:r>
-              <a:rPr sz="1450" b="0">
-                <a:solidFill>
-                  <a:srgbClr val="202B38"/>
-                </a:solidFill>
-                <a:latin typeface="Arial"/>
-              </a:rPr>
-              <a:t>Only the harness changed; the model and the questions are identical</a:t>
-            </a:r>
-          </a:p>
-          <a:p>
-            <a:pPr algn="l" indent="-228600" marL="228600">
-              <a:spcAft>
-                <a:spcPts val="800"/>
-              </a:spcAft>
-              <a:buClr>
-                <a:srgbClr val="1E5EF3"/>
-              </a:buClr>
-              <a:buChar char="—"/>
-            </a:pPr>
-            <a:r>
-              <a:rPr sz="1450" b="0">
-                <a:solidFill>
-                  <a:srgbClr val="202B38"/>
-                </a:solidFill>
-                <a:latin typeface="Arial"/>
-              </a:rPr>
-              <a:t>The notebook then reruns the same 12 cases on Claude: an eval is run, not assumed</a:t>
-            </a:r>
-          </a:p>
-        </p:txBody>
-      </p:sp>
-      <p:pic>
-        <p:nvPicPr>
-          <p:cNvPr id="8" name="Picture 7" descr="s3_pass_rates.png"/>
-          <p:cNvPicPr>
-            <a:picLocks noChangeAspect="1"/>
-          </p:cNvPicPr>
-          <p:nvPr/>
-        </p:nvPicPr>
-        <p:blipFill>
-          <a:blip r:embed="rId2"/>
-          <a:stretch>
-            <a:fillRect/>
-          </a:stretch>
-        </p:blipFill>
-        <p:spPr>
-          <a:xfrm>
-            <a:off x="5120640" y="1874519"/>
-            <a:ext cx="6492240" cy="3689317"/>
-          </a:xfrm>
-          <a:prstGeom prst="rect">
-            <a:avLst/>
-          </a:prstGeom>
-        </p:spPr>
-      </p:pic>
-      <p:sp>
-        <p:nvSpPr>
-          <p:cNvPr id="9" name="TextBox 8"/>
-          <p:cNvSpPr txBox="1"/>
-          <p:nvPr/>
-        </p:nvSpPr>
-        <p:spPr>
-          <a:xfrm>
-            <a:off x="5120640" y="6062471"/>
-            <a:ext cx="6492240" cy="365760"/>
-          </a:xfrm>
-          <a:prstGeom prst="rect">
-            <a:avLst/>
-          </a:prstGeom>
-          <a:noFill/>
-        </p:spPr>
-        <p:txBody>
-          <a:bodyPr wrap="square">
-            <a:spAutoFit/>
-          </a:bodyPr>
-          <a:lstStyle/>
-          <a:p>
-            <a:pPr algn="ctr">
-              <a:spcAft>
-                <a:spcPts val="600"/>
-              </a:spcAft>
-              <a:buNone/>
-            </a:pPr>
-            <a:r>
-              <a:rPr sz="1100" b="0">
-                <a:solidFill>
-                  <a:srgbClr val="5B6774"/>
-                </a:solidFill>
-                <a:latin typeface="Arial"/>
-              </a:rPr>
-              <a:t>12-case eval suite, notebook 03 (harness.evals.compare); graders contains + cites. Reference run on the deterministic stand-in; the live Claude run varies, real tokens.</a:t>
-            </a:r>
-          </a:p>
-        </p:txBody>
-      </p:sp>
-      <p:sp>
-        <p:nvSpPr>
-          <p:cNvPr id="10" name="TextBox 9"/>
-          <p:cNvSpPr txBox="1"/>
-          <p:nvPr/>
-        </p:nvSpPr>
-        <p:spPr>
-          <a:xfrm>
-            <a:off x="548640" y="6473952"/>
-            <a:ext cx="7315200" cy="292608"/>
-          </a:xfrm>
-          <a:prstGeom prst="rect">
-            <a:avLst/>
-          </a:prstGeom>
-          <a:noFill/>
-        </p:spPr>
-        <p:txBody>
-          <a:bodyPr wrap="square">
-            <a:spAutoFit/>
-          </a:bodyPr>
-          <a:lstStyle/>
-          <a:p>
-            <a:pPr algn="l">
-              <a:spcAft>
-                <a:spcPts val="600"/>
-              </a:spcAft>
-              <a:buNone/>
-            </a:pPr>
-            <a:r>
-              <a:rPr sz="900" b="0">
-                <a:solidFill>
-                  <a:srgbClr val="5B6774"/>
-                </a:solidFill>
-                <a:latin typeface="Arial"/>
-              </a:rPr>
-              <a:t>M5 Session 3 - Building a Harness</a:t>
-            </a:r>
-          </a:p>
-        </p:txBody>
-      </p:sp>
-      <p:sp>
-        <p:nvSpPr>
-          <p:cNvPr id="11" name="TextBox 10"/>
-          <p:cNvSpPr txBox="1"/>
-          <p:nvPr/>
-        </p:nvSpPr>
-        <p:spPr>
-          <a:xfrm>
-            <a:off x="11292840" y="6473952"/>
-            <a:ext cx="548640" cy="292608"/>
-          </a:xfrm>
-          <a:prstGeom prst="rect">
-            <a:avLst/>
-          </a:prstGeom>
-          <a:noFill/>
-        </p:spPr>
-        <p:txBody>
-          <a:bodyPr wrap="square">
-            <a:spAutoFit/>
-          </a:bodyPr>
-          <a:lstStyle/>
-          <a:p>
-            <a:pPr algn="r">
-              <a:spcAft>
-                <a:spcPts val="600"/>
-              </a:spcAft>
-              <a:buNone/>
-            </a:pPr>
-            <a:r>
-              <a:rPr sz="900" b="0">
-                <a:solidFill>
-                  <a:srgbClr val="5B6774"/>
-                </a:solidFill>
-                <a:latin typeface="Arial"/>
-              </a:rPr>
-              <a:t>16</a:t>
-            </a:r>
-          </a:p>
-        </p:txBody>
-      </p:sp>
-    </p:spTree>
-  </p:cSld>
-  <p:clrMapOvr>
-    <a:masterClrMapping/>
-  </p:clrMapOvr>
-</p:sld>
-</file>
-
-<file path=ppt/slides/slide17.xml><?xml version="1.0" encoding="utf-8"?>
-<p:sld xmlns:a="http://schemas.openxmlformats.org/drawingml/2006/main" xmlns:p="http://schemas.openxmlformats.org/presentationml/2006/main" xmlns:r="http://schemas.openxmlformats.org/officeDocument/2006/relationships">
-  <p:cSld>
-    <p:spTree>
-      <p:nvGrpSpPr>
-        <p:cNvPr id="1" name=""/>
-        <p:cNvGrpSpPr/>
-        <p:nvPr/>
-      </p:nvGrpSpPr>
-      <p:grpSpPr/>
-      <p:sp>
-        <p:nvSpPr>
-          <p:cNvPr id="2" name="Rectangle 1"/>
-          <p:cNvSpPr/>
-          <p:nvPr/>
-        </p:nvSpPr>
-        <p:spPr>
-          <a:xfrm>
-            <a:off x="0" y="0"/>
-            <a:ext cx="12191695" cy="6858000"/>
-          </a:xfrm>
-          <a:prstGeom prst="rect">
-            <a:avLst/>
-          </a:prstGeom>
-          <a:solidFill>
-            <a:srgbClr val="FFFFFF"/>
-          </a:solidFill>
-          <a:ln>
-            <a:noFill/>
-          </a:ln>
-          <a:effectLst/>
-        </p:spPr>
-        <p:style>
-          <a:lnRef idx="1">
-            <a:schemeClr val="accent1"/>
-          </a:lnRef>
-          <a:fillRef idx="3">
-            <a:schemeClr val="accent1"/>
-          </a:fillRef>
-          <a:effectRef idx="2">
-            <a:schemeClr val="accent1"/>
-          </a:effectRef>
-          <a:fontRef idx="minor">
-            <a:schemeClr val="lt1"/>
-          </a:fontRef>
-        </p:style>
-        <p:txBody>
-          <a:bodyPr rtlCol="0" anchor="ctr"/>
-          <a:lstStyle/>
-          <a:p>
-            <a:pPr algn="ctr"/>
-          </a:p>
-        </p:txBody>
-      </p:sp>
-      <p:sp>
-        <p:nvSpPr>
-          <p:cNvPr id="3" name="Rectangle 2"/>
-          <p:cNvSpPr/>
-          <p:nvPr/>
-        </p:nvSpPr>
-        <p:spPr>
-          <a:xfrm>
-            <a:off x="548640" y="475488"/>
-            <a:ext cx="457200" cy="54864"/>
-          </a:xfrm>
-          <a:prstGeom prst="rect">
-            <a:avLst/>
-          </a:prstGeom>
-          <a:solidFill>
-            <a:srgbClr val="1E5EF3"/>
-          </a:solidFill>
-          <a:ln>
-            <a:noFill/>
-          </a:ln>
-          <a:effectLst/>
-        </p:spPr>
-        <p:style>
-          <a:lnRef idx="1">
-            <a:schemeClr val="accent1"/>
-          </a:lnRef>
-          <a:fillRef idx="3">
-            <a:schemeClr val="accent1"/>
-          </a:fillRef>
-          <a:effectRef idx="2">
-            <a:schemeClr val="accent1"/>
-          </a:effectRef>
-          <a:fontRef idx="minor">
-            <a:schemeClr val="lt1"/>
-          </a:fontRef>
-        </p:style>
-        <p:txBody>
-          <a:bodyPr rtlCol="0" anchor="ctr"/>
-          <a:lstStyle/>
-          <a:p>
-            <a:pPr algn="ctr"/>
-          </a:p>
-        </p:txBody>
-      </p:sp>
-      <p:sp>
-        <p:nvSpPr>
-          <p:cNvPr id="4" name="TextBox 3"/>
-          <p:cNvSpPr txBox="1"/>
-          <p:nvPr/>
-        </p:nvSpPr>
-        <p:spPr>
-          <a:xfrm>
-            <a:off x="548640" y="603504"/>
-            <a:ext cx="11091672" cy="274320"/>
-          </a:xfrm>
-          <a:prstGeom prst="rect">
-            <a:avLst/>
-          </a:prstGeom>
-          <a:noFill/>
-        </p:spPr>
-        <p:txBody>
-          <a:bodyPr wrap="square">
-            <a:spAutoFit/>
-          </a:bodyPr>
-          <a:lstStyle/>
-          <a:p>
-            <a:pPr algn="l">
-              <a:spcAft>
-                <a:spcPts val="600"/>
-              </a:spcAft>
-              <a:buNone/>
-            </a:pPr>
-            <a:r>
-              <a:rPr sz="1100" b="1">
-                <a:solidFill>
-                  <a:srgbClr val="1E5EF3"/>
-                </a:solidFill>
-                <a:latin typeface="Arial"/>
-              </a:rPr>
-              <a:t>NOTEBOOK 03 - THE PRICE</a:t>
-            </a:r>
-          </a:p>
-        </p:txBody>
-      </p:sp>
-      <p:sp>
-        <p:nvSpPr>
-          <p:cNvPr id="5" name="TextBox 4"/>
-          <p:cNvSpPr txBox="1"/>
-          <p:nvPr/>
-        </p:nvSpPr>
-        <p:spPr>
-          <a:xfrm>
-            <a:off x="548640" y="868680"/>
-            <a:ext cx="11091672" cy="777240"/>
-          </a:xfrm>
-          <a:prstGeom prst="rect">
-            <a:avLst/>
-          </a:prstGeom>
-          <a:noFill/>
-        </p:spPr>
-        <p:txBody>
-          <a:bodyPr wrap="square">
-            <a:spAutoFit/>
-          </a:bodyPr>
-          <a:lstStyle/>
-          <a:p>
-            <a:pPr algn="l">
-              <a:spcAft>
-                <a:spcPts val="0"/>
-              </a:spcAft>
-              <a:buNone/>
-            </a:pPr>
-            <a:r>
-              <a:rPr sz="2600" b="1">
-                <a:solidFill>
-                  <a:srgbClr val="0A2540"/>
-                </a:solidFill>
-                <a:latin typeface="Arial"/>
-              </a:rPr>
-              <a:t>Verification bought the last case at 2.1x the tokens</a:t>
-            </a:r>
-          </a:p>
-        </p:txBody>
-      </p:sp>
-      <p:sp>
-        <p:nvSpPr>
-          <p:cNvPr id="6" name="Rectangle 5"/>
-          <p:cNvSpPr/>
-          <p:nvPr/>
-        </p:nvSpPr>
-        <p:spPr>
-          <a:xfrm>
-            <a:off x="548640" y="1664208"/>
-            <a:ext cx="11091672" cy="12801"/>
-          </a:xfrm>
-          <a:prstGeom prst="rect">
-            <a:avLst/>
-          </a:prstGeom>
-          <a:solidFill>
-            <a:srgbClr val="B9D0FA"/>
-          </a:solidFill>
-          <a:ln>
-            <a:noFill/>
-          </a:ln>
-          <a:effectLst/>
-        </p:spPr>
-        <p:style>
-          <a:lnRef idx="1">
-            <a:schemeClr val="accent1"/>
-          </a:lnRef>
-          <a:fillRef idx="3">
-            <a:schemeClr val="accent1"/>
-          </a:fillRef>
-          <a:effectRef idx="2">
-            <a:schemeClr val="accent1"/>
-          </a:effectRef>
-          <a:fontRef idx="minor">
-            <a:schemeClr val="lt1"/>
-          </a:fontRef>
-        </p:style>
-        <p:txBody>
-          <a:bodyPr rtlCol="0" anchor="ctr"/>
-          <a:lstStyle/>
-          <a:p>
-            <a:pPr algn="ctr"/>
-          </a:p>
-        </p:txBody>
-      </p:sp>
-      <p:sp>
-        <p:nvSpPr>
-          <p:cNvPr id="7" name="TextBox 6"/>
-          <p:cNvSpPr txBox="1"/>
-          <p:nvPr/>
-        </p:nvSpPr>
-        <p:spPr>
-          <a:xfrm>
-            <a:off x="548640" y="1874519"/>
-            <a:ext cx="4297680" cy="4206240"/>
-          </a:xfrm>
-          <a:prstGeom prst="rect">
-            <a:avLst/>
-          </a:prstGeom>
-          <a:noFill/>
-        </p:spPr>
-        <p:txBody>
-          <a:bodyPr wrap="square">
-            <a:spAutoFit/>
-          </a:bodyPr>
-          <a:lstStyle/>
-          <a:p>
-            <a:pPr algn="l" indent="-228600" marL="228600">
-              <a:spcAft>
-                <a:spcPts val="800"/>
-              </a:spcAft>
-              <a:buClr>
-                <a:srgbClr val="1E5EF3"/>
-              </a:buClr>
-              <a:buChar char="—"/>
-            </a:pPr>
-            <a:r>
-              <a:rPr sz="1450" b="0">
-                <a:solidFill>
-                  <a:srgbClr val="202B38"/>
-                </a:solidFill>
-                <a:latin typeface="Arial"/>
-              </a:rPr>
-              <a:t>How to read it: one bar per configuration; length = estimated tokens for all 12 cases</a:t>
-            </a:r>
-          </a:p>
-          <a:p>
-            <a:pPr algn="l" indent="-228600" marL="228600">
-              <a:spcAft>
-                <a:spcPts val="800"/>
-              </a:spcAft>
-              <a:buClr>
-                <a:srgbClr val="1E5EF3"/>
-              </a:buClr>
-              <a:buChar char="—"/>
-            </a:pPr>
-            <a:r>
-              <a:rPr sz="1450" b="0">
-                <a:solidFill>
-                  <a:srgbClr val="202B38"/>
-                </a:solidFill>
-                <a:latin typeface="Arial"/>
-              </a:rPr>
-              <a:t>A ~170 tokens: one call per case, no tools, no help</a:t>
-            </a:r>
-          </a:p>
-          <a:p>
-            <a:pPr algn="l" indent="-228600" marL="228600">
-              <a:spcAft>
-                <a:spcPts val="800"/>
-              </a:spcAft>
-              <a:buClr>
-                <a:srgbClr val="1E5EF3"/>
-              </a:buClr>
-              <a:buChar char="—"/>
-            </a:pPr>
-            <a:r>
-              <a:rPr sz="1450" b="0">
-                <a:solidFill>
-                  <a:srgbClr val="202B38"/>
-                </a:solidFill>
-                <a:latin typeface="Arial"/>
-              </a:rPr>
-              <a:t>B ~11,800: search and read results fill the context, 3.0 turns per case</a:t>
-            </a:r>
-          </a:p>
-          <a:p>
-            <a:pPr algn="l" indent="-228600" marL="228600">
-              <a:spcAft>
-                <a:spcPts val="800"/>
-              </a:spcAft>
-              <a:buClr>
-                <a:srgbClr val="1E5EF3"/>
-              </a:buClr>
-              <a:buChar char="—"/>
-            </a:pPr>
-            <a:r>
-              <a:rPr sz="1450" b="0">
-                <a:solidFill>
-                  <a:srgbClr val="202B38"/>
-                </a:solidFill>
-                <a:latin typeface="Arial"/>
-              </a:rPr>
-              <a:t>C ~24,600: an extra verification round, 4.1 turns per case</a:t>
-            </a:r>
-          </a:p>
-          <a:p>
-            <a:pPr algn="l" indent="-228600" marL="228600">
-              <a:spcAft>
-                <a:spcPts val="800"/>
-              </a:spcAft>
-              <a:buClr>
-                <a:srgbClr val="1E5EF3"/>
-              </a:buClr>
-              <a:buChar char="—"/>
-            </a:pPr>
-            <a:r>
-              <a:rPr sz="1450" b="0">
-                <a:solidFill>
-                  <a:srgbClr val="202B38"/>
-                </a:solidFill>
-                <a:latin typeface="Arial"/>
-              </a:rPr>
-              <a:t>From B to C: one more correct case for 12,814 more tokens, 2.1x</a:t>
-            </a:r>
-          </a:p>
-          <a:p>
-            <a:pPr algn="l" indent="-228600" marL="228600">
-              <a:spcAft>
-                <a:spcPts val="800"/>
-              </a:spcAft>
-              <a:buClr>
-                <a:srgbClr val="1E5EF3"/>
-              </a:buClr>
-              <a:buChar char="—"/>
-            </a:pPr>
-            <a:r>
-              <a:rPr sz="1450" b="0">
-                <a:solidFill>
-                  <a:srgbClr val="202B38"/>
-                </a:solidFill>
-                <a:latin typeface="Arial"/>
-              </a:rPr>
-              <a:t>Worth it? Depends on what one wrong answer costs you</a:t>
-            </a:r>
-          </a:p>
-        </p:txBody>
-      </p:sp>
-      <p:pic>
-        <p:nvPicPr>
-          <p:cNvPr id="8" name="Picture 7" descr="s3_tokens.png"/>
-          <p:cNvPicPr>
-            <a:picLocks noChangeAspect="1"/>
-          </p:cNvPicPr>
-          <p:nvPr/>
-        </p:nvPicPr>
-        <p:blipFill>
-          <a:blip r:embed="rId2"/>
-          <a:stretch>
-            <a:fillRect/>
-          </a:stretch>
-        </p:blipFill>
-        <p:spPr>
-          <a:xfrm>
-            <a:off x="5120640" y="1874519"/>
-            <a:ext cx="6492240" cy="3728297"/>
-          </a:xfrm>
-          <a:prstGeom prst="rect">
-            <a:avLst/>
-          </a:prstGeom>
-        </p:spPr>
-      </p:pic>
-      <p:sp>
-        <p:nvSpPr>
-          <p:cNvPr id="9" name="TextBox 8"/>
-          <p:cNvSpPr txBox="1"/>
-          <p:nvPr/>
-        </p:nvSpPr>
-        <p:spPr>
-          <a:xfrm>
-            <a:off x="5120640" y="6062471"/>
-            <a:ext cx="6492240" cy="365760"/>
-          </a:xfrm>
-          <a:prstGeom prst="rect">
-            <a:avLst/>
-          </a:prstGeom>
-          <a:noFill/>
-        </p:spPr>
-        <p:txBody>
-          <a:bodyPr wrap="square">
-            <a:spAutoFit/>
-          </a:bodyPr>
-          <a:lstStyle/>
-          <a:p>
-            <a:pPr algn="ctr">
-              <a:spcAft>
-                <a:spcPts val="600"/>
-              </a:spcAft>
-              <a:buNone/>
-            </a:pPr>
-            <a:r>
-              <a:rPr sz="1100" b="0">
-                <a:solidFill>
-                  <a:srgbClr val="5B6774"/>
-                </a:solidFill>
-                <a:latin typeface="Arial"/>
-              </a:rPr>
-              <a:t>Notebook 03 reference run on the stand-in (prints 172 / 11,766 / 24,580; 24,600 / 11,800 = 2.1). The live Claude run varies and reports real tokens; the ratio is the lesson.</a:t>
-            </a:r>
-          </a:p>
-        </p:txBody>
-      </p:sp>
-      <p:sp>
-        <p:nvSpPr>
-          <p:cNvPr id="10" name="TextBox 9"/>
-          <p:cNvSpPr txBox="1"/>
-          <p:nvPr/>
-        </p:nvSpPr>
-        <p:spPr>
-          <a:xfrm>
-            <a:off x="548640" y="6473952"/>
-            <a:ext cx="7315200" cy="292608"/>
-          </a:xfrm>
-          <a:prstGeom prst="rect">
-            <a:avLst/>
-          </a:prstGeom>
-          <a:noFill/>
-        </p:spPr>
-        <p:txBody>
-          <a:bodyPr wrap="square">
-            <a:spAutoFit/>
-          </a:bodyPr>
-          <a:lstStyle/>
-          <a:p>
-            <a:pPr algn="l">
-              <a:spcAft>
-                <a:spcPts val="600"/>
-              </a:spcAft>
-              <a:buNone/>
-            </a:pPr>
-            <a:r>
-              <a:rPr sz="900" b="0">
-                <a:solidFill>
-                  <a:srgbClr val="5B6774"/>
-                </a:solidFill>
-                <a:latin typeface="Arial"/>
-              </a:rPr>
-              <a:t>M5 Session 3 - Building a Harness</a:t>
-            </a:r>
-          </a:p>
-        </p:txBody>
-      </p:sp>
-      <p:sp>
-        <p:nvSpPr>
-          <p:cNvPr id="11" name="TextBox 10"/>
-          <p:cNvSpPr txBox="1"/>
-          <p:nvPr/>
-        </p:nvSpPr>
-        <p:spPr>
-          <a:xfrm>
-            <a:off x="11292840" y="6473952"/>
-            <a:ext cx="548640" cy="292608"/>
-          </a:xfrm>
-          <a:prstGeom prst="rect">
-            <a:avLst/>
-          </a:prstGeom>
-          <a:noFill/>
-        </p:spPr>
-        <p:txBody>
-          <a:bodyPr wrap="square">
-            <a:spAutoFit/>
-          </a:bodyPr>
-          <a:lstStyle/>
-          <a:p>
-            <a:pPr algn="r">
-              <a:spcAft>
-                <a:spcPts val="600"/>
-              </a:spcAft>
-              <a:buNone/>
-            </a:pPr>
-            <a:r>
-              <a:rPr sz="900" b="0">
-                <a:solidFill>
-                  <a:srgbClr val="5B6774"/>
-                </a:solidFill>
-                <a:latin typeface="Arial"/>
-              </a:rPr>
-              <a:t>17</a:t>
-            </a:r>
-          </a:p>
-        </p:txBody>
-      </p:sp>
-    </p:spTree>
-  </p:cSld>
-  <p:clrMapOvr>
-    <a:masterClrMapping/>
-  </p:clrMapOvr>
-</p:sld>
-</file>
-
-<file path=ppt/slides/slide18.xml><?xml version="1.0" encoding="utf-8"?>
-<p:sld xmlns:a="http://schemas.openxmlformats.org/drawingml/2006/main" xmlns:p="http://schemas.openxmlformats.org/presentationml/2006/main" xmlns:r="http://schemas.openxmlformats.org/officeDocument/2006/relationships">
-  <p:cSld>
-    <p:spTree>
-      <p:nvGrpSpPr>
-        <p:cNvPr id="1" name=""/>
-        <p:cNvGrpSpPr/>
-        <p:nvPr/>
-      </p:nvGrpSpPr>
-      <p:grpSpPr/>
-      <p:sp>
-        <p:nvSpPr>
-          <p:cNvPr id="2" name="Rectangle 1"/>
-          <p:cNvSpPr/>
-          <p:nvPr/>
-        </p:nvSpPr>
-        <p:spPr>
-          <a:xfrm>
-            <a:off x="0" y="0"/>
-            <a:ext cx="12191695" cy="6858000"/>
-          </a:xfrm>
-          <a:prstGeom prst="rect">
-            <a:avLst/>
-          </a:prstGeom>
-          <a:solidFill>
-            <a:srgbClr val="FFFFFF"/>
-          </a:solidFill>
-          <a:ln>
-            <a:noFill/>
-          </a:ln>
-          <a:effectLst/>
-        </p:spPr>
-        <p:style>
-          <a:lnRef idx="1">
-            <a:schemeClr val="accent1"/>
-          </a:lnRef>
-          <a:fillRef idx="3">
-            <a:schemeClr val="accent1"/>
-          </a:fillRef>
-          <a:effectRef idx="2">
-            <a:schemeClr val="accent1"/>
-          </a:effectRef>
-          <a:fontRef idx="minor">
-            <a:schemeClr val="lt1"/>
-          </a:fontRef>
-        </p:style>
-        <p:txBody>
-          <a:bodyPr rtlCol="0" anchor="ctr"/>
-          <a:lstStyle/>
-          <a:p>
-            <a:pPr algn="ctr"/>
-          </a:p>
-        </p:txBody>
-      </p:sp>
-      <p:sp>
-        <p:nvSpPr>
-          <p:cNvPr id="3" name="Rectangle 2"/>
-          <p:cNvSpPr/>
-          <p:nvPr/>
-        </p:nvSpPr>
-        <p:spPr>
-          <a:xfrm>
-            <a:off x="548640" y="475488"/>
-            <a:ext cx="457200" cy="54864"/>
-          </a:xfrm>
-          <a:prstGeom prst="rect">
-            <a:avLst/>
-          </a:prstGeom>
-          <a:solidFill>
-            <a:srgbClr val="1E5EF3"/>
-          </a:solidFill>
-          <a:ln>
-            <a:noFill/>
-          </a:ln>
-          <a:effectLst/>
-        </p:spPr>
-        <p:style>
-          <a:lnRef idx="1">
-            <a:schemeClr val="accent1"/>
-          </a:lnRef>
-          <a:fillRef idx="3">
-            <a:schemeClr val="accent1"/>
-          </a:fillRef>
-          <a:effectRef idx="2">
-            <a:schemeClr val="accent1"/>
-          </a:effectRef>
-          <a:fontRef idx="minor">
-            <a:schemeClr val="lt1"/>
-          </a:fontRef>
-        </p:style>
-        <p:txBody>
-          <a:bodyPr rtlCol="0" anchor="ctr"/>
-          <a:lstStyle/>
-          <a:p>
-            <a:pPr algn="ctr"/>
-          </a:p>
-        </p:txBody>
-      </p:sp>
-      <p:sp>
-        <p:nvSpPr>
-          <p:cNvPr id="4" name="TextBox 3"/>
-          <p:cNvSpPr txBox="1"/>
-          <p:nvPr/>
-        </p:nvSpPr>
-        <p:spPr>
-          <a:xfrm>
-            <a:off x="548640" y="603504"/>
-            <a:ext cx="11091672" cy="274320"/>
-          </a:xfrm>
-          <a:prstGeom prst="rect">
-            <a:avLst/>
-          </a:prstGeom>
-          <a:noFill/>
-        </p:spPr>
-        <p:txBody>
-          <a:bodyPr wrap="square">
-            <a:spAutoFit/>
-          </a:bodyPr>
-          <a:lstStyle/>
-          <a:p>
-            <a:pPr algn="l">
-              <a:spcAft>
-                <a:spcPts val="600"/>
-              </a:spcAft>
-              <a:buNone/>
-            </a:pPr>
-            <a:r>
-              <a:rPr sz="1100" b="1">
-                <a:solidFill>
-                  <a:srgbClr val="1E5EF3"/>
-                </a:solidFill>
-                <a:latin typeface="Arial"/>
-              </a:rPr>
-              <a:t>NOTEBOOK 03 - THE NO-ANSWER TRAP</a:t>
-            </a:r>
-          </a:p>
-        </p:txBody>
-      </p:sp>
-      <p:sp>
-        <p:nvSpPr>
-          <p:cNvPr id="5" name="TextBox 4"/>
-          <p:cNvSpPr txBox="1"/>
-          <p:nvPr/>
-        </p:nvSpPr>
-        <p:spPr>
-          <a:xfrm>
-            <a:off x="548640" y="868680"/>
-            <a:ext cx="11091672" cy="777240"/>
-          </a:xfrm>
-          <a:prstGeom prst="rect">
-            <a:avLst/>
-          </a:prstGeom>
-          <a:noFill/>
-        </p:spPr>
-        <p:txBody>
-          <a:bodyPr wrap="square">
-            <a:spAutoFit/>
-          </a:bodyPr>
-          <a:lstStyle/>
-          <a:p>
-            <a:pPr algn="l">
-              <a:spcAft>
-                <a:spcPts val="0"/>
-              </a:spcAft>
-              <a:buNone/>
-            </a:pPr>
-            <a:r>
-              <a:rPr sz="2600" b="1">
-                <a:solidFill>
-                  <a:srgbClr val="0A2540"/>
-                </a:solidFill>
-                <a:latin typeface="Arial"/>
-              </a:rPr>
-              <a:t>B's one failure: confident and cited, on a question with no answer</a:t>
-            </a:r>
-          </a:p>
-        </p:txBody>
-      </p:sp>
-      <p:sp>
-        <p:nvSpPr>
-          <p:cNvPr id="6" name="Rectangle 5"/>
-          <p:cNvSpPr/>
-          <p:nvPr/>
-        </p:nvSpPr>
-        <p:spPr>
-          <a:xfrm>
-            <a:off x="548640" y="1664208"/>
-            <a:ext cx="11091672" cy="12801"/>
-          </a:xfrm>
-          <a:prstGeom prst="rect">
-            <a:avLst/>
-          </a:prstGeom>
-          <a:solidFill>
-            <a:srgbClr val="B9D0FA"/>
-          </a:solidFill>
-          <a:ln>
-            <a:noFill/>
-          </a:ln>
-          <a:effectLst/>
-        </p:spPr>
-        <p:style>
-          <a:lnRef idx="1">
-            <a:schemeClr val="accent1"/>
-          </a:lnRef>
-          <a:fillRef idx="3">
-            <a:schemeClr val="accent1"/>
-          </a:fillRef>
-          <a:effectRef idx="2">
-            <a:schemeClr val="accent1"/>
-          </a:effectRef>
-          <a:fontRef idx="minor">
-            <a:schemeClr val="lt1"/>
-          </a:fontRef>
-        </p:style>
-        <p:txBody>
-          <a:bodyPr rtlCol="0" anchor="ctr"/>
-          <a:lstStyle/>
-          <a:p>
-            <a:pPr algn="ctr"/>
-          </a:p>
-        </p:txBody>
-      </p:sp>
-      <p:sp>
-        <p:nvSpPr>
-          <p:cNvPr id="7" name="Rectangle 6"/>
-          <p:cNvSpPr/>
-          <p:nvPr/>
-        </p:nvSpPr>
-        <p:spPr>
-          <a:xfrm>
-            <a:off x="548640" y="1874519"/>
-            <a:ext cx="5394960" cy="3977639"/>
-          </a:xfrm>
-          <a:prstGeom prst="rect">
-            <a:avLst/>
-          </a:prstGeom>
-          <a:solidFill>
-            <a:srgbClr val="EEF3FD"/>
-          </a:solidFill>
-          <a:ln>
-            <a:noFill/>
-          </a:ln>
-          <a:effectLst/>
-        </p:spPr>
-        <p:style>
-          <a:lnRef idx="1">
-            <a:schemeClr val="accent1"/>
-          </a:lnRef>
-          <a:fillRef idx="3">
-            <a:schemeClr val="accent1"/>
-          </a:fillRef>
-          <a:effectRef idx="2">
-            <a:schemeClr val="accent1"/>
-          </a:effectRef>
-          <a:fontRef idx="minor">
-            <a:schemeClr val="lt1"/>
-          </a:fontRef>
-        </p:style>
-        <p:txBody>
-          <a:bodyPr rtlCol="0" anchor="ctr"/>
-          <a:lstStyle/>
-          <a:p>
-            <a:pPr algn="ctr"/>
-          </a:p>
-        </p:txBody>
-      </p:sp>
-      <p:sp>
-        <p:nvSpPr>
-          <p:cNvPr id="8" name="TextBox 7"/>
-          <p:cNvSpPr txBox="1"/>
-          <p:nvPr/>
-        </p:nvSpPr>
-        <p:spPr>
-          <a:xfrm>
-            <a:off x="777240" y="2039111"/>
-            <a:ext cx="4937760" cy="365760"/>
-          </a:xfrm>
-          <a:prstGeom prst="rect">
-            <a:avLst/>
-          </a:prstGeom>
-          <a:noFill/>
-        </p:spPr>
-        <p:txBody>
-          <a:bodyPr wrap="square">
-            <a:spAutoFit/>
-          </a:bodyPr>
-          <a:lstStyle/>
-          <a:p>
-            <a:pPr algn="l">
-              <a:spcAft>
-                <a:spcPts val="600"/>
-              </a:spcAft>
-              <a:buNone/>
-            </a:pPr>
-            <a:r>
-              <a:rPr sz="1500" b="1">
-                <a:solidFill>
-                  <a:srgbClr val="0A2540"/>
-                </a:solidFill>
-                <a:latin typeface="Arial"/>
-              </a:rPr>
-              <a:t>B: tools, no verification</a:t>
-            </a:r>
-          </a:p>
-        </p:txBody>
-      </p:sp>
-      <p:sp>
-        <p:nvSpPr>
-          <p:cNvPr id="9" name="TextBox 8"/>
-          <p:cNvSpPr txBox="1"/>
-          <p:nvPr/>
-        </p:nvSpPr>
-        <p:spPr>
-          <a:xfrm>
-            <a:off x="777240" y="2441447"/>
-            <a:ext cx="4937760" cy="3246119"/>
-          </a:xfrm>
-          <a:prstGeom prst="rect">
-            <a:avLst/>
-          </a:prstGeom>
-          <a:noFill/>
-        </p:spPr>
-        <p:txBody>
-          <a:bodyPr wrap="square">
-            <a:spAutoFit/>
-          </a:bodyPr>
-          <a:lstStyle/>
-          <a:p>
-            <a:pPr algn="l" indent="-228600" marL="228600">
-              <a:spcAft>
-                <a:spcPts val="600"/>
-              </a:spcAft>
-              <a:buClr>
-                <a:srgbClr val="1E5EF3"/>
-              </a:buClr>
-              <a:buChar char="—"/>
-            </a:pPr>
-            <a:r>
-              <a:rPr sz="1300" b="0">
-                <a:solidFill>
-                  <a:srgbClr val="202B38"/>
-                </a:solidFill>
-                <a:latin typeface="Arial"/>
-              </a:rPr>
-              <a:t>Case: 'How many employees does Anthropic have?' - not in the library</a:t>
-            </a:r>
-          </a:p>
-          <a:p>
-            <a:pPr algn="l" indent="-228600" marL="228600">
-              <a:spcAft>
-                <a:spcPts val="600"/>
-              </a:spcAft>
-              <a:buClr>
-                <a:srgbClr val="1E5EF3"/>
-              </a:buClr>
-              <a:buChar char="—"/>
-            </a:pPr>
-            <a:r>
-              <a:rPr sz="1300" b="0">
-                <a:solidFill>
-                  <a:srgbClr val="202B38"/>
-                </a:solidFill>
-                <a:latin typeface="Arial"/>
-              </a:rPr>
-              <a:t>search_docs returns the closest document anyway</a:t>
-            </a:r>
-          </a:p>
-          <a:p>
-            <a:pPr algn="l" indent="-228600" marL="228600">
-              <a:spcAft>
-                <a:spcPts val="600"/>
-              </a:spcAft>
-              <a:buClr>
-                <a:srgbClr val="1E5EF3"/>
-              </a:buClr>
-              <a:buChar char="—"/>
-            </a:pPr>
-            <a:r>
-              <a:rPr sz="1300" b="0">
-                <a:solidFill>
-                  <a:srgbClr val="202B38"/>
-                </a:solidFill>
-                <a:latin typeface="Arial"/>
-              </a:rPr>
-              <a:t>B reads it and answers with confidence, citing an unrelated document</a:t>
-            </a:r>
-          </a:p>
-          <a:p>
-            <a:pPr algn="l" indent="-228600" marL="228600">
-              <a:spcAft>
-                <a:spcPts val="600"/>
-              </a:spcAft>
-              <a:buClr>
-                <a:srgbClr val="1E5EF3"/>
-              </a:buClr>
-              <a:buChar char="—"/>
-            </a:pPr>
-            <a:r>
-              <a:rPr sz="1300" b="0">
-                <a:solidFill>
-                  <a:srgbClr val="202B38"/>
-                </a:solidFill>
-                <a:latin typeface="Arial"/>
-              </a:rPr>
-              <a:t>The grader wanted 'could not verify'; B fails this one case</a:t>
-            </a:r>
-          </a:p>
-          <a:p>
-            <a:pPr algn="l" indent="-228600" marL="228600">
-              <a:spcAft>
-                <a:spcPts val="600"/>
-              </a:spcAft>
-              <a:buClr>
-                <a:srgbClr val="1E5EF3"/>
-              </a:buClr>
-              <a:buChar char="—"/>
-            </a:pPr>
-            <a:r>
-              <a:rPr sz="1300" b="0">
-                <a:solidFill>
-                  <a:srgbClr val="202B38"/>
-                </a:solidFill>
-                <a:latin typeface="Arial"/>
-              </a:rPr>
-              <a:t>In plain words: a wrong answer wearing a real-looking source</a:t>
-            </a:r>
-          </a:p>
-        </p:txBody>
-      </p:sp>
-      <p:sp>
-        <p:nvSpPr>
-          <p:cNvPr id="10" name="Rectangle 9"/>
-          <p:cNvSpPr/>
-          <p:nvPr/>
-        </p:nvSpPr>
-        <p:spPr>
-          <a:xfrm>
-            <a:off x="6245352" y="1874519"/>
-            <a:ext cx="5394960" cy="3977639"/>
-          </a:xfrm>
-          <a:prstGeom prst="rect">
-            <a:avLst/>
-          </a:prstGeom>
-          <a:solidFill>
-            <a:srgbClr val="EEF3FD"/>
-          </a:solidFill>
-          <a:ln>
-            <a:noFill/>
-          </a:ln>
-          <a:effectLst/>
-        </p:spPr>
-        <p:style>
-          <a:lnRef idx="1">
-            <a:schemeClr val="accent1"/>
-          </a:lnRef>
-          <a:fillRef idx="3">
-            <a:schemeClr val="accent1"/>
-          </a:fillRef>
-          <a:effectRef idx="2">
-            <a:schemeClr val="accent1"/>
-          </a:effectRef>
-          <a:fontRef idx="minor">
-            <a:schemeClr val="lt1"/>
-          </a:fontRef>
-        </p:style>
-        <p:txBody>
-          <a:bodyPr rtlCol="0" anchor="ctr"/>
-          <a:lstStyle/>
-          <a:p>
-            <a:pPr algn="ctr"/>
-          </a:p>
-        </p:txBody>
-      </p:sp>
-      <p:sp>
-        <p:nvSpPr>
-          <p:cNvPr id="11" name="TextBox 10"/>
-          <p:cNvSpPr txBox="1"/>
-          <p:nvPr/>
-        </p:nvSpPr>
-        <p:spPr>
-          <a:xfrm>
-            <a:off x="6473952" y="2039111"/>
-            <a:ext cx="4937760" cy="365760"/>
-          </a:xfrm>
-          <a:prstGeom prst="rect">
-            <a:avLst/>
-          </a:prstGeom>
-          <a:noFill/>
-        </p:spPr>
-        <p:txBody>
-          <a:bodyPr wrap="square">
-            <a:spAutoFit/>
-          </a:bodyPr>
-          <a:lstStyle/>
-          <a:p>
-            <a:pPr algn="l">
-              <a:spcAft>
-                <a:spcPts val="600"/>
-              </a:spcAft>
-              <a:buNone/>
-            </a:pPr>
-            <a:r>
-              <a:rPr sz="1500" b="1">
-                <a:solidFill>
-                  <a:srgbClr val="0A2540"/>
-                </a:solidFill>
-                <a:latin typeface="Arial"/>
-              </a:rPr>
-              <a:t>C: tools + verification</a:t>
-            </a:r>
-          </a:p>
-        </p:txBody>
-      </p:sp>
-      <p:sp>
-        <p:nvSpPr>
-          <p:cNvPr id="12" name="TextBox 11"/>
-          <p:cNvSpPr txBox="1"/>
-          <p:nvPr/>
-        </p:nvSpPr>
-        <p:spPr>
-          <a:xfrm>
-            <a:off x="6473952" y="2441447"/>
-            <a:ext cx="4937760" cy="3246119"/>
-          </a:xfrm>
-          <a:prstGeom prst="rect">
-            <a:avLst/>
-          </a:prstGeom>
-          <a:noFill/>
-        </p:spPr>
-        <p:txBody>
-          <a:bodyPr wrap="square">
-            <a:spAutoFit/>
-          </a:bodyPr>
-          <a:lstStyle/>
-          <a:p>
-            <a:pPr algn="l" indent="-228600" marL="228600">
-              <a:spcAft>
-                <a:spcPts val="600"/>
-              </a:spcAft>
-              <a:buClr>
-                <a:srgbClr val="1E5EF3"/>
-              </a:buClr>
-              <a:buChar char="—"/>
-            </a:pPr>
-            <a:r>
-              <a:rPr sz="1300" b="0">
-                <a:solidFill>
-                  <a:srgbClr val="202B38"/>
-                </a:solidFill>
-                <a:latin typeface="Arial"/>
-              </a:rPr>
-              <a:t>Same search, same unrelated document</a:t>
-            </a:r>
-          </a:p>
-          <a:p>
-            <a:pPr algn="l" indent="-228600" marL="228600">
-              <a:spcAft>
-                <a:spcPts val="600"/>
-              </a:spcAft>
-              <a:buClr>
-                <a:srgbClr val="1E5EF3"/>
-              </a:buClr>
-              <a:buChar char="—"/>
-            </a:pPr>
-            <a:r>
-              <a:rPr sz="1300" b="0">
-                <a:solidFill>
-                  <a:srgbClr val="202B38"/>
-                </a:solidFill>
-                <a:latin typeface="Arial"/>
-              </a:rPr>
-              <a:t>check_citation compares the claim with the cited text: no match</a:t>
-            </a:r>
-          </a:p>
-          <a:p>
-            <a:pPr algn="l" indent="-228600" marL="228600">
-              <a:spcAft>
-                <a:spcPts val="600"/>
-              </a:spcAft>
-              <a:buClr>
-                <a:srgbClr val="1E5EF3"/>
-              </a:buClr>
-              <a:buChar char="—"/>
-            </a:pPr>
-            <a:r>
-              <a:rPr sz="1300" b="0">
-                <a:solidFill>
-                  <a:srgbClr val="202B38"/>
-                </a:solidFill>
-                <a:latin typeface="Arial"/>
-              </a:rPr>
-              <a:t>The agent says 'could not verify' instead of guessing</a:t>
-            </a:r>
-          </a:p>
-          <a:p>
-            <a:pPr algn="l" indent="-228600" marL="228600">
-              <a:spcAft>
-                <a:spcPts val="600"/>
-              </a:spcAft>
-              <a:buClr>
-                <a:srgbClr val="1E5EF3"/>
-              </a:buClr>
-              <a:buChar char="—"/>
-            </a:pPr>
-            <a:r>
-              <a:rPr sz="1300" b="0">
-                <a:solidFill>
-                  <a:srgbClr val="202B38"/>
-                </a:solidFill>
-                <a:latin typeface="Arial"/>
-              </a:rPr>
-              <a:t>C passes: the honest 'I do not know' was a graded outcome</a:t>
-            </a:r>
-          </a:p>
-          <a:p>
-            <a:pPr algn="l" indent="-228600" marL="228600">
-              <a:spcAft>
-                <a:spcPts val="600"/>
-              </a:spcAft>
-              <a:buClr>
-                <a:srgbClr val="1E5EF3"/>
-              </a:buClr>
-              <a:buChar char="—"/>
-            </a:pPr>
-            <a:r>
-              <a:rPr sz="1300" b="0">
-                <a:solidFill>
-                  <a:srgbClr val="202B38"/>
-                </a:solidFill>
-                <a:latin typeface="Arial"/>
-              </a:rPr>
-              <a:t>In plain words: the harness made not-knowing the cheapest path</a:t>
-            </a:r>
-          </a:p>
-        </p:txBody>
-      </p:sp>
-      <p:sp>
-        <p:nvSpPr>
-          <p:cNvPr id="13" name="TextBox 12"/>
-          <p:cNvSpPr txBox="1"/>
-          <p:nvPr/>
-        </p:nvSpPr>
-        <p:spPr>
-          <a:xfrm>
-            <a:off x="548640" y="6053328"/>
-            <a:ext cx="11091672" cy="502920"/>
-          </a:xfrm>
-          <a:prstGeom prst="rect">
-            <a:avLst/>
-          </a:prstGeom>
-          <a:noFill/>
-        </p:spPr>
-        <p:txBody>
-          <a:bodyPr wrap="square">
-            <a:spAutoFit/>
-          </a:bodyPr>
-          <a:lstStyle/>
-          <a:p>
-            <a:pPr algn="l">
-              <a:spcAft>
-                <a:spcPts val="600"/>
-              </a:spcAft>
-              <a:buNone/>
-            </a:pPr>
-            <a:r>
-              <a:rPr sz="1200" b="0">
-                <a:solidFill>
-                  <a:srgbClr val="1E5EF3"/>
-                </a:solidFill>
-                <a:latin typeface="Arial"/>
-              </a:rPr>
-              <a:t>Notebook 03, eval case 'no-answer'; grader contains('could not verify'); reference run on the stand-in, the live Claude run varies. Lesson: write the trap into the suite, or you will never see it.</a:t>
-            </a:r>
-          </a:p>
-        </p:txBody>
-      </p:sp>
-      <p:sp>
-        <p:nvSpPr>
-          <p:cNvPr id="14" name="TextBox 13"/>
-          <p:cNvSpPr txBox="1"/>
-          <p:nvPr/>
-        </p:nvSpPr>
-        <p:spPr>
-          <a:xfrm>
-            <a:off x="548640" y="6473952"/>
-            <a:ext cx="7315200" cy="292608"/>
-          </a:xfrm>
-          <a:prstGeom prst="rect">
-            <a:avLst/>
-          </a:prstGeom>
-          <a:noFill/>
-        </p:spPr>
-        <p:txBody>
-          <a:bodyPr wrap="square">
-            <a:spAutoFit/>
-          </a:bodyPr>
-          <a:lstStyle/>
-          <a:p>
-            <a:pPr algn="l">
-              <a:spcAft>
-                <a:spcPts val="600"/>
-              </a:spcAft>
-              <a:buNone/>
-            </a:pPr>
-            <a:r>
-              <a:rPr sz="900" b="0">
-                <a:solidFill>
-                  <a:srgbClr val="5B6774"/>
-                </a:solidFill>
-                <a:latin typeface="Arial"/>
-              </a:rPr>
-              <a:t>M5 Session 3 - Building a Harness</a:t>
-            </a:r>
-          </a:p>
-        </p:txBody>
-      </p:sp>
-      <p:sp>
-        <p:nvSpPr>
-          <p:cNvPr id="15" name="TextBox 14"/>
-          <p:cNvSpPr txBox="1"/>
-          <p:nvPr/>
-        </p:nvSpPr>
-        <p:spPr>
-          <a:xfrm>
-            <a:off x="11292840" y="6473952"/>
-            <a:ext cx="548640" cy="292608"/>
-          </a:xfrm>
-          <a:prstGeom prst="rect">
-            <a:avLst/>
-          </a:prstGeom>
-          <a:noFill/>
-        </p:spPr>
-        <p:txBody>
-          <a:bodyPr wrap="square">
-            <a:spAutoFit/>
-          </a:bodyPr>
-          <a:lstStyle/>
-          <a:p>
-            <a:pPr algn="r">
-              <a:spcAft>
-                <a:spcPts val="600"/>
-              </a:spcAft>
-              <a:buNone/>
-            </a:pPr>
-            <a:r>
-              <a:rPr sz="900" b="0">
-                <a:solidFill>
-                  <a:srgbClr val="5B6774"/>
-                </a:solidFill>
-                <a:latin typeface="Arial"/>
-              </a:rPr>
-              <a:t>18</a:t>
-            </a:r>
-          </a:p>
-        </p:txBody>
-      </p:sp>
-    </p:spTree>
-  </p:cSld>
-  <p:clrMapOvr>
-    <a:masterClrMapping/>
-  </p:clrMapOvr>
-</p:sld>
-</file>
-
-<file path=ppt/slides/slide19.xml><?xml version="1.0" encoding="utf-8"?>
-<p:sld xmlns:a="http://schemas.openxmlformats.org/drawingml/2006/main" xmlns:p="http://schemas.openxmlformats.org/presentationml/2006/main" xmlns:r="http://schemas.openxmlformats.org/officeDocument/2006/relationships">
-  <p:cSld>
-    <p:spTree>
-      <p:nvGrpSpPr>
-        <p:cNvPr id="1" name=""/>
-        <p:cNvGrpSpPr/>
-        <p:nvPr/>
-      </p:nvGrpSpPr>
-      <p:grpSpPr/>
-      <p:sp>
-        <p:nvSpPr>
-          <p:cNvPr id="2" name="Rectangle 1"/>
-          <p:cNvSpPr/>
-          <p:nvPr/>
-        </p:nvSpPr>
-        <p:spPr>
-          <a:xfrm>
-            <a:off x="0" y="0"/>
-            <a:ext cx="12191695" cy="6858000"/>
-          </a:xfrm>
-          <a:prstGeom prst="rect">
-            <a:avLst/>
-          </a:prstGeom>
-          <a:solidFill>
-            <a:srgbClr val="FFFFFF"/>
-          </a:solidFill>
-          <a:ln>
-            <a:noFill/>
-          </a:ln>
-          <a:effectLst/>
-        </p:spPr>
-        <p:style>
-          <a:lnRef idx="1">
-            <a:schemeClr val="accent1"/>
-          </a:lnRef>
-          <a:fillRef idx="3">
-            <a:schemeClr val="accent1"/>
-          </a:fillRef>
-          <a:effectRef idx="2">
-            <a:schemeClr val="accent1"/>
-          </a:effectRef>
-          <a:fontRef idx="minor">
-            <a:schemeClr val="lt1"/>
-          </a:fontRef>
-        </p:style>
-        <p:txBody>
-          <a:bodyPr rtlCol="0" anchor="ctr"/>
-          <a:lstStyle/>
-          <a:p>
-            <a:pPr algn="ctr"/>
-          </a:p>
-        </p:txBody>
-      </p:sp>
-      <p:sp>
-        <p:nvSpPr>
-          <p:cNvPr id="3" name="Rectangle 2"/>
-          <p:cNvSpPr/>
-          <p:nvPr/>
-        </p:nvSpPr>
-        <p:spPr>
-          <a:xfrm>
-            <a:off x="548640" y="475488"/>
-            <a:ext cx="457200" cy="54864"/>
-          </a:xfrm>
-          <a:prstGeom prst="rect">
-            <a:avLst/>
-          </a:prstGeom>
-          <a:solidFill>
-            <a:srgbClr val="1E5EF3"/>
-          </a:solidFill>
-          <a:ln>
-            <a:noFill/>
-          </a:ln>
-          <a:effectLst/>
-        </p:spPr>
-        <p:style>
-          <a:lnRef idx="1">
-            <a:schemeClr val="accent1"/>
-          </a:lnRef>
-          <a:fillRef idx="3">
-            <a:schemeClr val="accent1"/>
-          </a:fillRef>
-          <a:effectRef idx="2">
-            <a:schemeClr val="accent1"/>
-          </a:effectRef>
-          <a:fontRef idx="minor">
-            <a:schemeClr val="lt1"/>
-          </a:fontRef>
-        </p:style>
-        <p:txBody>
-          <a:bodyPr rtlCol="0" anchor="ctr"/>
-          <a:lstStyle/>
-          <a:p>
-            <a:pPr algn="ctr"/>
-          </a:p>
-        </p:txBody>
-      </p:sp>
-      <p:sp>
-        <p:nvSpPr>
-          <p:cNvPr id="4" name="TextBox 3"/>
-          <p:cNvSpPr txBox="1"/>
-          <p:nvPr/>
-        </p:nvSpPr>
-        <p:spPr>
-          <a:xfrm>
-            <a:off x="548640" y="603504"/>
-            <a:ext cx="11091672" cy="274320"/>
-          </a:xfrm>
-          <a:prstGeom prst="rect">
-            <a:avLst/>
-          </a:prstGeom>
-          <a:noFill/>
-        </p:spPr>
-        <p:txBody>
-          <a:bodyPr wrap="square">
-            <a:spAutoFit/>
-          </a:bodyPr>
-          <a:lstStyle/>
-          <a:p>
-            <a:pPr algn="l">
-              <a:spcAft>
-                <a:spcPts val="600"/>
-              </a:spcAft>
-              <a:buNone/>
-            </a:pPr>
-            <a:r>
-              <a:rPr sz="1100" b="1">
-                <a:solidFill>
-                  <a:srgbClr val="1E5EF3"/>
-                </a:solidFill>
-                <a:latin typeface="Arial"/>
-              </a:rPr>
-              <a:t>NOTEBOOK 03 - COST ACCOUNTING</a:t>
-            </a:r>
-          </a:p>
-        </p:txBody>
-      </p:sp>
-      <p:sp>
-        <p:nvSpPr>
-          <p:cNvPr id="5" name="TextBox 4"/>
-          <p:cNvSpPr txBox="1"/>
-          <p:nvPr/>
-        </p:nvSpPr>
-        <p:spPr>
-          <a:xfrm>
-            <a:off x="548640" y="868680"/>
-            <a:ext cx="11091672" cy="777240"/>
-          </a:xfrm>
-          <a:prstGeom prst="rect">
-            <a:avLst/>
-          </a:prstGeom>
-          <a:noFill/>
-        </p:spPr>
-        <p:txBody>
-          <a:bodyPr wrap="square">
-            <a:spAutoFit/>
-          </a:bodyPr>
-          <a:lstStyle/>
-          <a:p>
-            <a:pPr algn="l">
-              <a:spcAft>
-                <a:spcPts val="0"/>
-              </a:spcAft>
-              <a:buNone/>
-            </a:pPr>
-            <a:r>
-              <a:rPr sz="2600" b="1">
-                <a:solidFill>
-                  <a:srgbClr val="0A2540"/>
-                </a:solidFill>
-                <a:latin typeface="Arial"/>
-              </a:rPr>
-              <a:t>trace.cost: a price per configuration and per thousand runs</a:t>
-            </a:r>
-          </a:p>
-        </p:txBody>
-      </p:sp>
-      <p:sp>
-        <p:nvSpPr>
-          <p:cNvPr id="6" name="Rectangle 5"/>
-          <p:cNvSpPr/>
-          <p:nvPr/>
-        </p:nvSpPr>
-        <p:spPr>
-          <a:xfrm>
-            <a:off x="548640" y="1664208"/>
-            <a:ext cx="11091672" cy="12801"/>
-          </a:xfrm>
-          <a:prstGeom prst="rect">
-            <a:avLst/>
-          </a:prstGeom>
-          <a:solidFill>
-            <a:srgbClr val="B9D0FA"/>
-          </a:solidFill>
-          <a:ln>
-            <a:noFill/>
-          </a:ln>
-          <a:effectLst/>
-        </p:spPr>
-        <p:style>
-          <a:lnRef idx="1">
-            <a:schemeClr val="accent1"/>
-          </a:lnRef>
-          <a:fillRef idx="3">
-            <a:schemeClr val="accent1"/>
-          </a:fillRef>
-          <a:effectRef idx="2">
-            <a:schemeClr val="accent1"/>
-          </a:effectRef>
-          <a:fontRef idx="minor">
-            <a:schemeClr val="lt1"/>
-          </a:fontRef>
-        </p:style>
-        <p:txBody>
-          <a:bodyPr rtlCol="0" anchor="ctr"/>
-          <a:lstStyle/>
-          <a:p>
-            <a:pPr algn="ctr"/>
-          </a:p>
-        </p:txBody>
-      </p:sp>
       <p:graphicFrame>
         <p:nvGraphicFramePr>
           <p:cNvPr id="7" name="Table 6"/>
@@ -9879,7 +7209,7 @@
         </p:nvGraphicFramePr>
         <p:xfrm>
           <a:off x="548640" y="1874519"/>
-          <a:ext cx="11091669" cy="2743200"/>
+          <a:ext cx="11091670" cy="4114800"/>
         </p:xfrm>
         <a:graphic>
           <a:graphicData uri="http://schemas.openxmlformats.org/drawingml/2006/table">
@@ -9888,11 +7218,10 @@
                 <a:tableStyleId>{5C22544A-7EE6-4342-B048-85BDC9FD1C3A}</a:tableStyleId>
               </a:tblPr>
               <a:tblGrid>
-                <a:gridCol w="3630001"/>
-                <a:gridCol w="1210000"/>
-                <a:gridCol w="1411667"/>
-                <a:gridCol w="2823334"/>
-                <a:gridCol w="2016667"/>
+                <a:gridCol w="1375000"/>
+                <a:gridCol w="733333"/>
+                <a:gridCol w="1741667"/>
+                <a:gridCol w="7241670"/>
               </a:tblGrid>
               <a:tr h="457200">
                 <a:tc>
@@ -9913,7 +7242,7 @@
                           </a:solidFill>
                           <a:latin typeface="Arial"/>
                         </a:rPr>
-                        <a:t>Configuration</a:t>
+                        <a:t>File</a:t>
                       </a:r>
                     </a:p>
                   </a:txBody>
@@ -9941,7 +7270,7 @@
                           </a:solidFill>
                           <a:latin typeface="Arial"/>
                         </a:rPr>
-                        <a:t>Pass rate</a:t>
+                        <a:t>Lines</a:t>
                       </a:r>
                     </a:p>
                   </a:txBody>
@@ -9969,7 +7298,7 @@
                           </a:solidFill>
                           <a:latin typeface="Arial"/>
                         </a:rPr>
-                        <a:t>Tokens</a:t>
+                        <a:t>Piece (the car)</a:t>
                       </a:r>
                     </a:p>
                   </a:txBody>
@@ -9997,35 +7326,7 @@
                           </a:solidFill>
                           <a:latin typeface="Arial"/>
                         </a:rPr>
-                        <a:t>Cost at $3 per million tokens</a:t>
-                      </a:r>
-                    </a:p>
-                  </a:txBody>
-                  <a:tcPr>
-                    <a:solidFill>
-                      <a:srgbClr val="0A2540"/>
-                    </a:solidFill>
-                  </a:tcPr>
-                </a:tc>
-                <a:tc>
-                  <a:txBody>
-                    <a:bodyPr wrap="square"/>
-                    <a:lstStyle/>
-                    <a:p>
-                      <a:pPr algn="l">
-                        <a:spcAft>
-                          <a:spcPts val="0"/>
-                        </a:spcAft>
-                        <a:buNone/>
-                      </a:pPr>
-                      <a:r>
-                        <a:rPr sz="1300" b="1">
-                          <a:solidFill>
-                            <a:srgbClr val="FFFFFF"/>
-                          </a:solidFill>
-                          <a:latin typeface="Arial"/>
-                        </a:rPr>
-                        <a:t>Per 1,000 runs</a:t>
+                        <a:t>What it holds</a:t>
                       </a:r>
                     </a:p>
                   </a:txBody>
@@ -10055,7 +7356,7 @@
                           </a:solidFill>
                           <a:latin typeface="Arial"/>
                         </a:rPr>
-                        <a:t>One cited research run (a single question)</a:t>
+                        <a:t>client.py</a:t>
                       </a:r>
                     </a:p>
                   </a:txBody>
@@ -10083,7 +7384,7 @@
                           </a:solidFill>
                           <a:latin typeface="Arial"/>
                         </a:rPr>
-                        <a:t>-</a:t>
+                        <a:t>143</a:t>
                       </a:r>
                     </a:p>
                   </a:txBody>
@@ -10111,7 +7412,7 @@
                           </a:solidFill>
                           <a:latin typeface="Arial"/>
                         </a:rPr>
-                        <a:t>~1,904</a:t>
+                        <a:t>the fuel</a:t>
                       </a:r>
                     </a:p>
                   </a:txBody>
@@ -10139,35 +7440,7 @@
                           </a:solidFill>
                           <a:latin typeface="Arial"/>
                         </a:rPr>
-                        <a:t>$0.0057</a:t>
-                      </a:r>
-                    </a:p>
-                  </a:txBody>
-                  <a:tcPr>
-                    <a:solidFill>
-                      <a:srgbClr val="FFFFFF"/>
-                    </a:solidFill>
-                  </a:tcPr>
-                </a:tc>
-                <a:tc>
-                  <a:txBody>
-                    <a:bodyPr wrap="square"/>
-                    <a:lstStyle/>
-                    <a:p>
-                      <a:pPr algn="l">
-                        <a:spcAft>
-                          <a:spcPts val="0"/>
-                        </a:spcAft>
-                        <a:buNone/>
-                      </a:pPr>
-                      <a:r>
-                        <a:rPr sz="1250" b="0">
-                          <a:solidFill>
-                            <a:srgbClr val="202B38"/>
-                          </a:solidFill>
-                          <a:latin typeface="Arial"/>
-                        </a:rPr>
-                        <a:t>$5.71</a:t>
+                        <a:t>load_client() reads the key from .env; MAIN_MODEL, WORKER_MODEL, PRICES, Usage, cost_usd()</a:t>
                       </a:r>
                     </a:p>
                   </a:txBody>
@@ -10197,7 +7470,7 @@
                           </a:solidFill>
                           <a:latin typeface="Arial"/>
                         </a:rPr>
-                        <a:t>A: bare model, 12 cases</a:t>
+                        <a:t>tools.py</a:t>
                       </a:r>
                     </a:p>
                   </a:txBody>
@@ -10225,7 +7498,7 @@
                           </a:solidFill>
                           <a:latin typeface="Arial"/>
                         </a:rPr>
-                        <a:t>0%</a:t>
+                        <a:t>142</a:t>
                       </a:r>
                     </a:p>
                   </a:txBody>
@@ -10253,7 +7526,7 @@
                           </a:solidFill>
                           <a:latin typeface="Arial"/>
                         </a:rPr>
-                        <a:t>~170</a:t>
+                        <a:t>the hands</a:t>
                       </a:r>
                     </a:p>
                   </a:txBody>
@@ -10281,35 +7554,7 @@
                           </a:solidFill>
                           <a:latin typeface="Arial"/>
                         </a:rPr>
-                        <a:t>$0.0005</a:t>
-                      </a:r>
-                    </a:p>
-                  </a:txBody>
-                  <a:tcPr>
-                    <a:solidFill>
-                      <a:srgbClr val="EEF3FD"/>
-                    </a:solidFill>
-                  </a:tcPr>
-                </a:tc>
-                <a:tc>
-                  <a:txBody>
-                    <a:bodyPr wrap="square"/>
-                    <a:lstStyle/>
-                    <a:p>
-                      <a:pPr algn="l">
-                        <a:spcAft>
-                          <a:spcPts val="0"/>
-                        </a:spcAft>
-                        <a:buNone/>
-                      </a:pPr>
-                      <a:r>
-                        <a:rPr sz="1250" b="0">
-                          <a:solidFill>
-                            <a:srgbClr val="202B38"/>
-                          </a:solidFill>
-                          <a:latin typeface="Arial"/>
-                        </a:rPr>
-                        <a:t>$0.51</a:t>
+                        <a:t>@tool builds the JSON schema from a signature and docstring; ToolRegistry; risk levels; deny_risk, allow_all</a:t>
                       </a:r>
                     </a:p>
                   </a:txBody>
@@ -10339,7 +7584,7 @@
                           </a:solidFill>
                           <a:latin typeface="Arial"/>
                         </a:rPr>
-                        <a:t>B: tools, no verification, 12 cases</a:t>
+                        <a:t>hooks.py</a:t>
                       </a:r>
                     </a:p>
                   </a:txBody>
@@ -10367,7 +7612,7 @@
                           </a:solidFill>
                           <a:latin typeface="Arial"/>
                         </a:rPr>
-                        <a:t>91.7%</a:t>
+                        <a:t>121</a:t>
                       </a:r>
                     </a:p>
                   </a:txBody>
@@ -10395,7 +7640,7 @@
                           </a:solidFill>
                           <a:latin typeface="Arial"/>
                         </a:rPr>
-                        <a:t>~11,800</a:t>
+                        <a:t>the brakes</a:t>
                       </a:r>
                     </a:p>
                   </a:txBody>
@@ -10423,35 +7668,7 @@
                           </a:solidFill>
                           <a:latin typeface="Arial"/>
                         </a:rPr>
-                        <a:t>$0.035</a:t>
-                      </a:r>
-                    </a:p>
-                  </a:txBody>
-                  <a:tcPr>
-                    <a:solidFill>
-                      <a:srgbClr val="FFFFFF"/>
-                    </a:solidFill>
-                  </a:tcPr>
-                </a:tc>
-                <a:tc>
-                  <a:txBody>
-                    <a:bodyPr wrap="square"/>
-                    <a:lstStyle/>
-                    <a:p>
-                      <a:pPr algn="l">
-                        <a:spcAft>
-                          <a:spcPts val="0"/>
-                        </a:spcAft>
-                        <a:buNone/>
-                      </a:pPr>
-                      <a:r>
-                        <a:rPr sz="1250" b="0">
-                          <a:solidFill>
-                            <a:srgbClr val="202B38"/>
-                          </a:solidFill>
-                          <a:latin typeface="Arial"/>
-                        </a:rPr>
-                        <a:t>$35.40</a:t>
+                        <a:t>Hooks(before_tool, after_tool, validate_answer); deny_paths, deny_risk_hook, require_sources, truncate_result</a:t>
                       </a:r>
                     </a:p>
                   </a:txBody>
@@ -10481,7 +7698,7 @@
                           </a:solidFill>
                           <a:latin typeface="Arial"/>
                         </a:rPr>
-                        <a:t>C: tools + verification, 12 cases</a:t>
+                        <a:t>trace.py</a:t>
                       </a:r>
                     </a:p>
                   </a:txBody>
@@ -10509,7 +7726,7 @@
                           </a:solidFill>
                           <a:latin typeface="Arial"/>
                         </a:rPr>
-                        <a:t>100%</a:t>
+                        <a:t>81</a:t>
                       </a:r>
                     </a:p>
                   </a:txBody>
@@ -10537,7 +7754,7 @@
                           </a:solidFill>
                           <a:latin typeface="Arial"/>
                         </a:rPr>
-                        <a:t>~24,600</a:t>
+                        <a:t>the dashboard</a:t>
                       </a:r>
                     </a:p>
                   </a:txBody>
@@ -10565,35 +7782,7 @@
                           </a:solidFill>
                           <a:latin typeface="Arial"/>
                         </a:rPr>
-                        <a:t>$0.074</a:t>
-                      </a:r>
-                    </a:p>
-                  </a:txBody>
-                  <a:tcPr>
-                    <a:solidFill>
-                      <a:srgbClr val="EEF3FD"/>
-                    </a:solidFill>
-                  </a:tcPr>
-                </a:tc>
-                <a:tc>
-                  <a:txBody>
-                    <a:bodyPr wrap="square"/>
-                    <a:lstStyle/>
-                    <a:p>
-                      <a:pPr algn="l">
-                        <a:spcAft>
-                          <a:spcPts val="0"/>
-                        </a:spcAft>
-                        <a:buNone/>
-                      </a:pPr>
-                      <a:r>
-                        <a:rPr sz="1250" b="0">
-                          <a:solidFill>
-                            <a:srgbClr val="202B38"/>
-                          </a:solidFill>
-                          <a:latin typeface="Arial"/>
-                        </a:rPr>
-                        <a:t>$73.80</a:t>
+                        <a:t>Trace, Event, show(), summary(), to_frame()</a:t>
                       </a:r>
                     </a:p>
                   </a:txBody>
@@ -10623,7 +7812,7 @@
                           </a:solidFill>
                           <a:latin typeface="Arial"/>
                         </a:rPr>
-                        <a:t>C compared with B</a:t>
+                        <a:t>loop.py</a:t>
                       </a:r>
                     </a:p>
                   </a:txBody>
@@ -10651,7 +7840,7 @@
                           </a:solidFill>
                           <a:latin typeface="Arial"/>
                         </a:rPr>
-                        <a:t>+1 case (+8.3 points)</a:t>
+                        <a:t>206</a:t>
                       </a:r>
                     </a:p>
                   </a:txBody>
@@ -10679,7 +7868,7 @@
                           </a:solidFill>
                           <a:latin typeface="Arial"/>
                         </a:rPr>
-                        <a:t>2.1x</a:t>
+                        <a:t>the steering</a:t>
                       </a:r>
                     </a:p>
                   </a:txBody>
@@ -10707,7 +7896,151 @@
                           </a:solidFill>
                           <a:latin typeface="Arial"/>
                         </a:rPr>
-                        <a:t>2.1x</a:t>
+                        <a:t>Agent.run(): the loop, the stop conditions, RunResult</a:t>
+                      </a:r>
+                    </a:p>
+                  </a:txBody>
+                  <a:tcPr>
+                    <a:solidFill>
+                      <a:srgbClr val="FFFFFF"/>
+                    </a:solidFill>
+                  </a:tcPr>
+                </a:tc>
+              </a:tr>
+              <a:tr h="457200">
+                <a:tc>
+                  <a:txBody>
+                    <a:bodyPr wrap="square"/>
+                    <a:lstStyle/>
+                    <a:p>
+                      <a:pPr algn="l">
+                        <a:spcAft>
+                          <a:spcPts val="0"/>
+                        </a:spcAft>
+                        <a:buNone/>
+                      </a:pPr>
+                      <a:r>
+                        <a:rPr sz="1250" b="0">
+                          <a:solidFill>
+                            <a:srgbClr val="202B38"/>
+                          </a:solidFill>
+                          <a:latin typeface="Arial"/>
+                        </a:rPr>
+                        <a:t>repo_tools.py</a:t>
+                      </a:r>
+                    </a:p>
+                  </a:txBody>
+                  <a:tcPr>
+                    <a:solidFill>
+                      <a:srgbClr val="EEF3FD"/>
+                    </a:solidFill>
+                  </a:tcPr>
+                </a:tc>
+                <a:tc>
+                  <a:txBody>
+                    <a:bodyPr wrap="square"/>
+                    <a:lstStyle/>
+                    <a:p>
+                      <a:pPr algn="l">
+                        <a:spcAft>
+                          <a:spcPts val="0"/>
+                        </a:spcAft>
+                        <a:buNone/>
+                      </a:pPr>
+                      <a:r>
+                        <a:rPr sz="1250" b="0">
+                          <a:solidFill>
+                            <a:srgbClr val="202B38"/>
+                          </a:solidFill>
+                          <a:latin typeface="Arial"/>
+                        </a:rPr>
+                        <a:t>156</a:t>
+                      </a:r>
+                    </a:p>
+                  </a:txBody>
+                  <a:tcPr>
+                    <a:solidFill>
+                      <a:srgbClr val="EEF3FD"/>
+                    </a:solidFill>
+                  </a:tcPr>
+                </a:tc>
+                <a:tc>
+                  <a:txBody>
+                    <a:bodyPr wrap="square"/>
+                    <a:lstStyle/>
+                    <a:p>
+                      <a:pPr algn="l">
+                        <a:spcAft>
+                          <a:spcPts val="0"/>
+                        </a:spcAft>
+                        <a:buNone/>
+                      </a:pPr>
+                      <a:r>
+                        <a:rPr sz="1250" b="0">
+                          <a:solidFill>
+                            <a:srgbClr val="202B38"/>
+                          </a:solidFill>
+                          <a:latin typeface="Arial"/>
+                        </a:rPr>
+                        <a:t>this module's tools</a:t>
+                      </a:r>
+                    </a:p>
+                  </a:txBody>
+                  <a:tcPr>
+                    <a:solidFill>
+                      <a:srgbClr val="EEF3FD"/>
+                    </a:solidFill>
+                  </a:tcPr>
+                </a:tc>
+                <a:tc>
+                  <a:txBody>
+                    <a:bodyPr wrap="square"/>
+                    <a:lstStyle/>
+                    <a:p>
+                      <a:pPr algn="l">
+                        <a:spcAft>
+                          <a:spcPts val="0"/>
+                        </a:spcAft>
+                        <a:buNone/>
+                      </a:pPr>
+                      <a:r>
+                        <a:rPr sz="1250" b="0">
+                          <a:solidFill>
+                            <a:srgbClr val="202B38"/>
+                          </a:solidFill>
+                          <a:latin typeface="Arial"/>
+                        </a:rPr>
+                        <a:t>list_files, read_file (path guards), write_note, read_notes, run_shell</a:t>
+                      </a:r>
+                    </a:p>
+                  </a:txBody>
+                  <a:tcPr>
+                    <a:solidFill>
+                      <a:srgbClr val="EEF3FD"/>
+                    </a:solidFill>
+                  </a:tcPr>
+                </a:tc>
+              </a:tr>
+              <a:tr h="457200">
+                <a:tc>
+                  <a:txBody>
+                    <a:bodyPr wrap="square"/>
+                    <a:lstStyle/>
+                    <a:p>
+                      <a:pPr algn="l">
+                        <a:spcAft>
+                          <a:spcPts val="0"/>
+                        </a:spcAft>
+                        <a:buNone/>
+                      </a:pPr>
+                      <a:r>
+                        <a:rPr sz="1250" b="0">
+                          <a:solidFill>
+                            <a:srgbClr val="202B38"/>
+                          </a:solidFill>
+                          <a:latin typeface="Arial"/>
+                        </a:rPr>
+                        <a:t>evals.py</a:t>
                       </a:r>
                     </a:p>
                   </a:txBody>
@@ -10735,7 +8068,2972 @@
                           </a:solidFill>
                           <a:latin typeface="Arial"/>
                         </a:rPr>
-                        <a:t>+$38.40</a:t>
+                        <a:t>189</a:t>
+                      </a:r>
+                    </a:p>
+                  </a:txBody>
+                  <a:tcPr>
+                    <a:solidFill>
+                      <a:srgbClr val="FFFFFF"/>
+                    </a:solidFill>
+                  </a:tcPr>
+                </a:tc>
+                <a:tc>
+                  <a:txBody>
+                    <a:bodyPr wrap="square"/>
+                    <a:lstStyle/>
+                    <a:p>
+                      <a:pPr algn="l">
+                        <a:spcAft>
+                          <a:spcPts val="0"/>
+                        </a:spcAft>
+                        <a:buNone/>
+                      </a:pPr>
+                      <a:r>
+                        <a:rPr sz="1250" b="0">
+                          <a:solidFill>
+                            <a:srgbClr val="202B38"/>
+                          </a:solidFill>
+                          <a:latin typeface="Arial"/>
+                        </a:rPr>
+                        <a:t>the test track</a:t>
+                      </a:r>
+                    </a:p>
+                  </a:txBody>
+                  <a:tcPr>
+                    <a:solidFill>
+                      <a:srgbClr val="FFFFFF"/>
+                    </a:solidFill>
+                  </a:tcPr>
+                </a:tc>
+                <a:tc>
+                  <a:txBody>
+                    <a:bodyPr wrap="square"/>
+                    <a:lstStyle/>
+                    <a:p>
+                      <a:pPr algn="l">
+                        <a:spcAft>
+                          <a:spcPts val="0"/>
+                        </a:spcAft>
+                        <a:buNone/>
+                      </a:pPr>
+                      <a:r>
+                        <a:rPr sz="1250" b="0">
+                          <a:solidFill>
+                            <a:srgbClr val="202B38"/>
+                          </a:solidFill>
+                          <a:latin typeface="Arial"/>
+                        </a:rPr>
+                        <a:t>EvalCase, graders, run_evals, compare, Report</a:t>
+                      </a:r>
+                    </a:p>
+                  </a:txBody>
+                  <a:tcPr>
+                    <a:solidFill>
+                      <a:srgbClr val="FFFFFF"/>
+                    </a:solidFill>
+                  </a:tcPr>
+                </a:tc>
+              </a:tr>
+              <a:tr h="457200">
+                <a:tc>
+                  <a:txBody>
+                    <a:bodyPr wrap="square"/>
+                    <a:lstStyle/>
+                    <a:p>
+                      <a:pPr algn="l">
+                        <a:spcAft>
+                          <a:spcPts val="0"/>
+                        </a:spcAft>
+                        <a:buNone/>
+                      </a:pPr>
+                      <a:r>
+                        <a:rPr sz="1250" b="0">
+                          <a:solidFill>
+                            <a:srgbClr val="202B38"/>
+                          </a:solidFill>
+                          <a:latin typeface="Arial"/>
+                        </a:rPr>
+                        <a:t>cli.py</a:t>
+                      </a:r>
+                    </a:p>
+                  </a:txBody>
+                  <a:tcPr>
+                    <a:solidFill>
+                      <a:srgbClr val="EEF3FD"/>
+                    </a:solidFill>
+                  </a:tcPr>
+                </a:tc>
+                <a:tc>
+                  <a:txBody>
+                    <a:bodyPr wrap="square"/>
+                    <a:lstStyle/>
+                    <a:p>
+                      <a:pPr algn="l">
+                        <a:spcAft>
+                          <a:spcPts val="0"/>
+                        </a:spcAft>
+                        <a:buNone/>
+                      </a:pPr>
+                      <a:r>
+                        <a:rPr sz="1250" b="0">
+                          <a:solidFill>
+                            <a:srgbClr val="202B38"/>
+                          </a:solidFill>
+                          <a:latin typeface="Arial"/>
+                        </a:rPr>
+                        <a:t>107</a:t>
+                      </a:r>
+                    </a:p>
+                  </a:txBody>
+                  <a:tcPr>
+                    <a:solidFill>
+                      <a:srgbClr val="EEF3FD"/>
+                    </a:solidFill>
+                  </a:tcPr>
+                </a:tc>
+                <a:tc>
+                  <a:txBody>
+                    <a:bodyPr wrap="square"/>
+                    <a:lstStyle/>
+                    <a:p>
+                      <a:pPr algn="l">
+                        <a:spcAft>
+                          <a:spcPts val="0"/>
+                        </a:spcAft>
+                        <a:buNone/>
+                      </a:pPr>
+                      <a:r>
+                        <a:rPr sz="1250" b="0">
+                          <a:solidFill>
+                            <a:srgbClr val="202B38"/>
+                          </a:solidFill>
+                          <a:latin typeface="Arial"/>
+                        </a:rPr>
+                        <a:t>the ignition key</a:t>
+                      </a:r>
+                    </a:p>
+                  </a:txBody>
+                  <a:tcPr>
+                    <a:solidFill>
+                      <a:srgbClr val="EEF3FD"/>
+                    </a:solidFill>
+                  </a:tcPr>
+                </a:tc>
+                <a:tc>
+                  <a:txBody>
+                    <a:bodyPr wrap="square"/>
+                    <a:lstStyle/>
+                    <a:p>
+                      <a:pPr algn="l">
+                        <a:spcAft>
+                          <a:spcPts val="0"/>
+                        </a:spcAft>
+                        <a:buNone/>
+                      </a:pPr>
+                      <a:r>
+                        <a:rPr sz="1250" b="0">
+                          <a:solidFill>
+                            <a:srgbClr val="202B38"/>
+                          </a:solidFill>
+                          <a:latin typeface="Arial"/>
+                        </a:rPr>
+                        <a:t>python -m harness ask | eval | show</a:t>
+                      </a:r>
+                    </a:p>
+                  </a:txBody>
+                  <a:tcPr>
+                    <a:solidFill>
+                      <a:srgbClr val="EEF3FD"/>
+                    </a:solidFill>
+                  </a:tcPr>
+                </a:tc>
+              </a:tr>
+            </a:tbl>
+          </a:graphicData>
+        </a:graphic>
+      </p:graphicFrame>
+      <p:sp>
+        <p:nvSpPr>
+          <p:cNvPr id="8" name="TextBox 7"/>
+          <p:cNvSpPr txBox="1"/>
+          <p:nvPr/>
+        </p:nvSpPr>
+        <p:spPr>
+          <a:xfrm>
+            <a:off x="548640" y="6053328"/>
+            <a:ext cx="11091672" cy="502920"/>
+          </a:xfrm>
+          <a:prstGeom prst="rect">
+            <a:avLst/>
+          </a:prstGeom>
+          <a:noFill/>
+        </p:spPr>
+        <p:txBody>
+          <a:bodyPr wrap="square">
+            <a:spAutoFit/>
+          </a:bodyPr>
+          <a:lstStyle/>
+          <a:p>
+            <a:pPr algn="l">
+              <a:spcAft>
+                <a:spcPts val="600"/>
+              </a:spcAft>
+              <a:buNone/>
+            </a:pPr>
+            <a:r>
+              <a:rPr sz="1200" b="0">
+                <a:solidFill>
+                  <a:srgbClr val="1E5EF3"/>
+                </a:solidFill>
+                <a:latin typeface="Arial"/>
+              </a:rPr>
+              <a:t>M5 - Harness Engineering/harness/, standard library plus anthropic, python-dotenv, pyyaml, pydantic. __init__.py re-exports everything; __main__.py starts the CLI. Line counts as of 2 Oct 2026.</a:t>
+            </a:r>
+          </a:p>
+        </p:txBody>
+      </p:sp>
+      <p:sp>
+        <p:nvSpPr>
+          <p:cNvPr id="9" name="TextBox 8"/>
+          <p:cNvSpPr txBox="1"/>
+          <p:nvPr/>
+        </p:nvSpPr>
+        <p:spPr>
+          <a:xfrm>
+            <a:off x="548640" y="6473952"/>
+            <a:ext cx="7315200" cy="292608"/>
+          </a:xfrm>
+          <a:prstGeom prst="rect">
+            <a:avLst/>
+          </a:prstGeom>
+          <a:noFill/>
+        </p:spPr>
+        <p:txBody>
+          <a:bodyPr wrap="square">
+            <a:spAutoFit/>
+          </a:bodyPr>
+          <a:lstStyle/>
+          <a:p>
+            <a:pPr algn="l">
+              <a:spcAft>
+                <a:spcPts val="600"/>
+              </a:spcAft>
+              <a:buNone/>
+            </a:pPr>
+            <a:r>
+              <a:rPr sz="900" b="0">
+                <a:solidFill>
+                  <a:srgbClr val="5B6774"/>
+                </a:solidFill>
+                <a:latin typeface="Arial"/>
+              </a:rPr>
+              <a:t>M5 Session 3 - Building a Harness</a:t>
+            </a:r>
+          </a:p>
+        </p:txBody>
+      </p:sp>
+      <p:sp>
+        <p:nvSpPr>
+          <p:cNvPr id="10" name="TextBox 9"/>
+          <p:cNvSpPr txBox="1"/>
+          <p:nvPr/>
+        </p:nvSpPr>
+        <p:spPr>
+          <a:xfrm>
+            <a:off x="11292840" y="6473952"/>
+            <a:ext cx="548640" cy="292608"/>
+          </a:xfrm>
+          <a:prstGeom prst="rect">
+            <a:avLst/>
+          </a:prstGeom>
+          <a:noFill/>
+        </p:spPr>
+        <p:txBody>
+          <a:bodyPr wrap="square">
+            <a:spAutoFit/>
+          </a:bodyPr>
+          <a:lstStyle/>
+          <a:p>
+            <a:pPr algn="r">
+              <a:spcAft>
+                <a:spcPts val="600"/>
+              </a:spcAft>
+              <a:buNone/>
+            </a:pPr>
+            <a:r>
+              <a:rPr sz="900" b="0">
+                <a:solidFill>
+                  <a:srgbClr val="5B6774"/>
+                </a:solidFill>
+                <a:latin typeface="Arial"/>
+              </a:rPr>
+              <a:t>14</a:t>
+            </a:r>
+          </a:p>
+        </p:txBody>
+      </p:sp>
+    </p:spTree>
+  </p:cSld>
+  <p:clrMapOvr>
+    <a:masterClrMapping/>
+  </p:clrMapOvr>
+</p:sld>
+</file>
+
+<file path=ppt/slides/slide15.xml><?xml version="1.0" encoding="utf-8"?>
+<p:sld xmlns:a="http://schemas.openxmlformats.org/drawingml/2006/main" xmlns:p="http://schemas.openxmlformats.org/presentationml/2006/main" xmlns:r="http://schemas.openxmlformats.org/officeDocument/2006/relationships">
+  <p:cSld>
+    <p:spTree>
+      <p:nvGrpSpPr>
+        <p:cNvPr id="1" name=""/>
+        <p:cNvGrpSpPr/>
+        <p:nvPr/>
+      </p:nvGrpSpPr>
+      <p:grpSpPr/>
+      <p:sp>
+        <p:nvSpPr>
+          <p:cNvPr id="2" name="Rectangle 1"/>
+          <p:cNvSpPr/>
+          <p:nvPr/>
+        </p:nvSpPr>
+        <p:spPr>
+          <a:xfrm>
+            <a:off x="0" y="0"/>
+            <a:ext cx="12191695" cy="6858000"/>
+          </a:xfrm>
+          <a:prstGeom prst="rect">
+            <a:avLst/>
+          </a:prstGeom>
+          <a:solidFill>
+            <a:srgbClr val="FFFFFF"/>
+          </a:solidFill>
+          <a:ln>
+            <a:noFill/>
+          </a:ln>
+          <a:effectLst/>
+        </p:spPr>
+        <p:style>
+          <a:lnRef idx="1">
+            <a:schemeClr val="accent1"/>
+          </a:lnRef>
+          <a:fillRef idx="3">
+            <a:schemeClr val="accent1"/>
+          </a:fillRef>
+          <a:effectRef idx="2">
+            <a:schemeClr val="accent1"/>
+          </a:effectRef>
+          <a:fontRef idx="minor">
+            <a:schemeClr val="lt1"/>
+          </a:fontRef>
+        </p:style>
+        <p:txBody>
+          <a:bodyPr rtlCol="0" anchor="ctr"/>
+          <a:lstStyle/>
+          <a:p>
+            <a:pPr algn="ctr"/>
+          </a:p>
+        </p:txBody>
+      </p:sp>
+      <p:sp>
+        <p:nvSpPr>
+          <p:cNvPr id="3" name="Rectangle 2"/>
+          <p:cNvSpPr/>
+          <p:nvPr/>
+        </p:nvSpPr>
+        <p:spPr>
+          <a:xfrm>
+            <a:off x="548640" y="475488"/>
+            <a:ext cx="457200" cy="54864"/>
+          </a:xfrm>
+          <a:prstGeom prst="rect">
+            <a:avLst/>
+          </a:prstGeom>
+          <a:solidFill>
+            <a:srgbClr val="1E5EF3"/>
+          </a:solidFill>
+          <a:ln>
+            <a:noFill/>
+          </a:ln>
+          <a:effectLst/>
+        </p:spPr>
+        <p:style>
+          <a:lnRef idx="1">
+            <a:schemeClr val="accent1"/>
+          </a:lnRef>
+          <a:fillRef idx="3">
+            <a:schemeClr val="accent1"/>
+          </a:fillRef>
+          <a:effectRef idx="2">
+            <a:schemeClr val="accent1"/>
+          </a:effectRef>
+          <a:fontRef idx="minor">
+            <a:schemeClr val="lt1"/>
+          </a:fontRef>
+        </p:style>
+        <p:txBody>
+          <a:bodyPr rtlCol="0" anchor="ctr"/>
+          <a:lstStyle/>
+          <a:p>
+            <a:pPr algn="ctr"/>
+          </a:p>
+        </p:txBody>
+      </p:sp>
+      <p:sp>
+        <p:nvSpPr>
+          <p:cNvPr id="4" name="TextBox 3"/>
+          <p:cNvSpPr txBox="1"/>
+          <p:nvPr/>
+        </p:nvSpPr>
+        <p:spPr>
+          <a:xfrm>
+            <a:off x="548640" y="603504"/>
+            <a:ext cx="11091672" cy="274320"/>
+          </a:xfrm>
+          <a:prstGeom prst="rect">
+            <a:avLst/>
+          </a:prstGeom>
+          <a:noFill/>
+        </p:spPr>
+        <p:txBody>
+          <a:bodyPr wrap="square">
+            <a:spAutoFit/>
+          </a:bodyPr>
+          <a:lstStyle/>
+          <a:p>
+            <a:pPr algn="l">
+              <a:spcAft>
+                <a:spcPts val="600"/>
+              </a:spcAft>
+              <a:buNone/>
+            </a:pPr>
+            <a:r>
+              <a:rPr sz="1100" b="1">
+                <a:solidFill>
+                  <a:srgbClr val="1E5EF3"/>
+                </a:solidFill>
+                <a:latin typeface="Arial"/>
+              </a:rPr>
+              <a:t>NOTEBOOK 03 - THE LOOP'S STOP CONDITIONS</a:t>
+            </a:r>
+          </a:p>
+        </p:txBody>
+      </p:sp>
+      <p:sp>
+        <p:nvSpPr>
+          <p:cNvPr id="5" name="TextBox 4"/>
+          <p:cNvSpPr txBox="1"/>
+          <p:nvPr/>
+        </p:nvSpPr>
+        <p:spPr>
+          <a:xfrm>
+            <a:off x="548640" y="868680"/>
+            <a:ext cx="11091672" cy="777240"/>
+          </a:xfrm>
+          <a:prstGeom prst="rect">
+            <a:avLst/>
+          </a:prstGeom>
+          <a:noFill/>
+        </p:spPr>
+        <p:txBody>
+          <a:bodyPr wrap="square">
+            <a:spAutoFit/>
+          </a:bodyPr>
+          <a:lstStyle/>
+          <a:p>
+            <a:pPr algn="l">
+              <a:spcAft>
+                <a:spcPts val="0"/>
+              </a:spcAft>
+              <a:buNone/>
+            </a:pPr>
+            <a:r>
+              <a:rPr sz="2600" b="1">
+                <a:solidFill>
+                  <a:srgbClr val="0A2540"/>
+                </a:solidFill>
+                <a:latin typeface="Arial"/>
+              </a:rPr>
+              <a:t>Three recorded runs, three exits: done, max_turns, budget</a:t>
+            </a:r>
+          </a:p>
+        </p:txBody>
+      </p:sp>
+      <p:sp>
+        <p:nvSpPr>
+          <p:cNvPr id="6" name="Rectangle 5"/>
+          <p:cNvSpPr/>
+          <p:nvPr/>
+        </p:nvSpPr>
+        <p:spPr>
+          <a:xfrm>
+            <a:off x="548640" y="1664208"/>
+            <a:ext cx="11091672" cy="12801"/>
+          </a:xfrm>
+          <a:prstGeom prst="rect">
+            <a:avLst/>
+          </a:prstGeom>
+          <a:solidFill>
+            <a:srgbClr val="B9D0FA"/>
+          </a:solidFill>
+          <a:ln>
+            <a:noFill/>
+          </a:ln>
+          <a:effectLst/>
+        </p:spPr>
+        <p:style>
+          <a:lnRef idx="1">
+            <a:schemeClr val="accent1"/>
+          </a:lnRef>
+          <a:fillRef idx="3">
+            <a:schemeClr val="accent1"/>
+          </a:fillRef>
+          <a:effectRef idx="2">
+            <a:schemeClr val="accent1"/>
+          </a:effectRef>
+          <a:fontRef idx="minor">
+            <a:schemeClr val="lt1"/>
+          </a:fontRef>
+        </p:style>
+        <p:txBody>
+          <a:bodyPr rtlCol="0" anchor="ctr"/>
+          <a:lstStyle/>
+          <a:p>
+            <a:pPr algn="ctr"/>
+          </a:p>
+        </p:txBody>
+      </p:sp>
+      <p:pic>
+        <p:nvPicPr>
+          <p:cNvPr id="7" name="Picture 6" descr="s3_exits.png"/>
+          <p:cNvPicPr>
+            <a:picLocks noChangeAspect="1"/>
+          </p:cNvPicPr>
+          <p:nvPr/>
+        </p:nvPicPr>
+        <p:blipFill>
+          <a:blip r:embed="rId2"/>
+          <a:stretch>
+            <a:fillRect/>
+          </a:stretch>
+        </p:blipFill>
+        <p:spPr>
+          <a:xfrm>
+            <a:off x="1648460" y="1874519"/>
+            <a:ext cx="8864599" cy="4114800"/>
+          </a:xfrm>
+          <a:prstGeom prst="rect">
+            <a:avLst/>
+          </a:prstGeom>
+        </p:spPr>
+      </p:pic>
+      <p:sp>
+        <p:nvSpPr>
+          <p:cNvPr id="8" name="TextBox 7"/>
+          <p:cNvSpPr txBox="1"/>
+          <p:nvPr/>
+        </p:nvSpPr>
+        <p:spPr>
+          <a:xfrm>
+            <a:off x="1554480" y="6062471"/>
+            <a:ext cx="9052560" cy="365760"/>
+          </a:xfrm>
+          <a:prstGeom prst="rect">
+            <a:avLst/>
+          </a:prstGeom>
+          <a:noFill/>
+        </p:spPr>
+        <p:txBody>
+          <a:bodyPr wrap="square">
+            <a:spAutoFit/>
+          </a:bodyPr>
+          <a:lstStyle/>
+          <a:p>
+            <a:pPr algn="ctr">
+              <a:spcAft>
+                <a:spcPts val="600"/>
+              </a:spcAft>
+              <a:buNone/>
+            </a:pPr>
+            <a:r>
+              <a:rPr sz="1100" b="0">
+                <a:solidFill>
+                  <a:srgbClr val="5B6774"/>
+                </a:solidFill>
+                <a:latin typeface="Arial"/>
+              </a:rPr>
+              <a:t>How to read it: one trace per run, top to bottom; 'in / out' are the tokens the API returned per call. Recorded run on claude-opus-5, 30 Sep 2026; live runs vary.</a:t>
+            </a:r>
+          </a:p>
+        </p:txBody>
+      </p:sp>
+      <p:sp>
+        <p:nvSpPr>
+          <p:cNvPr id="9" name="TextBox 8"/>
+          <p:cNvSpPr txBox="1"/>
+          <p:nvPr/>
+        </p:nvSpPr>
+        <p:spPr>
+          <a:xfrm>
+            <a:off x="548640" y="6473952"/>
+            <a:ext cx="7315200" cy="292608"/>
+          </a:xfrm>
+          <a:prstGeom prst="rect">
+            <a:avLst/>
+          </a:prstGeom>
+          <a:noFill/>
+        </p:spPr>
+        <p:txBody>
+          <a:bodyPr wrap="square">
+            <a:spAutoFit/>
+          </a:bodyPr>
+          <a:lstStyle/>
+          <a:p>
+            <a:pPr algn="l">
+              <a:spcAft>
+                <a:spcPts val="600"/>
+              </a:spcAft>
+              <a:buNone/>
+            </a:pPr>
+            <a:r>
+              <a:rPr sz="900" b="0">
+                <a:solidFill>
+                  <a:srgbClr val="5B6774"/>
+                </a:solidFill>
+                <a:latin typeface="Arial"/>
+              </a:rPr>
+              <a:t>M5 Session 3 - Building a Harness</a:t>
+            </a:r>
+          </a:p>
+        </p:txBody>
+      </p:sp>
+      <p:sp>
+        <p:nvSpPr>
+          <p:cNvPr id="10" name="TextBox 9"/>
+          <p:cNvSpPr txBox="1"/>
+          <p:nvPr/>
+        </p:nvSpPr>
+        <p:spPr>
+          <a:xfrm>
+            <a:off x="11292840" y="6473952"/>
+            <a:ext cx="548640" cy="292608"/>
+          </a:xfrm>
+          <a:prstGeom prst="rect">
+            <a:avLst/>
+          </a:prstGeom>
+          <a:noFill/>
+        </p:spPr>
+        <p:txBody>
+          <a:bodyPr wrap="square">
+            <a:spAutoFit/>
+          </a:bodyPr>
+          <a:lstStyle/>
+          <a:p>
+            <a:pPr algn="r">
+              <a:spcAft>
+                <a:spcPts val="600"/>
+              </a:spcAft>
+              <a:buNone/>
+            </a:pPr>
+            <a:r>
+              <a:rPr sz="900" b="0">
+                <a:solidFill>
+                  <a:srgbClr val="5B6774"/>
+                </a:solidFill>
+                <a:latin typeface="Arial"/>
+              </a:rPr>
+              <a:t>15</a:t>
+            </a:r>
+          </a:p>
+        </p:txBody>
+      </p:sp>
+    </p:spTree>
+  </p:cSld>
+  <p:clrMapOvr>
+    <a:masterClrMapping/>
+  </p:clrMapOvr>
+</p:sld>
+</file>
+
+<file path=ppt/slides/slide16.xml><?xml version="1.0" encoding="utf-8"?>
+<p:sld xmlns:a="http://schemas.openxmlformats.org/drawingml/2006/main" xmlns:p="http://schemas.openxmlformats.org/presentationml/2006/main" xmlns:r="http://schemas.openxmlformats.org/officeDocument/2006/relationships">
+  <p:cSld>
+    <p:spTree>
+      <p:nvGrpSpPr>
+        <p:cNvPr id="1" name=""/>
+        <p:cNvGrpSpPr/>
+        <p:nvPr/>
+      </p:nvGrpSpPr>
+      <p:grpSpPr/>
+      <p:sp>
+        <p:nvSpPr>
+          <p:cNvPr id="2" name="Rectangle 1"/>
+          <p:cNvSpPr/>
+          <p:nvPr/>
+        </p:nvSpPr>
+        <p:spPr>
+          <a:xfrm>
+            <a:off x="0" y="0"/>
+            <a:ext cx="12191695" cy="6858000"/>
+          </a:xfrm>
+          <a:prstGeom prst="rect">
+            <a:avLst/>
+          </a:prstGeom>
+          <a:solidFill>
+            <a:srgbClr val="FFFFFF"/>
+          </a:solidFill>
+          <a:ln>
+            <a:noFill/>
+          </a:ln>
+          <a:effectLst/>
+        </p:spPr>
+        <p:style>
+          <a:lnRef idx="1">
+            <a:schemeClr val="accent1"/>
+          </a:lnRef>
+          <a:fillRef idx="3">
+            <a:schemeClr val="accent1"/>
+          </a:fillRef>
+          <a:effectRef idx="2">
+            <a:schemeClr val="accent1"/>
+          </a:effectRef>
+          <a:fontRef idx="minor">
+            <a:schemeClr val="lt1"/>
+          </a:fontRef>
+        </p:style>
+        <p:txBody>
+          <a:bodyPr rtlCol="0" anchor="ctr"/>
+          <a:lstStyle/>
+          <a:p>
+            <a:pPr algn="ctr"/>
+          </a:p>
+        </p:txBody>
+      </p:sp>
+      <p:sp>
+        <p:nvSpPr>
+          <p:cNvPr id="3" name="Rectangle 2"/>
+          <p:cNvSpPr/>
+          <p:nvPr/>
+        </p:nvSpPr>
+        <p:spPr>
+          <a:xfrm>
+            <a:off x="548640" y="475488"/>
+            <a:ext cx="457200" cy="54864"/>
+          </a:xfrm>
+          <a:prstGeom prst="rect">
+            <a:avLst/>
+          </a:prstGeom>
+          <a:solidFill>
+            <a:srgbClr val="1E5EF3"/>
+          </a:solidFill>
+          <a:ln>
+            <a:noFill/>
+          </a:ln>
+          <a:effectLst/>
+        </p:spPr>
+        <p:style>
+          <a:lnRef idx="1">
+            <a:schemeClr val="accent1"/>
+          </a:lnRef>
+          <a:fillRef idx="3">
+            <a:schemeClr val="accent1"/>
+          </a:fillRef>
+          <a:effectRef idx="2">
+            <a:schemeClr val="accent1"/>
+          </a:effectRef>
+          <a:fontRef idx="minor">
+            <a:schemeClr val="lt1"/>
+          </a:fontRef>
+        </p:style>
+        <p:txBody>
+          <a:bodyPr rtlCol="0" anchor="ctr"/>
+          <a:lstStyle/>
+          <a:p>
+            <a:pPr algn="ctr"/>
+          </a:p>
+        </p:txBody>
+      </p:sp>
+      <p:sp>
+        <p:nvSpPr>
+          <p:cNvPr id="4" name="TextBox 3"/>
+          <p:cNvSpPr txBox="1"/>
+          <p:nvPr/>
+        </p:nvSpPr>
+        <p:spPr>
+          <a:xfrm>
+            <a:off x="548640" y="603504"/>
+            <a:ext cx="11091672" cy="274320"/>
+          </a:xfrm>
+          <a:prstGeom prst="rect">
+            <a:avLst/>
+          </a:prstGeom>
+          <a:noFill/>
+        </p:spPr>
+        <p:txBody>
+          <a:bodyPr wrap="square">
+            <a:spAutoFit/>
+          </a:bodyPr>
+          <a:lstStyle/>
+          <a:p>
+            <a:pPr algn="l">
+              <a:spcAft>
+                <a:spcPts val="600"/>
+              </a:spcAft>
+              <a:buNone/>
+            </a:pPr>
+            <a:r>
+              <a:rPr sz="1100" b="1">
+                <a:solidFill>
+                  <a:srgbClr val="1E5EF3"/>
+                </a:solidFill>
+                <a:latin typeface="Arial"/>
+              </a:rPr>
+              <a:t>NOTEBOOK 03 - HOOKS AND PERMISSIONS</a:t>
+            </a:r>
+          </a:p>
+        </p:txBody>
+      </p:sp>
+      <p:sp>
+        <p:nvSpPr>
+          <p:cNvPr id="5" name="TextBox 4"/>
+          <p:cNvSpPr txBox="1"/>
+          <p:nvPr/>
+        </p:nvSpPr>
+        <p:spPr>
+          <a:xfrm>
+            <a:off x="548640" y="868680"/>
+            <a:ext cx="11091672" cy="777240"/>
+          </a:xfrm>
+          <a:prstGeom prst="rect">
+            <a:avLst/>
+          </a:prstGeom>
+          <a:noFill/>
+        </p:spPr>
+        <p:txBody>
+          <a:bodyPr wrap="square">
+            <a:spAutoFit/>
+          </a:bodyPr>
+          <a:lstStyle/>
+          <a:p>
+            <a:pPr algn="l">
+              <a:spcAft>
+                <a:spcPts val="0"/>
+              </a:spcAft>
+              <a:buNone/>
+            </a:pPr>
+            <a:r>
+              <a:rPr sz="2600" b="1">
+                <a:solidFill>
+                  <a:srgbClr val="0A2540"/>
+                </a:solidFill>
+                <a:latin typeface="Arial"/>
+              </a:rPr>
+              <a:t>Guardrails that fired: the key file refused, the shell denied</a:t>
+            </a:r>
+          </a:p>
+        </p:txBody>
+      </p:sp>
+      <p:sp>
+        <p:nvSpPr>
+          <p:cNvPr id="6" name="Rectangle 5"/>
+          <p:cNvSpPr/>
+          <p:nvPr/>
+        </p:nvSpPr>
+        <p:spPr>
+          <a:xfrm>
+            <a:off x="548640" y="1664208"/>
+            <a:ext cx="11091672" cy="12801"/>
+          </a:xfrm>
+          <a:prstGeom prst="rect">
+            <a:avLst/>
+          </a:prstGeom>
+          <a:solidFill>
+            <a:srgbClr val="B9D0FA"/>
+          </a:solidFill>
+          <a:ln>
+            <a:noFill/>
+          </a:ln>
+          <a:effectLst/>
+        </p:spPr>
+        <p:style>
+          <a:lnRef idx="1">
+            <a:schemeClr val="accent1"/>
+          </a:lnRef>
+          <a:fillRef idx="3">
+            <a:schemeClr val="accent1"/>
+          </a:fillRef>
+          <a:effectRef idx="2">
+            <a:schemeClr val="accent1"/>
+          </a:effectRef>
+          <a:fontRef idx="minor">
+            <a:schemeClr val="lt1"/>
+          </a:fontRef>
+        </p:style>
+        <p:txBody>
+          <a:bodyPr rtlCol="0" anchor="ctr"/>
+          <a:lstStyle/>
+          <a:p>
+            <a:pPr algn="ctr"/>
+          </a:p>
+        </p:txBody>
+      </p:sp>
+      <p:sp>
+        <p:nvSpPr>
+          <p:cNvPr id="7" name="Rectangle 6"/>
+          <p:cNvSpPr/>
+          <p:nvPr/>
+        </p:nvSpPr>
+        <p:spPr>
+          <a:xfrm>
+            <a:off x="548640" y="1874519"/>
+            <a:ext cx="5394960" cy="3977639"/>
+          </a:xfrm>
+          <a:prstGeom prst="rect">
+            <a:avLst/>
+          </a:prstGeom>
+          <a:solidFill>
+            <a:srgbClr val="EEF3FD"/>
+          </a:solidFill>
+          <a:ln>
+            <a:noFill/>
+          </a:ln>
+          <a:effectLst/>
+        </p:spPr>
+        <p:style>
+          <a:lnRef idx="1">
+            <a:schemeClr val="accent1"/>
+          </a:lnRef>
+          <a:fillRef idx="3">
+            <a:schemeClr val="accent1"/>
+          </a:fillRef>
+          <a:effectRef idx="2">
+            <a:schemeClr val="accent1"/>
+          </a:effectRef>
+          <a:fontRef idx="minor">
+            <a:schemeClr val="lt1"/>
+          </a:fontRef>
+        </p:style>
+        <p:txBody>
+          <a:bodyPr rtlCol="0" anchor="ctr"/>
+          <a:lstStyle/>
+          <a:p>
+            <a:pPr algn="ctr"/>
+          </a:p>
+        </p:txBody>
+      </p:sp>
+      <p:sp>
+        <p:nvSpPr>
+          <p:cNvPr id="8" name="TextBox 7"/>
+          <p:cNvSpPr txBox="1"/>
+          <p:nvPr/>
+        </p:nvSpPr>
+        <p:spPr>
+          <a:xfrm>
+            <a:off x="777240" y="2039111"/>
+            <a:ext cx="4937760" cy="365760"/>
+          </a:xfrm>
+          <a:prstGeom prst="rect">
+            <a:avLst/>
+          </a:prstGeom>
+          <a:noFill/>
+        </p:spPr>
+        <p:txBody>
+          <a:bodyPr wrap="square">
+            <a:spAutoFit/>
+          </a:bodyPr>
+          <a:lstStyle/>
+          <a:p>
+            <a:pPr algn="l">
+              <a:spcAft>
+                <a:spcPts val="600"/>
+              </a:spcAft>
+              <a:buNone/>
+            </a:pPr>
+            <a:r>
+              <a:rPr sz="1500" b="1">
+                <a:solidFill>
+                  <a:srgbClr val="0A2540"/>
+                </a:solidFill>
+                <a:latin typeface="Arial"/>
+              </a:rPr>
+              <a:t>Before a tool: hook deny_paths('.env')</a:t>
+            </a:r>
+          </a:p>
+        </p:txBody>
+      </p:sp>
+      <p:sp>
+        <p:nvSpPr>
+          <p:cNvPr id="9" name="TextBox 8"/>
+          <p:cNvSpPr txBox="1"/>
+          <p:nvPr/>
+        </p:nvSpPr>
+        <p:spPr>
+          <a:xfrm>
+            <a:off x="777240" y="2441447"/>
+            <a:ext cx="4937760" cy="3246119"/>
+          </a:xfrm>
+          <a:prstGeom prst="rect">
+            <a:avLst/>
+          </a:prstGeom>
+          <a:noFill/>
+        </p:spPr>
+        <p:txBody>
+          <a:bodyPr wrap="square">
+            <a:spAutoFit/>
+          </a:bodyPr>
+          <a:lstStyle/>
+          <a:p>
+            <a:pPr algn="l" indent="-228600" marL="228600">
+              <a:spcAft>
+                <a:spcPts val="600"/>
+              </a:spcAft>
+              <a:buClr>
+                <a:srgbClr val="1E5EF3"/>
+              </a:buClr>
+              <a:buChar char="—"/>
+            </a:pPr>
+            <a:r>
+              <a:rPr sz="1300" b="0">
+                <a:solidFill>
+                  <a:srgbClr val="202B38"/>
+                </a:solidFill>
+                <a:latin typeface="Arial"/>
+              </a:rPr>
+              <a:t>Task: read .env at the root and list its variable names. Turn 1: list_files('.') - no .env in the listing</a:t>
+            </a:r>
+          </a:p>
+          <a:p>
+            <a:pPr algn="l" indent="-228600" marL="228600">
+              <a:spcAft>
+                <a:spcPts val="600"/>
+              </a:spcAft>
+              <a:buClr>
+                <a:srgbClr val="1E5EF3"/>
+              </a:buClr>
+              <a:buChar char="—"/>
+            </a:pPr>
+            <a:r>
+              <a:rPr sz="1300" b="0">
+                <a:solidFill>
+                  <a:srgbClr val="202B38"/>
+                </a:solidFill>
+                <a:latin typeface="Arial"/>
+              </a:rPr>
+              <a:t>Turn 2: read_file('.env') -&gt; denied: "'.env' is a protected file"; a 'denied' event replaces the 'tool' event</a:t>
+            </a:r>
+          </a:p>
+          <a:p>
+            <a:pPr algn="l" indent="-228600" marL="228600">
+              <a:spcAft>
+                <a:spcPts val="600"/>
+              </a:spcAft>
+              <a:buClr>
+                <a:srgbClr val="1E5EF3"/>
+              </a:buClr>
+              <a:buChar char="—"/>
+            </a:pPr>
+            <a:r>
+              <a:rPr sz="1300" b="0">
+                <a:solidFill>
+                  <a:srgbClr val="202B38"/>
+                </a:solidFill>
+                <a:latin typeface="Arial"/>
+              </a:rPr>
+              <a:t>Turn 3: "I can't answer this one" - the model reports the block and offers safer routes instead</a:t>
+            </a:r>
+          </a:p>
+          <a:p>
+            <a:pPr algn="l" indent="-228600" marL="228600">
+              <a:spcAft>
+                <a:spcPts val="600"/>
+              </a:spcAft>
+              <a:buClr>
+                <a:srgbClr val="1E5EF3"/>
+              </a:buClr>
+              <a:buChar char="—"/>
+            </a:pPr>
+            <a:r>
+              <a:rPr sz="1300" b="0">
+                <a:solidFill>
+                  <a:srgbClr val="202B38"/>
+                </a:solidFill>
+                <a:latin typeface="Arial"/>
+              </a:rPr>
+              <a:t>The file was never opened; read_file refuses .env on its own too, so two layers said no</a:t>
+            </a:r>
+          </a:p>
+          <a:p>
+            <a:pPr algn="l" indent="-228600" marL="228600">
+              <a:spcAft>
+                <a:spcPts val="600"/>
+              </a:spcAft>
+              <a:buClr>
+                <a:srgbClr val="1E5EF3"/>
+              </a:buClr>
+              <a:buChar char="—"/>
+            </a:pPr>
+            <a:r>
+              <a:rPr sz="1300" b="0">
+                <a:solidFill>
+                  <a:srgbClr val="202B38"/>
+                </a:solidFill>
+                <a:latin typeface="Arial"/>
+              </a:rPr>
+              <a:t>In plain words: the hook decides, the model reads the outcome</a:t>
+            </a:r>
+          </a:p>
+        </p:txBody>
+      </p:sp>
+      <p:sp>
+        <p:nvSpPr>
+          <p:cNvPr id="10" name="Rectangle 9"/>
+          <p:cNvSpPr/>
+          <p:nvPr/>
+        </p:nvSpPr>
+        <p:spPr>
+          <a:xfrm>
+            <a:off x="6245352" y="1874519"/>
+            <a:ext cx="5394960" cy="3977639"/>
+          </a:xfrm>
+          <a:prstGeom prst="rect">
+            <a:avLst/>
+          </a:prstGeom>
+          <a:solidFill>
+            <a:srgbClr val="EEF3FD"/>
+          </a:solidFill>
+          <a:ln>
+            <a:noFill/>
+          </a:ln>
+          <a:effectLst/>
+        </p:spPr>
+        <p:style>
+          <a:lnRef idx="1">
+            <a:schemeClr val="accent1"/>
+          </a:lnRef>
+          <a:fillRef idx="3">
+            <a:schemeClr val="accent1"/>
+          </a:fillRef>
+          <a:effectRef idx="2">
+            <a:schemeClr val="accent1"/>
+          </a:effectRef>
+          <a:fontRef idx="minor">
+            <a:schemeClr val="lt1"/>
+          </a:fontRef>
+        </p:style>
+        <p:txBody>
+          <a:bodyPr rtlCol="0" anchor="ctr"/>
+          <a:lstStyle/>
+          <a:p>
+            <a:pPr algn="ctr"/>
+          </a:p>
+        </p:txBody>
+      </p:sp>
+      <p:sp>
+        <p:nvSpPr>
+          <p:cNvPr id="11" name="TextBox 10"/>
+          <p:cNvSpPr txBox="1"/>
+          <p:nvPr/>
+        </p:nvSpPr>
+        <p:spPr>
+          <a:xfrm>
+            <a:off x="6473952" y="2039111"/>
+            <a:ext cx="4937760" cy="365760"/>
+          </a:xfrm>
+          <a:prstGeom prst="rect">
+            <a:avLst/>
+          </a:prstGeom>
+          <a:noFill/>
+        </p:spPr>
+        <p:txBody>
+          <a:bodyPr wrap="square">
+            <a:spAutoFit/>
+          </a:bodyPr>
+          <a:lstStyle/>
+          <a:p>
+            <a:pPr algn="l">
+              <a:spcAft>
+                <a:spcPts val="600"/>
+              </a:spcAft>
+              <a:buNone/>
+            </a:pPr>
+            <a:r>
+              <a:rPr sz="1500" b="1">
+                <a:solidFill>
+                  <a:srgbClr val="0A2540"/>
+                </a:solidFill>
+                <a:latin typeface="Arial"/>
+              </a:rPr>
+              <a:t>Permission: run_shell is risk 'danger'</a:t>
+            </a:r>
+          </a:p>
+        </p:txBody>
+      </p:sp>
+      <p:sp>
+        <p:nvSpPr>
+          <p:cNvPr id="12" name="TextBox 11"/>
+          <p:cNvSpPr txBox="1"/>
+          <p:nvPr/>
+        </p:nvSpPr>
+        <p:spPr>
+          <a:xfrm>
+            <a:off x="6473952" y="2441447"/>
+            <a:ext cx="4937760" cy="3246119"/>
+          </a:xfrm>
+          <a:prstGeom prst="rect">
+            <a:avLst/>
+          </a:prstGeom>
+          <a:noFill/>
+        </p:spPr>
+        <p:txBody>
+          <a:bodyPr wrap="square">
+            <a:spAutoFit/>
+          </a:bodyPr>
+          <a:lstStyle/>
+          <a:p>
+            <a:pPr algn="l" indent="-228600" marL="228600">
+              <a:spcAft>
+                <a:spcPts val="600"/>
+              </a:spcAft>
+              <a:buClr>
+                <a:srgbClr val="1E5EF3"/>
+              </a:buClr>
+              <a:buChar char="—"/>
+            </a:pPr>
+            <a:r>
+              <a:rPr sz="1300" b="0">
+                <a:solidFill>
+                  <a:srgbClr val="202B38"/>
+                </a:solidFill>
+                <a:latin typeface="Arial"/>
+              </a:rPr>
+              <a:t>Task: count the lines of README.md with wc. Turn 1: run_shell -&gt; denied: "risk 'danger' and this harness does not permit it"; list_files runs in the same turn</a:t>
+            </a:r>
+          </a:p>
+          <a:p>
+            <a:pPr algn="l" indent="-228600" marL="228600">
+              <a:spcAft>
+                <a:spcPts val="600"/>
+              </a:spcAft>
+              <a:buClr>
+                <a:srgbClr val="1E5EF3"/>
+              </a:buClr>
+              <a:buChar char="—"/>
+            </a:pPr>
+            <a:r>
+              <a:rPr sz="1300" b="0">
+                <a:solidFill>
+                  <a:srgbClr val="202B38"/>
+                </a:solidFill>
+                <a:latin typeface="Arial"/>
+              </a:rPr>
+              <a:t>Turn 2: read_file('README.md'); turn 3 carries 7,869 input tokens - the whole file</a:t>
+            </a:r>
+          </a:p>
+          <a:p>
+            <a:pPr algn="l" indent="-228600" marL="228600">
+              <a:spcAft>
+                <a:spcPts val="600"/>
+              </a:spcAft>
+              <a:buClr>
+                <a:srgbClr val="1E5EF3"/>
+              </a:buClr>
+              <a:buChar char="—"/>
+            </a:pPr>
+            <a:r>
+              <a:rPr sz="1300" b="0">
+                <a:solidFill>
+                  <a:srgbClr val="202B38"/>
+                </a:solidFill>
+                <a:latin typeface="Arial"/>
+              </a:rPr>
+              <a:t>Answer: "approximately 147 lines", counted by eye; Python's count: 147</a:t>
+            </a:r>
+          </a:p>
+          <a:p>
+            <a:pPr algn="l" indent="-228600" marL="228600">
+              <a:spcAft>
+                <a:spcPts val="600"/>
+              </a:spcAft>
+              <a:buClr>
+                <a:srgbClr val="1E5EF3"/>
+              </a:buClr>
+              <a:buChar char="—"/>
+            </a:pPr>
+            <a:r>
+              <a:rPr sz="1300" b="0">
+                <a:solidFill>
+                  <a:srgbClr val="202B38"/>
+                </a:solidFill>
+                <a:latin typeface="Arial"/>
+              </a:rPr>
+              <a:t>Then allow_all plus a hook that only passes commands starting with 'wc ': wc -l README.md -&gt; 147, done in 2 turns</a:t>
+            </a:r>
+          </a:p>
+          <a:p>
+            <a:pPr algn="l" indent="-228600" marL="228600">
+              <a:spcAft>
+                <a:spcPts val="600"/>
+              </a:spcAft>
+              <a:buClr>
+                <a:srgbClr val="1E5EF3"/>
+              </a:buClr>
+              <a:buChar char="—"/>
+            </a:pPr>
+            <a:r>
+              <a:rPr sz="1300" b="0">
+                <a:solidFill>
+                  <a:srgbClr val="202B38"/>
+                </a:solidFill>
+                <a:latin typeface="Arial"/>
+              </a:rPr>
+              <a:t>Three layers, one tool: risk on the tool, rule in the harness, hook narrows the opening</a:t>
+            </a:r>
+          </a:p>
+        </p:txBody>
+      </p:sp>
+      <p:sp>
+        <p:nvSpPr>
+          <p:cNvPr id="13" name="TextBox 12"/>
+          <p:cNvSpPr txBox="1"/>
+          <p:nvPr/>
+        </p:nvSpPr>
+        <p:spPr>
+          <a:xfrm>
+            <a:off x="548640" y="6053328"/>
+            <a:ext cx="11091672" cy="502920"/>
+          </a:xfrm>
+          <a:prstGeom prst="rect">
+            <a:avLst/>
+          </a:prstGeom>
+          <a:noFill/>
+        </p:spPr>
+        <p:txBody>
+          <a:bodyPr wrap="square">
+            <a:spAutoFit/>
+          </a:bodyPr>
+          <a:lstStyle/>
+          <a:p>
+            <a:pPr algn="l">
+              <a:spcAft>
+                <a:spcPts val="600"/>
+              </a:spcAft>
+              <a:buNone/>
+            </a:pPr>
+            <a:r>
+              <a:rPr sz="1200" b="0">
+                <a:solidFill>
+                  <a:srgbClr val="1E5EF3"/>
+                </a:solidFill>
+                <a:latin typeface="Arial"/>
+              </a:rPr>
+              <a:t>Notebook 03 sections 2.1 and 2.3; recorded run on claude-opus-5, 30 Sep 2026; live runs vary. Nobody was prompted in either run: the rules decided.</a:t>
+            </a:r>
+          </a:p>
+        </p:txBody>
+      </p:sp>
+      <p:sp>
+        <p:nvSpPr>
+          <p:cNvPr id="14" name="TextBox 13"/>
+          <p:cNvSpPr txBox="1"/>
+          <p:nvPr/>
+        </p:nvSpPr>
+        <p:spPr>
+          <a:xfrm>
+            <a:off x="548640" y="6473952"/>
+            <a:ext cx="7315200" cy="292608"/>
+          </a:xfrm>
+          <a:prstGeom prst="rect">
+            <a:avLst/>
+          </a:prstGeom>
+          <a:noFill/>
+        </p:spPr>
+        <p:txBody>
+          <a:bodyPr wrap="square">
+            <a:spAutoFit/>
+          </a:bodyPr>
+          <a:lstStyle/>
+          <a:p>
+            <a:pPr algn="l">
+              <a:spcAft>
+                <a:spcPts val="600"/>
+              </a:spcAft>
+              <a:buNone/>
+            </a:pPr>
+            <a:r>
+              <a:rPr sz="900" b="0">
+                <a:solidFill>
+                  <a:srgbClr val="5B6774"/>
+                </a:solidFill>
+                <a:latin typeface="Arial"/>
+              </a:rPr>
+              <a:t>M5 Session 3 - Building a Harness</a:t>
+            </a:r>
+          </a:p>
+        </p:txBody>
+      </p:sp>
+      <p:sp>
+        <p:nvSpPr>
+          <p:cNvPr id="15" name="TextBox 14"/>
+          <p:cNvSpPr txBox="1"/>
+          <p:nvPr/>
+        </p:nvSpPr>
+        <p:spPr>
+          <a:xfrm>
+            <a:off x="11292840" y="6473952"/>
+            <a:ext cx="548640" cy="292608"/>
+          </a:xfrm>
+          <a:prstGeom prst="rect">
+            <a:avLst/>
+          </a:prstGeom>
+          <a:noFill/>
+        </p:spPr>
+        <p:txBody>
+          <a:bodyPr wrap="square">
+            <a:spAutoFit/>
+          </a:bodyPr>
+          <a:lstStyle/>
+          <a:p>
+            <a:pPr algn="r">
+              <a:spcAft>
+                <a:spcPts val="600"/>
+              </a:spcAft>
+              <a:buNone/>
+            </a:pPr>
+            <a:r>
+              <a:rPr sz="900" b="0">
+                <a:solidFill>
+                  <a:srgbClr val="5B6774"/>
+                </a:solidFill>
+                <a:latin typeface="Arial"/>
+              </a:rPr>
+              <a:t>16</a:t>
+            </a:r>
+          </a:p>
+        </p:txBody>
+      </p:sp>
+    </p:spTree>
+  </p:cSld>
+  <p:clrMapOvr>
+    <a:masterClrMapping/>
+  </p:clrMapOvr>
+</p:sld>
+</file>
+
+<file path=ppt/slides/slide17.xml><?xml version="1.0" encoding="utf-8"?>
+<p:sld xmlns:a="http://schemas.openxmlformats.org/drawingml/2006/main" xmlns:p="http://schemas.openxmlformats.org/presentationml/2006/main" xmlns:r="http://schemas.openxmlformats.org/officeDocument/2006/relationships">
+  <p:cSld>
+    <p:spTree>
+      <p:nvGrpSpPr>
+        <p:cNvPr id="1" name=""/>
+        <p:cNvGrpSpPr/>
+        <p:nvPr/>
+      </p:nvGrpSpPr>
+      <p:grpSpPr/>
+      <p:sp>
+        <p:nvSpPr>
+          <p:cNvPr id="2" name="Rectangle 1"/>
+          <p:cNvSpPr/>
+          <p:nvPr/>
+        </p:nvSpPr>
+        <p:spPr>
+          <a:xfrm>
+            <a:off x="0" y="0"/>
+            <a:ext cx="12191695" cy="6858000"/>
+          </a:xfrm>
+          <a:prstGeom prst="rect">
+            <a:avLst/>
+          </a:prstGeom>
+          <a:solidFill>
+            <a:srgbClr val="FFFFFF"/>
+          </a:solidFill>
+          <a:ln>
+            <a:noFill/>
+          </a:ln>
+          <a:effectLst/>
+        </p:spPr>
+        <p:style>
+          <a:lnRef idx="1">
+            <a:schemeClr val="accent1"/>
+          </a:lnRef>
+          <a:fillRef idx="3">
+            <a:schemeClr val="accent1"/>
+          </a:fillRef>
+          <a:effectRef idx="2">
+            <a:schemeClr val="accent1"/>
+          </a:effectRef>
+          <a:fontRef idx="minor">
+            <a:schemeClr val="lt1"/>
+          </a:fontRef>
+        </p:style>
+        <p:txBody>
+          <a:bodyPr rtlCol="0" anchor="ctr"/>
+          <a:lstStyle/>
+          <a:p>
+            <a:pPr algn="ctr"/>
+          </a:p>
+        </p:txBody>
+      </p:sp>
+      <p:sp>
+        <p:nvSpPr>
+          <p:cNvPr id="3" name="Rectangle 2"/>
+          <p:cNvSpPr/>
+          <p:nvPr/>
+        </p:nvSpPr>
+        <p:spPr>
+          <a:xfrm>
+            <a:off x="548640" y="475488"/>
+            <a:ext cx="457200" cy="54864"/>
+          </a:xfrm>
+          <a:prstGeom prst="rect">
+            <a:avLst/>
+          </a:prstGeom>
+          <a:solidFill>
+            <a:srgbClr val="1E5EF3"/>
+          </a:solidFill>
+          <a:ln>
+            <a:noFill/>
+          </a:ln>
+          <a:effectLst/>
+        </p:spPr>
+        <p:style>
+          <a:lnRef idx="1">
+            <a:schemeClr val="accent1"/>
+          </a:lnRef>
+          <a:fillRef idx="3">
+            <a:schemeClr val="accent1"/>
+          </a:fillRef>
+          <a:effectRef idx="2">
+            <a:schemeClr val="accent1"/>
+          </a:effectRef>
+          <a:fontRef idx="minor">
+            <a:schemeClr val="lt1"/>
+          </a:fontRef>
+        </p:style>
+        <p:txBody>
+          <a:bodyPr rtlCol="0" anchor="ctr"/>
+          <a:lstStyle/>
+          <a:p>
+            <a:pPr algn="ctr"/>
+          </a:p>
+        </p:txBody>
+      </p:sp>
+      <p:sp>
+        <p:nvSpPr>
+          <p:cNvPr id="4" name="TextBox 3"/>
+          <p:cNvSpPr txBox="1"/>
+          <p:nvPr/>
+        </p:nvSpPr>
+        <p:spPr>
+          <a:xfrm>
+            <a:off x="548640" y="603504"/>
+            <a:ext cx="11091672" cy="274320"/>
+          </a:xfrm>
+          <a:prstGeom prst="rect">
+            <a:avLst/>
+          </a:prstGeom>
+          <a:noFill/>
+        </p:spPr>
+        <p:txBody>
+          <a:bodyPr wrap="square">
+            <a:spAutoFit/>
+          </a:bodyPr>
+          <a:lstStyle/>
+          <a:p>
+            <a:pPr algn="l">
+              <a:spcAft>
+                <a:spcPts val="600"/>
+              </a:spcAft>
+              <a:buNone/>
+            </a:pPr>
+            <a:r>
+              <a:rPr sz="1100" b="1">
+                <a:solidFill>
+                  <a:srgbClr val="1E5EF3"/>
+                </a:solidFill>
+                <a:latin typeface="Arial"/>
+              </a:rPr>
+              <a:t>NOTEBOOK 03 - VALIDATE_ANSWER</a:t>
+            </a:r>
+          </a:p>
+        </p:txBody>
+      </p:sp>
+      <p:sp>
+        <p:nvSpPr>
+          <p:cNvPr id="5" name="TextBox 4"/>
+          <p:cNvSpPr txBox="1"/>
+          <p:nvPr/>
+        </p:nvSpPr>
+        <p:spPr>
+          <a:xfrm>
+            <a:off x="548640" y="868680"/>
+            <a:ext cx="11091672" cy="777240"/>
+          </a:xfrm>
+          <a:prstGeom prst="rect">
+            <a:avLst/>
+          </a:prstGeom>
+          <a:noFill/>
+        </p:spPr>
+        <p:txBody>
+          <a:bodyPr wrap="square">
+            <a:spAutoFit/>
+          </a:bodyPr>
+          <a:lstStyle/>
+          <a:p>
+            <a:pPr algn="l">
+              <a:spcAft>
+                <a:spcPts val="0"/>
+              </a:spcAft>
+              <a:buNone/>
+            </a:pPr>
+            <a:r>
+              <a:rPr sz="2600" b="1">
+                <a:solidFill>
+                  <a:srgbClr val="0A2540"/>
+                </a:solidFill>
+                <a:latin typeface="Arial"/>
+              </a:rPr>
+              <a:t>The validator states the standard; only the tools make it reachable</a:t>
+            </a:r>
+          </a:p>
+        </p:txBody>
+      </p:sp>
+      <p:sp>
+        <p:nvSpPr>
+          <p:cNvPr id="6" name="Rectangle 5"/>
+          <p:cNvSpPr/>
+          <p:nvPr/>
+        </p:nvSpPr>
+        <p:spPr>
+          <a:xfrm>
+            <a:off x="548640" y="1664208"/>
+            <a:ext cx="11091672" cy="12801"/>
+          </a:xfrm>
+          <a:prstGeom prst="rect">
+            <a:avLst/>
+          </a:prstGeom>
+          <a:solidFill>
+            <a:srgbClr val="B9D0FA"/>
+          </a:solidFill>
+          <a:ln>
+            <a:noFill/>
+          </a:ln>
+          <a:effectLst/>
+        </p:spPr>
+        <p:style>
+          <a:lnRef idx="1">
+            <a:schemeClr val="accent1"/>
+          </a:lnRef>
+          <a:fillRef idx="3">
+            <a:schemeClr val="accent1"/>
+          </a:fillRef>
+          <a:effectRef idx="2">
+            <a:schemeClr val="accent1"/>
+          </a:effectRef>
+          <a:fontRef idx="minor">
+            <a:schemeClr val="lt1"/>
+          </a:fontRef>
+        </p:style>
+        <p:txBody>
+          <a:bodyPr rtlCol="0" anchor="ctr"/>
+          <a:lstStyle/>
+          <a:p>
+            <a:pPr algn="ctr"/>
+          </a:p>
+        </p:txBody>
+      </p:sp>
+      <p:sp>
+        <p:nvSpPr>
+          <p:cNvPr id="7" name="Rectangle 6"/>
+          <p:cNvSpPr/>
+          <p:nvPr/>
+        </p:nvSpPr>
+        <p:spPr>
+          <a:xfrm>
+            <a:off x="548640" y="1874519"/>
+            <a:ext cx="5394960" cy="3977639"/>
+          </a:xfrm>
+          <a:prstGeom prst="rect">
+            <a:avLst/>
+          </a:prstGeom>
+          <a:solidFill>
+            <a:srgbClr val="EEF3FD"/>
+          </a:solidFill>
+          <a:ln>
+            <a:noFill/>
+          </a:ln>
+          <a:effectLst/>
+        </p:spPr>
+        <p:style>
+          <a:lnRef idx="1">
+            <a:schemeClr val="accent1"/>
+          </a:lnRef>
+          <a:fillRef idx="3">
+            <a:schemeClr val="accent1"/>
+          </a:fillRef>
+          <a:effectRef idx="2">
+            <a:schemeClr val="accent1"/>
+          </a:effectRef>
+          <a:fontRef idx="minor">
+            <a:schemeClr val="lt1"/>
+          </a:fontRef>
+        </p:style>
+        <p:txBody>
+          <a:bodyPr rtlCol="0" anchor="ctr"/>
+          <a:lstStyle/>
+          <a:p>
+            <a:pPr algn="ctr"/>
+          </a:p>
+        </p:txBody>
+      </p:sp>
+      <p:sp>
+        <p:nvSpPr>
+          <p:cNvPr id="8" name="TextBox 7"/>
+          <p:cNvSpPr txBox="1"/>
+          <p:nvPr/>
+        </p:nvSpPr>
+        <p:spPr>
+          <a:xfrm>
+            <a:off x="777240" y="2039111"/>
+            <a:ext cx="4937760" cy="365760"/>
+          </a:xfrm>
+          <a:prstGeom prst="rect">
+            <a:avLst/>
+          </a:prstGeom>
+          <a:noFill/>
+        </p:spPr>
+        <p:txBody>
+          <a:bodyPr wrap="square">
+            <a:spAutoFit/>
+          </a:bodyPr>
+          <a:lstStyle/>
+          <a:p>
+            <a:pPr algn="l">
+              <a:spcAft>
+                <a:spcPts val="600"/>
+              </a:spcAft>
+              <a:buNone/>
+            </a:pPr>
+            <a:r>
+              <a:rPr sz="1500" b="1">
+                <a:solidFill>
+                  <a:srgbClr val="0A2540"/>
+                </a:solidFill>
+                <a:latin typeface="Arial"/>
+              </a:rPr>
+              <a:t>validated-with-tools: opus-5 + list_files, read_file</a:t>
+            </a:r>
+          </a:p>
+        </p:txBody>
+      </p:sp>
+      <p:sp>
+        <p:nvSpPr>
+          <p:cNvPr id="9" name="TextBox 8"/>
+          <p:cNvSpPr txBox="1"/>
+          <p:nvPr/>
+        </p:nvSpPr>
+        <p:spPr>
+          <a:xfrm>
+            <a:off x="777240" y="2441447"/>
+            <a:ext cx="4937760" cy="3246119"/>
+          </a:xfrm>
+          <a:prstGeom prst="rect">
+            <a:avLst/>
+          </a:prstGeom>
+          <a:noFill/>
+        </p:spPr>
+        <p:txBody>
+          <a:bodyPr wrap="square">
+            <a:spAutoFit/>
+          </a:bodyPr>
+          <a:lstStyle/>
+          <a:p>
+            <a:pPr algn="l" indent="-228600" marL="228600">
+              <a:spcAft>
+                <a:spcPts val="600"/>
+              </a:spcAft>
+              <a:buClr>
+                <a:srgbClr val="1E5EF3"/>
+              </a:buClr>
+              <a:buChar char="—"/>
+            </a:pPr>
+            <a:r>
+              <a:rPr sz="1300" b="0">
+                <a:solidFill>
+                  <a:srgbClr val="202B38"/>
+                </a:solidFill>
+                <a:latin typeface="Arial"/>
+              </a:rPr>
+              <a:t>Question: which tool does the CI workflow use to scan the history for secrets?</a:t>
+            </a:r>
+          </a:p>
+          <a:p>
+            <a:pPr algn="l" indent="-228600" marL="228600">
+              <a:spcAft>
+                <a:spcPts val="600"/>
+              </a:spcAft>
+              <a:buClr>
+                <a:srgbClr val="1E5EF3"/>
+              </a:buClr>
+              <a:buChar char="—"/>
+            </a:pPr>
+            <a:r>
+              <a:rPr sz="1300" b="0">
+                <a:solidFill>
+                  <a:srgbClr val="202B38"/>
+                </a:solidFill>
+                <a:latin typeface="Arial"/>
+              </a:rPr>
+              <a:t>3 turns, stopped_because=done</a:t>
+            </a:r>
+          </a:p>
+          <a:p>
+            <a:pPr algn="l" indent="-228600" marL="228600">
+              <a:spcAft>
+                <a:spcPts val="600"/>
+              </a:spcAft>
+              <a:buClr>
+                <a:srgbClr val="1E5EF3"/>
+              </a:buClr>
+              <a:buChar char="—"/>
+            </a:pPr>
+            <a:r>
+              <a:rPr sz="1300" b="0">
+                <a:solidFill>
+                  <a:srgbClr val="202B38"/>
+                </a:solidFill>
+                <a:latin typeface="Arial"/>
+              </a:rPr>
+              <a:t>parsed: found=True, sources=['.github/workflows/ci.yml'], answer names gitleaks via gitleaks/gitleaks-action@v2</a:t>
+            </a:r>
+          </a:p>
+          <a:p>
+            <a:pPr algn="l" indent="-228600" marL="228600">
+              <a:spcAft>
+                <a:spcPts val="600"/>
+              </a:spcAft>
+              <a:buClr>
+                <a:srgbClr val="1E5EF3"/>
+              </a:buClr>
+              <a:buChar char="—"/>
+            </a:pPr>
+            <a:r>
+              <a:rPr sz="1300" b="0">
+                <a:solidFill>
+                  <a:srgbClr val="202B38"/>
+                </a:solidFill>
+                <a:latin typeface="Arial"/>
+              </a:rPr>
+              <a:t>validator notes: none - require_sources and sources_exist passed first time</a:t>
+            </a:r>
+          </a:p>
+          <a:p>
+            <a:pPr algn="l" indent="-228600" marL="228600">
+              <a:spcAft>
+                <a:spcPts val="600"/>
+              </a:spcAft>
+              <a:buClr>
+                <a:srgbClr val="1E5EF3"/>
+              </a:buClr>
+              <a:buChar char="—"/>
+            </a:pPr>
+            <a:r>
+              <a:rPr sz="1300" b="0">
+                <a:solidFill>
+                  <a:srgbClr val="202B38"/>
+                </a:solidFill>
+                <a:latin typeface="Arial"/>
+              </a:rPr>
+              <a:t>In plain words: the standard was met because the tools made the fact reachable</a:t>
+            </a:r>
+          </a:p>
+        </p:txBody>
+      </p:sp>
+      <p:sp>
+        <p:nvSpPr>
+          <p:cNvPr id="10" name="Rectangle 9"/>
+          <p:cNvSpPr/>
+          <p:nvPr/>
+        </p:nvSpPr>
+        <p:spPr>
+          <a:xfrm>
+            <a:off x="6245352" y="1874519"/>
+            <a:ext cx="5394960" cy="3977639"/>
+          </a:xfrm>
+          <a:prstGeom prst="rect">
+            <a:avLst/>
+          </a:prstGeom>
+          <a:solidFill>
+            <a:srgbClr val="EEF3FD"/>
+          </a:solidFill>
+          <a:ln>
+            <a:noFill/>
+          </a:ln>
+          <a:effectLst/>
+        </p:spPr>
+        <p:style>
+          <a:lnRef idx="1">
+            <a:schemeClr val="accent1"/>
+          </a:lnRef>
+          <a:fillRef idx="3">
+            <a:schemeClr val="accent1"/>
+          </a:fillRef>
+          <a:effectRef idx="2">
+            <a:schemeClr val="accent1"/>
+          </a:effectRef>
+          <a:fontRef idx="minor">
+            <a:schemeClr val="lt1"/>
+          </a:fontRef>
+        </p:style>
+        <p:txBody>
+          <a:bodyPr rtlCol="0" anchor="ctr"/>
+          <a:lstStyle/>
+          <a:p>
+            <a:pPr algn="ctr"/>
+          </a:p>
+        </p:txBody>
+      </p:sp>
+      <p:sp>
+        <p:nvSpPr>
+          <p:cNvPr id="11" name="TextBox 10"/>
+          <p:cNvSpPr txBox="1"/>
+          <p:nvPr/>
+        </p:nvSpPr>
+        <p:spPr>
+          <a:xfrm>
+            <a:off x="6473952" y="2039111"/>
+            <a:ext cx="4937760" cy="365760"/>
+          </a:xfrm>
+          <a:prstGeom prst="rect">
+            <a:avLst/>
+          </a:prstGeom>
+          <a:noFill/>
+        </p:spPr>
+        <p:txBody>
+          <a:bodyPr wrap="square">
+            <a:spAutoFit/>
+          </a:bodyPr>
+          <a:lstStyle/>
+          <a:p>
+            <a:pPr algn="l">
+              <a:spcAft>
+                <a:spcPts val="600"/>
+              </a:spcAft>
+              <a:buNone/>
+            </a:pPr>
+            <a:r>
+              <a:rPr sz="1500" b="1">
+                <a:solidFill>
+                  <a:srgbClr val="0A2540"/>
+                </a:solidFill>
+                <a:latin typeface="Arial"/>
+              </a:rPr>
+              <a:t>validated-no-tools: the same opus-5, no tools</a:t>
+            </a:r>
+          </a:p>
+        </p:txBody>
+      </p:sp>
+      <p:sp>
+        <p:nvSpPr>
+          <p:cNvPr id="12" name="TextBox 11"/>
+          <p:cNvSpPr txBox="1"/>
+          <p:nvPr/>
+        </p:nvSpPr>
+        <p:spPr>
+          <a:xfrm>
+            <a:off x="6473952" y="2441447"/>
+            <a:ext cx="4937760" cy="3246119"/>
+          </a:xfrm>
+          <a:prstGeom prst="rect">
+            <a:avLst/>
+          </a:prstGeom>
+          <a:noFill/>
+        </p:spPr>
+        <p:txBody>
+          <a:bodyPr wrap="square">
+            <a:spAutoFit/>
+          </a:bodyPr>
+          <a:lstStyle/>
+          <a:p>
+            <a:pPr algn="l" indent="-228600" marL="228600">
+              <a:spcAft>
+                <a:spcPts val="600"/>
+              </a:spcAft>
+              <a:buClr>
+                <a:srgbClr val="1E5EF3"/>
+              </a:buClr>
+              <a:buChar char="—"/>
+            </a:pPr>
+            <a:r>
+              <a:rPr sz="1300" b="0">
+                <a:solidFill>
+                  <a:srgbClr val="202B38"/>
+                </a:solidFill>
+                <a:latin typeface="Arial"/>
+              </a:rPr>
+              <a:t>Same question, same two validators, same output schema</a:t>
+            </a:r>
+          </a:p>
+          <a:p>
+            <a:pPr algn="l" indent="-228600" marL="228600">
+              <a:spcAft>
+                <a:spcPts val="600"/>
+              </a:spcAft>
+              <a:buClr>
+                <a:srgbClr val="1E5EF3"/>
+              </a:buClr>
+              <a:buChar char="—"/>
+            </a:pPr>
+            <a:r>
+              <a:rPr sz="1300" b="0">
+                <a:solidFill>
+                  <a:srgbClr val="202B38"/>
+                </a:solidFill>
+                <a:latin typeface="Arial"/>
+              </a:rPr>
+              <a:t>1 turn, stopped_because=done</a:t>
+            </a:r>
+          </a:p>
+          <a:p>
+            <a:pPr algn="l" indent="-228600" marL="228600">
+              <a:spcAft>
+                <a:spcPts val="600"/>
+              </a:spcAft>
+              <a:buClr>
+                <a:srgbClr val="1E5EF3"/>
+              </a:buClr>
+              <a:buChar char="—"/>
+            </a:pPr>
+            <a:r>
+              <a:rPr sz="1300" b="0">
+                <a:solidFill>
+                  <a:srgbClr val="202B38"/>
+                </a:solidFill>
+                <a:latin typeface="Arial"/>
+              </a:rPr>
+              <a:t>parsed: found=False, sources=[], "I cannot determine this without access to the repository's CI configuration files"</a:t>
+            </a:r>
+          </a:p>
+          <a:p>
+            <a:pPr algn="l" indent="-228600" marL="228600">
+              <a:spcAft>
+                <a:spcPts val="600"/>
+              </a:spcAft>
+              <a:buClr>
+                <a:srgbClr val="1E5EF3"/>
+              </a:buClr>
+              <a:buChar char="—"/>
+            </a:pPr>
+            <a:r>
+              <a:rPr sz="1300" b="0">
+                <a:solidFill>
+                  <a:srgbClr val="202B38"/>
+                </a:solidFill>
+                <a:latin typeface="Arial"/>
+              </a:rPr>
+              <a:t>validator notes: none - an honest found=False has nothing to reject</a:t>
+            </a:r>
+          </a:p>
+          <a:p>
+            <a:pPr algn="l" indent="-228600" marL="228600">
+              <a:spcAft>
+                <a:spcPts val="600"/>
+              </a:spcAft>
+              <a:buClr>
+                <a:srgbClr val="1E5EF3"/>
+              </a:buClr>
+              <a:buChar char="—"/>
+            </a:pPr>
+            <a:r>
+              <a:rPr sz="1300" b="0">
+                <a:solidFill>
+                  <a:srgbClr val="202B38"/>
+                </a:solidFill>
+                <a:latin typeface="Arial"/>
+              </a:rPr>
+              <a:t>A validator can only reject; it cannot make a model know things. Section 4 measures what it is worth on 14 cases</a:t>
+            </a:r>
+          </a:p>
+        </p:txBody>
+      </p:sp>
+      <p:sp>
+        <p:nvSpPr>
+          <p:cNvPr id="13" name="TextBox 12"/>
+          <p:cNvSpPr txBox="1"/>
+          <p:nvPr/>
+        </p:nvSpPr>
+        <p:spPr>
+          <a:xfrm>
+            <a:off x="548640" y="6053328"/>
+            <a:ext cx="11091672" cy="502920"/>
+          </a:xfrm>
+          <a:prstGeom prst="rect">
+            <a:avLst/>
+          </a:prstGeom>
+          <a:noFill/>
+        </p:spPr>
+        <p:txBody>
+          <a:bodyPr wrap="square">
+            <a:spAutoFit/>
+          </a:bodyPr>
+          <a:lstStyle/>
+          <a:p>
+            <a:pPr algn="l">
+              <a:spcAft>
+                <a:spcPts val="600"/>
+              </a:spcAft>
+              <a:buNone/>
+            </a:pPr>
+            <a:r>
+              <a:rPr sz="1200" b="0">
+                <a:solidFill>
+                  <a:srgbClr val="1E5EF3"/>
+                </a:solidFill>
+                <a:latin typeface="Arial"/>
+              </a:rPr>
+              <a:t>Notebook 03 section 2.2. Structured answer {answer, sources, found}; require_sources rejects found=True with empty sources, sources_exist rejects paths that are not files. Recorded run, 30 Sep 2026; live runs vary.</a:t>
+            </a:r>
+          </a:p>
+        </p:txBody>
+      </p:sp>
+      <p:sp>
+        <p:nvSpPr>
+          <p:cNvPr id="14" name="TextBox 13"/>
+          <p:cNvSpPr txBox="1"/>
+          <p:nvPr/>
+        </p:nvSpPr>
+        <p:spPr>
+          <a:xfrm>
+            <a:off x="548640" y="6473952"/>
+            <a:ext cx="7315200" cy="292608"/>
+          </a:xfrm>
+          <a:prstGeom prst="rect">
+            <a:avLst/>
+          </a:prstGeom>
+          <a:noFill/>
+        </p:spPr>
+        <p:txBody>
+          <a:bodyPr wrap="square">
+            <a:spAutoFit/>
+          </a:bodyPr>
+          <a:lstStyle/>
+          <a:p>
+            <a:pPr algn="l">
+              <a:spcAft>
+                <a:spcPts val="600"/>
+              </a:spcAft>
+              <a:buNone/>
+            </a:pPr>
+            <a:r>
+              <a:rPr sz="900" b="0">
+                <a:solidFill>
+                  <a:srgbClr val="5B6774"/>
+                </a:solidFill>
+                <a:latin typeface="Arial"/>
+              </a:rPr>
+              <a:t>M5 Session 3 - Building a Harness</a:t>
+            </a:r>
+          </a:p>
+        </p:txBody>
+      </p:sp>
+      <p:sp>
+        <p:nvSpPr>
+          <p:cNvPr id="15" name="TextBox 14"/>
+          <p:cNvSpPr txBox="1"/>
+          <p:nvPr/>
+        </p:nvSpPr>
+        <p:spPr>
+          <a:xfrm>
+            <a:off x="11292840" y="6473952"/>
+            <a:ext cx="548640" cy="292608"/>
+          </a:xfrm>
+          <a:prstGeom prst="rect">
+            <a:avLst/>
+          </a:prstGeom>
+          <a:noFill/>
+        </p:spPr>
+        <p:txBody>
+          <a:bodyPr wrap="square">
+            <a:spAutoFit/>
+          </a:bodyPr>
+          <a:lstStyle/>
+          <a:p>
+            <a:pPr algn="r">
+              <a:spcAft>
+                <a:spcPts val="600"/>
+              </a:spcAft>
+              <a:buNone/>
+            </a:pPr>
+            <a:r>
+              <a:rPr sz="900" b="0">
+                <a:solidFill>
+                  <a:srgbClr val="5B6774"/>
+                </a:solidFill>
+                <a:latin typeface="Arial"/>
+              </a:rPr>
+              <a:t>17</a:t>
+            </a:r>
+          </a:p>
+        </p:txBody>
+      </p:sp>
+    </p:spTree>
+  </p:cSld>
+  <p:clrMapOvr>
+    <a:masterClrMapping/>
+  </p:clrMapOvr>
+</p:sld>
+</file>
+
+<file path=ppt/slides/slide18.xml><?xml version="1.0" encoding="utf-8"?>
+<p:sld xmlns:a="http://schemas.openxmlformats.org/drawingml/2006/main" xmlns:p="http://schemas.openxmlformats.org/presentationml/2006/main" xmlns:r="http://schemas.openxmlformats.org/officeDocument/2006/relationships">
+  <p:cSld>
+    <p:spTree>
+      <p:nvGrpSpPr>
+        <p:cNvPr id="1" name=""/>
+        <p:cNvGrpSpPr/>
+        <p:nvPr/>
+      </p:nvGrpSpPr>
+      <p:grpSpPr/>
+      <p:sp>
+        <p:nvSpPr>
+          <p:cNvPr id="2" name="Rectangle 1"/>
+          <p:cNvSpPr/>
+          <p:nvPr/>
+        </p:nvSpPr>
+        <p:spPr>
+          <a:xfrm>
+            <a:off x="0" y="0"/>
+            <a:ext cx="12191695" cy="6858000"/>
+          </a:xfrm>
+          <a:prstGeom prst="rect">
+            <a:avLst/>
+          </a:prstGeom>
+          <a:solidFill>
+            <a:srgbClr val="FFFFFF"/>
+          </a:solidFill>
+          <a:ln>
+            <a:noFill/>
+          </a:ln>
+          <a:effectLst/>
+        </p:spPr>
+        <p:style>
+          <a:lnRef idx="1">
+            <a:schemeClr val="accent1"/>
+          </a:lnRef>
+          <a:fillRef idx="3">
+            <a:schemeClr val="accent1"/>
+          </a:fillRef>
+          <a:effectRef idx="2">
+            <a:schemeClr val="accent1"/>
+          </a:effectRef>
+          <a:fontRef idx="minor">
+            <a:schemeClr val="lt1"/>
+          </a:fontRef>
+        </p:style>
+        <p:txBody>
+          <a:bodyPr rtlCol="0" anchor="ctr"/>
+          <a:lstStyle/>
+          <a:p>
+            <a:pPr algn="ctr"/>
+          </a:p>
+        </p:txBody>
+      </p:sp>
+      <p:sp>
+        <p:nvSpPr>
+          <p:cNvPr id="3" name="Rectangle 2"/>
+          <p:cNvSpPr/>
+          <p:nvPr/>
+        </p:nvSpPr>
+        <p:spPr>
+          <a:xfrm>
+            <a:off x="548640" y="475488"/>
+            <a:ext cx="457200" cy="54864"/>
+          </a:xfrm>
+          <a:prstGeom prst="rect">
+            <a:avLst/>
+          </a:prstGeom>
+          <a:solidFill>
+            <a:srgbClr val="1E5EF3"/>
+          </a:solidFill>
+          <a:ln>
+            <a:noFill/>
+          </a:ln>
+          <a:effectLst/>
+        </p:spPr>
+        <p:style>
+          <a:lnRef idx="1">
+            <a:schemeClr val="accent1"/>
+          </a:lnRef>
+          <a:fillRef idx="3">
+            <a:schemeClr val="accent1"/>
+          </a:fillRef>
+          <a:effectRef idx="2">
+            <a:schemeClr val="accent1"/>
+          </a:effectRef>
+          <a:fontRef idx="minor">
+            <a:schemeClr val="lt1"/>
+          </a:fontRef>
+        </p:style>
+        <p:txBody>
+          <a:bodyPr rtlCol="0" anchor="ctr"/>
+          <a:lstStyle/>
+          <a:p>
+            <a:pPr algn="ctr"/>
+          </a:p>
+        </p:txBody>
+      </p:sp>
+      <p:sp>
+        <p:nvSpPr>
+          <p:cNvPr id="4" name="TextBox 3"/>
+          <p:cNvSpPr txBox="1"/>
+          <p:nvPr/>
+        </p:nvSpPr>
+        <p:spPr>
+          <a:xfrm>
+            <a:off x="548640" y="603504"/>
+            <a:ext cx="11091672" cy="274320"/>
+          </a:xfrm>
+          <a:prstGeom prst="rect">
+            <a:avLst/>
+          </a:prstGeom>
+          <a:noFill/>
+        </p:spPr>
+        <p:txBody>
+          <a:bodyPr wrap="square">
+            <a:spAutoFit/>
+          </a:bodyPr>
+          <a:lstStyle/>
+          <a:p>
+            <a:pPr algn="l">
+              <a:spcAft>
+                <a:spcPts val="600"/>
+              </a:spcAft>
+              <a:buNone/>
+            </a:pPr>
+            <a:r>
+              <a:rPr sz="1100" b="1">
+                <a:solidFill>
+                  <a:srgbClr val="1E5EF3"/>
+                </a:solidFill>
+                <a:latin typeface="Arial"/>
+              </a:rPr>
+              <a:t>NOTEBOOK 03 - THE FIVE PATTERNS</a:t>
+            </a:r>
+          </a:p>
+        </p:txBody>
+      </p:sp>
+      <p:sp>
+        <p:nvSpPr>
+          <p:cNvPr id="5" name="TextBox 4"/>
+          <p:cNvSpPr txBox="1"/>
+          <p:nvPr/>
+        </p:nvSpPr>
+        <p:spPr>
+          <a:xfrm>
+            <a:off x="548640" y="868680"/>
+            <a:ext cx="11091672" cy="777240"/>
+          </a:xfrm>
+          <a:prstGeom prst="rect">
+            <a:avLst/>
+          </a:prstGeom>
+          <a:noFill/>
+        </p:spPr>
+        <p:txBody>
+          <a:bodyPr wrap="square">
+            <a:spAutoFit/>
+          </a:bodyPr>
+          <a:lstStyle/>
+          <a:p>
+            <a:pPr algn="l">
+              <a:spcAft>
+                <a:spcPts val="0"/>
+              </a:spcAft>
+              <a:buNone/>
+            </a:pPr>
+            <a:r>
+              <a:rPr sz="2600" b="1">
+                <a:solidFill>
+                  <a:srgbClr val="0A2540"/>
+                </a:solidFill>
+                <a:latin typeface="Arial"/>
+              </a:rPr>
+              <a:t>Five patterns, each run for real: what ran and what it cost</a:t>
+            </a:r>
+          </a:p>
+        </p:txBody>
+      </p:sp>
+      <p:sp>
+        <p:nvSpPr>
+          <p:cNvPr id="6" name="Rectangle 5"/>
+          <p:cNvSpPr/>
+          <p:nvPr/>
+        </p:nvSpPr>
+        <p:spPr>
+          <a:xfrm>
+            <a:off x="548640" y="1664208"/>
+            <a:ext cx="11091672" cy="12801"/>
+          </a:xfrm>
+          <a:prstGeom prst="rect">
+            <a:avLst/>
+          </a:prstGeom>
+          <a:solidFill>
+            <a:srgbClr val="B9D0FA"/>
+          </a:solidFill>
+          <a:ln>
+            <a:noFill/>
+          </a:ln>
+          <a:effectLst/>
+        </p:spPr>
+        <p:style>
+          <a:lnRef idx="1">
+            <a:schemeClr val="accent1"/>
+          </a:lnRef>
+          <a:fillRef idx="3">
+            <a:schemeClr val="accent1"/>
+          </a:fillRef>
+          <a:effectRef idx="2">
+            <a:schemeClr val="accent1"/>
+          </a:effectRef>
+          <a:fontRef idx="minor">
+            <a:schemeClr val="lt1"/>
+          </a:fontRef>
+        </p:style>
+        <p:txBody>
+          <a:bodyPr rtlCol="0" anchor="ctr"/>
+          <a:lstStyle/>
+          <a:p>
+            <a:pPr algn="ctr"/>
+          </a:p>
+        </p:txBody>
+      </p:sp>
+      <p:graphicFrame>
+        <p:nvGraphicFramePr>
+          <p:cNvPr id="7" name="Table 6"/>
+          <p:cNvGraphicFramePr>
+            <a:graphicFrameLocks noGrp="1"/>
+          </p:cNvGraphicFramePr>
+          <p:nvPr/>
+        </p:nvGraphicFramePr>
+        <p:xfrm>
+          <a:off x="548640" y="1874519"/>
+          <a:ext cx="11091671" cy="2743200"/>
+        </p:xfrm>
+        <a:graphic>
+          <a:graphicData uri="http://schemas.openxmlformats.org/drawingml/2006/table">
+            <a:tbl>
+              <a:tblPr firstRow="1" bandRow="1">
+                <a:tableStyleId>{5C22544A-7EE6-4342-B048-85BDC9FD1C3A}</a:tableStyleId>
+              </a:tblPr>
+              <a:tblGrid>
+                <a:gridCol w="1741667"/>
+                <a:gridCol w="4033335"/>
+                <a:gridCol w="5316669"/>
+              </a:tblGrid>
+              <a:tr h="457200">
+                <a:tc>
+                  <a:txBody>
+                    <a:bodyPr wrap="square"/>
+                    <a:lstStyle/>
+                    <a:p>
+                      <a:pPr algn="l">
+                        <a:spcAft>
+                          <a:spcPts val="0"/>
+                        </a:spcAft>
+                        <a:buNone/>
+                      </a:pPr>
+                      <a:r>
+                        <a:rPr sz="1300" b="1">
+                          <a:solidFill>
+                            <a:srgbClr val="FFFFFF"/>
+                          </a:solidFill>
+                          <a:latin typeface="Arial"/>
+                        </a:rPr>
+                        <a:t>Pattern</a:t>
+                      </a:r>
+                    </a:p>
+                  </a:txBody>
+                  <a:tcPr>
+                    <a:solidFill>
+                      <a:srgbClr val="0A2540"/>
+                    </a:solidFill>
+                  </a:tcPr>
+                </a:tc>
+                <a:tc>
+                  <a:txBody>
+                    <a:bodyPr wrap="square"/>
+                    <a:lstStyle/>
+                    <a:p>
+                      <a:pPr algn="l">
+                        <a:spcAft>
+                          <a:spcPts val="0"/>
+                        </a:spcAft>
+                        <a:buNone/>
+                      </a:pPr>
+                      <a:r>
+                        <a:rPr sz="1300" b="1">
+                          <a:solidFill>
+                            <a:srgbClr val="FFFFFF"/>
+                          </a:solidFill>
+                          <a:latin typeface="Arial"/>
+                        </a:rPr>
+                        <a:t>What ran</a:t>
+                      </a:r>
+                    </a:p>
+                  </a:txBody>
+                  <a:tcPr>
+                    <a:solidFill>
+                      <a:srgbClr val="0A2540"/>
+                    </a:solidFill>
+                  </a:tcPr>
+                </a:tc>
+                <a:tc>
+                  <a:txBody>
+                    <a:bodyPr wrap="square"/>
+                    <a:lstStyle/>
+                    <a:p>
+                      <a:pPr algn="l">
+                        <a:spcAft>
+                          <a:spcPts val="0"/>
+                        </a:spcAft>
+                        <a:buNone/>
+                      </a:pPr>
+                      <a:r>
+                        <a:rPr sz="1300" b="1">
+                          <a:solidFill>
+                            <a:srgbClr val="FFFFFF"/>
+                          </a:solidFill>
+                          <a:latin typeface="Arial"/>
+                        </a:rPr>
+                        <a:t>Recorded result</a:t>
+                      </a:r>
+                    </a:p>
+                  </a:txBody>
+                  <a:tcPr>
+                    <a:solidFill>
+                      <a:srgbClr val="0A2540"/>
+                    </a:solidFill>
+                  </a:tcPr>
+                </a:tc>
+              </a:tr>
+              <a:tr h="457200">
+                <a:tc>
+                  <a:txBody>
+                    <a:bodyPr wrap="square"/>
+                    <a:lstStyle/>
+                    <a:p>
+                      <a:pPr algn="l">
+                        <a:spcAft>
+                          <a:spcPts val="0"/>
+                        </a:spcAft>
+                        <a:buNone/>
+                      </a:pPr>
+                      <a:r>
+                        <a:rPr sz="1250" b="0">
+                          <a:solidFill>
+                            <a:srgbClr val="202B38"/>
+                          </a:solidFill>
+                          <a:latin typeface="Arial"/>
+                        </a:rPr>
+                        <a:t>Prompt chaining</a:t>
+                      </a:r>
+                    </a:p>
+                  </a:txBody>
+                  <a:tcPr>
+                    <a:solidFill>
+                      <a:srgbClr val="FFFFFF"/>
+                    </a:solidFill>
+                  </a:tcPr>
+                </a:tc>
+                <a:tc>
+                  <a:txBody>
+                    <a:bodyPr wrap="square"/>
+                    <a:lstStyle/>
+                    <a:p>
+                      <a:pPr algn="l">
+                        <a:spcAft>
+                          <a:spcPts val="0"/>
+                        </a:spcAft>
+                        <a:buNone/>
+                      </a:pPr>
+                      <a:r>
+                        <a:rPr sz="1250" b="0">
+                          <a:solidFill>
+                            <a:srgbClr val="202B38"/>
+                          </a:solidFill>
+                          <a:latin typeface="Arial"/>
+                        </a:rPr>
+                        <a:t>researcher (opus-5), then a judge (sonnet-5) with a {pass, reason} output schema</a:t>
+                      </a:r>
+                    </a:p>
+                  </a:txBody>
+                  <a:tcPr>
+                    <a:solidFill>
+                      <a:srgbClr val="FFFFFF"/>
+                    </a:solidFill>
+                  </a:tcPr>
+                </a:tc>
+                <a:tc>
+                  <a:txBody>
+                    <a:bodyPr wrap="square"/>
+                    <a:lstStyle/>
+                    <a:p>
+                      <a:pPr algn="l">
+                        <a:spcAft>
+                          <a:spcPts val="0"/>
+                        </a:spcAft>
+                        <a:buNone/>
+                      </a:pPr>
+                      <a:r>
+                        <a:rPr sz="1250" b="0">
+                          <a:solidFill>
+                            <a:srgbClr val="202B38"/>
+                          </a:solidFill>
+                          <a:latin typeface="Arial"/>
+                        </a:rPr>
+                        <a:t>random_state=42 for every split, model and search, source CONTRIBUTING.md; judge pass=True; researcher $0.0256 + judge $0.0014</a:t>
+                      </a:r>
+                    </a:p>
+                  </a:txBody>
+                  <a:tcPr>
+                    <a:solidFill>
+                      <a:srgbClr val="FFFFFF"/>
+                    </a:solidFill>
+                  </a:tcPr>
+                </a:tc>
+              </a:tr>
+              <a:tr h="457200">
+                <a:tc>
+                  <a:txBody>
+                    <a:bodyPr wrap="square"/>
+                    <a:lstStyle/>
+                    <a:p>
+                      <a:pPr algn="l">
+                        <a:spcAft>
+                          <a:spcPts val="0"/>
+                        </a:spcAft>
+                        <a:buNone/>
+                      </a:pPr>
+                      <a:r>
+                        <a:rPr sz="1250" b="0">
+                          <a:solidFill>
+                            <a:srgbClr val="202B38"/>
+                          </a:solidFill>
+                          <a:latin typeface="Arial"/>
+                        </a:rPr>
+                        <a:t>Routing</a:t>
+                      </a:r>
+                    </a:p>
+                  </a:txBody>
+                  <a:tcPr>
+                    <a:solidFill>
+                      <a:srgbClr val="EEF3FD"/>
+                    </a:solidFill>
+                  </a:tcPr>
+                </a:tc>
+                <a:tc>
+                  <a:txBody>
+                    <a:bodyPr wrap="square"/>
+                    <a:lstStyle/>
+                    <a:p>
+                      <a:pPr algn="l">
+                        <a:spcAft>
+                          <a:spcPts val="0"/>
+                        </a:spcAft>
+                        <a:buNone/>
+                      </a:pPr>
+                      <a:r>
+                        <a:rPr sz="1250" b="0">
+                          <a:solidFill>
+                            <a:srgbClr val="202B38"/>
+                          </a:solidFill>
+                          <a:latin typeface="Arial"/>
+                        </a:rPr>
+                        <a:t>router (sonnet-5) with an enum output: calculator or researcher; each label owns an agent</a:t>
+                      </a:r>
+                    </a:p>
+                  </a:txBody>
+                  <a:tcPr>
+                    <a:solidFill>
+                      <a:srgbClr val="EEF3FD"/>
+                    </a:solidFill>
+                  </a:tcPr>
+                </a:tc>
+                <a:tc>
+                  <a:txBody>
+                    <a:bodyPr wrap="square"/>
+                    <a:lstStyle/>
+                    <a:p>
+                      <a:pPr algn="l">
+                        <a:spcAft>
+                          <a:spcPts val="0"/>
+                        </a:spcAft>
+                        <a:buNone/>
+                      </a:pPr>
+                      <a:r>
+                        <a:rPr sz="1250" b="0">
+                          <a:solidFill>
+                            <a:srgbClr val="202B38"/>
+                          </a:solidFill>
+                          <a:latin typeface="Arial"/>
+                        </a:rPr>
+                        <a:t>survival share -&gt; calculator on sonnet-5: 38.4% via calculate, $0.0030; secret scanner -&gt; researcher on opus-5: Gitleaks, ci.yml, $0.0193</a:t>
+                      </a:r>
+                    </a:p>
+                  </a:txBody>
+                  <a:tcPr>
+                    <a:solidFill>
+                      <a:srgbClr val="EEF3FD"/>
+                    </a:solidFill>
+                  </a:tcPr>
+                </a:tc>
+              </a:tr>
+              <a:tr h="457200">
+                <a:tc>
+                  <a:txBody>
+                    <a:bodyPr wrap="square"/>
+                    <a:lstStyle/>
+                    <a:p>
+                      <a:pPr algn="l">
+                        <a:spcAft>
+                          <a:spcPts val="0"/>
+                        </a:spcAft>
+                        <a:buNone/>
+                      </a:pPr>
+                      <a:r>
+                        <a:rPr sz="1250" b="0">
+                          <a:solidFill>
+                            <a:srgbClr val="202B38"/>
+                          </a:solidFill>
+                          <a:latin typeface="Arial"/>
+                        </a:rPr>
+                        <a:t>Parallelization</a:t>
+                      </a:r>
+                    </a:p>
+                  </a:txBody>
+                  <a:tcPr>
+                    <a:solidFill>
+                      <a:srgbClr val="FFFFFF"/>
+                    </a:solidFill>
+                  </a:tcPr>
+                </a:tc>
+                <a:tc>
+                  <a:txBody>
+                    <a:bodyPr wrap="square"/>
+                    <a:lstStyle/>
+                    <a:p>
+                      <a:pPr algn="l">
+                        <a:spcAft>
+                          <a:spcPts val="0"/>
+                        </a:spcAft>
+                        <a:buNone/>
+                      </a:pPr>
+                      <a:r>
+                        <a:rPr sz="1250" b="0">
+                          <a:solidFill>
+                            <a:srgbClr val="202B38"/>
+                          </a:solidFill>
+                          <a:latin typeface="Arial"/>
+                        </a:rPr>
+                        <a:t>three sonnet-5 researchers in a thread pool, one fresh context each</a:t>
+                      </a:r>
+                    </a:p>
+                  </a:txBody>
+                  <a:tcPr>
+                    <a:solidFill>
+                      <a:srgbClr val="FFFFFF"/>
+                    </a:solidFill>
+                  </a:tcPr>
+                </a:tc>
+                <a:tc>
+                  <a:txBody>
+                    <a:bodyPr wrap="square"/>
+                    <a:lstStyle/>
+                    <a:p>
+                      <a:pPr algn="l">
+                        <a:spcAft>
+                          <a:spcPts val="0"/>
+                        </a:spcAft>
+                        <a:buNone/>
+                      </a:pPr>
+                      <a:r>
+                        <a:rPr sz="1250" b="0">
+                          <a:solidFill>
+                            <a:srgbClr val="202B38"/>
+                          </a:solidFill>
+                          <a:latin typeface="Arial"/>
+                        </a:rPr>
+                        <a:t>MIT, Python 3.12, test accuracy 0.838 - wall clock 3.9 s side by side versus 11.0 s one after another</a:t>
+                      </a:r>
+                    </a:p>
+                  </a:txBody>
+                  <a:tcPr>
+                    <a:solidFill>
+                      <a:srgbClr val="FFFFFF"/>
+                    </a:solidFill>
+                  </a:tcPr>
+                </a:tc>
+              </a:tr>
+              <a:tr h="457200">
+                <a:tc>
+                  <a:txBody>
+                    <a:bodyPr wrap="square"/>
+                    <a:lstStyle/>
+                    <a:p>
+                      <a:pPr algn="l">
+                        <a:spcAft>
+                          <a:spcPts val="0"/>
+                        </a:spcAft>
+                        <a:buNone/>
+                      </a:pPr>
+                      <a:r>
+                        <a:rPr sz="1250" b="0">
+                          <a:solidFill>
+                            <a:srgbClr val="202B38"/>
+                          </a:solidFill>
+                          <a:latin typeface="Arial"/>
+                        </a:rPr>
+                        <a:t>Orchestrator-workers</a:t>
+                      </a:r>
+                    </a:p>
+                  </a:txBody>
+                  <a:tcPr>
+                    <a:solidFill>
+                      <a:srgbClr val="EEF3FD"/>
+                    </a:solidFill>
+                  </a:tcPr>
+                </a:tc>
+                <a:tc>
+                  <a:txBody>
+                    <a:bodyPr wrap="square"/>
+                    <a:lstStyle/>
+                    <a:p>
+                      <a:pPr algn="l">
+                        <a:spcAft>
+                          <a:spcPts val="0"/>
+                        </a:spcAft>
+                        <a:buNone/>
+                      </a:pPr>
+                      <a:r>
+                        <a:rPr sz="1250" b="0">
+                          <a:solidFill>
+                            <a:srgbClr val="202B38"/>
+                          </a:solidFill>
+                          <a:latin typeface="Arial"/>
+                        </a:rPr>
+                        <a:t>planner (sonnet-5) returns a list of subtasks; workers; synthesizer (opus-5) merges</a:t>
+                      </a:r>
+                    </a:p>
+                  </a:txBody>
+                  <a:tcPr>
+                    <a:solidFill>
+                      <a:srgbClr val="EEF3FD"/>
+                    </a:solidFill>
+                  </a:tcPr>
+                </a:tc>
+                <a:tc>
+                  <a:txBody>
+                    <a:bodyPr wrap="square"/>
+                    <a:lstStyle/>
+                    <a:p>
+                      <a:pPr algn="l">
+                        <a:spcAft>
+                          <a:spcPts val="0"/>
+                        </a:spcAft>
+                        <a:buNone/>
+                      </a:pPr>
+                      <a:r>
+                        <a:rPr sz="1250" b="0">
+                          <a:solidFill>
+                            <a:srgbClr val="202B38"/>
+                          </a:solidFill>
+                          <a:latin typeface="Arial"/>
+                        </a:rPr>
+                        <a:t>4 subtasks on CI vs notebook workflow; planner $0.0024 + 4 workers $0.0578 + synthesizer $0.0235 = $0.0836</a:t>
+                      </a:r>
+                    </a:p>
+                  </a:txBody>
+                  <a:tcPr>
+                    <a:solidFill>
+                      <a:srgbClr val="EEF3FD"/>
+                    </a:solidFill>
+                  </a:tcPr>
+                </a:tc>
+              </a:tr>
+              <a:tr h="457200">
+                <a:tc>
+                  <a:txBody>
+                    <a:bodyPr wrap="square"/>
+                    <a:lstStyle/>
+                    <a:p>
+                      <a:pPr algn="l">
+                        <a:spcAft>
+                          <a:spcPts val="0"/>
+                        </a:spcAft>
+                        <a:buNone/>
+                      </a:pPr>
+                      <a:r>
+                        <a:rPr sz="1250" b="0">
+                          <a:solidFill>
+                            <a:srgbClr val="202B38"/>
+                          </a:solidFill>
+                          <a:latin typeface="Arial"/>
+                        </a:rPr>
+                        <a:t>Evaluator-optimizer</a:t>
+                      </a:r>
+                    </a:p>
+                  </a:txBody>
+                  <a:tcPr>
+                    <a:solidFill>
+                      <a:srgbClr val="FFFFFF"/>
+                    </a:solidFill>
+                  </a:tcPr>
+                </a:tc>
+                <a:tc>
+                  <a:txBody>
+                    <a:bodyPr wrap="square"/>
+                    <a:lstStyle/>
+                    <a:p>
+                      <a:pPr algn="l">
+                        <a:spcAft>
+                          <a:spcPts val="0"/>
+                        </a:spcAft>
+                        <a:buNone/>
+                      </a:pPr>
+                      <a:r>
+                        <a:rPr sz="1250" b="0">
+                          <a:solidFill>
+                            <a:srgbClr val="202B38"/>
+                          </a:solidFill>
+                          <a:latin typeface="Arial"/>
+                        </a:rPr>
+                        <a:t>generator (sonnet-5, reads the file) and evaluator (sonnet-5) on a SECURITY.md summary, two rounds max</a:t>
+                      </a:r>
+                    </a:p>
+                  </a:txBody>
+                  <a:tcPr>
+                    <a:solidFill>
+                      <a:srgbClr val="FFFFFF"/>
+                    </a:solidFill>
+                  </a:tcPr>
+                </a:tc>
+                <a:tc>
+                  <a:txBody>
+                    <a:bodyPr wrap="square"/>
+                    <a:lstStyle/>
+                    <a:p>
+                      <a:pPr algn="l">
+                        <a:spcAft>
+                          <a:spcPts val="0"/>
+                        </a:spcAft>
+                        <a:buNone/>
+                      </a:pPr>
+                      <a:r>
+                        <a:rPr sz="1250" b="0">
+                          <a:solidFill>
+                            <a:srgbClr val="202B38"/>
+                          </a:solidFill>
+                          <a:latin typeface="Arial"/>
+                        </a:rPr>
+                        <a:t>round 1 revise ($0.0095): 'pinned' is not in the file; round 2 pass ($0.0102): every claim supported, path named</a:t>
                       </a:r>
                     </a:p>
                   </a:txBody>
@@ -10785,7 +11083,7 @@
                 </a:solidFill>
                 <a:latin typeface="Arial"/>
               </a:rPr>
-              <a:t>Cost = tokens / 1,000,000 x 3, as in trace.cost(3.0). Dollar figures use estimated tokens at a stand-in price; the notebook's live Claude runs show real usage, and real prices differ by model and by input vs output.</a:t>
+              <a:t>Notebook 03 section 3; costs from response.usage at list prices. Recorded run, 30 Sep 2026; live runs vary. Use when / let the model drive when: see the Part 1 table.</a:t>
             </a:r>
           </a:p>
         </p:txBody>
@@ -10833,6 +11131,523 @@
       <p:sp>
         <p:nvSpPr>
           <p:cNvPr id="10" name="TextBox 9"/>
+          <p:cNvSpPr txBox="1"/>
+          <p:nvPr/>
+        </p:nvSpPr>
+        <p:spPr>
+          <a:xfrm>
+            <a:off x="11292840" y="6473952"/>
+            <a:ext cx="548640" cy="292608"/>
+          </a:xfrm>
+          <a:prstGeom prst="rect">
+            <a:avLst/>
+          </a:prstGeom>
+          <a:noFill/>
+        </p:spPr>
+        <p:txBody>
+          <a:bodyPr wrap="square">
+            <a:spAutoFit/>
+          </a:bodyPr>
+          <a:lstStyle/>
+          <a:p>
+            <a:pPr algn="r">
+              <a:spcAft>
+                <a:spcPts val="600"/>
+              </a:spcAft>
+              <a:buNone/>
+            </a:pPr>
+            <a:r>
+              <a:rPr sz="900" b="0">
+                <a:solidFill>
+                  <a:srgbClr val="5B6774"/>
+                </a:solidFill>
+                <a:latin typeface="Arial"/>
+              </a:rPr>
+              <a:t>18</a:t>
+            </a:r>
+          </a:p>
+        </p:txBody>
+      </p:sp>
+    </p:spTree>
+  </p:cSld>
+  <p:clrMapOvr>
+    <a:masterClrMapping/>
+  </p:clrMapOvr>
+</p:sld>
+</file>
+
+<file path=ppt/slides/slide19.xml><?xml version="1.0" encoding="utf-8"?>
+<p:sld xmlns:a="http://schemas.openxmlformats.org/drawingml/2006/main" xmlns:p="http://schemas.openxmlformats.org/presentationml/2006/main" xmlns:r="http://schemas.openxmlformats.org/officeDocument/2006/relationships">
+  <p:cSld>
+    <p:spTree>
+      <p:nvGrpSpPr>
+        <p:cNvPr id="1" name=""/>
+        <p:cNvGrpSpPr/>
+        <p:nvPr/>
+      </p:nvGrpSpPr>
+      <p:grpSpPr/>
+      <p:sp>
+        <p:nvSpPr>
+          <p:cNvPr id="2" name="Rectangle 1"/>
+          <p:cNvSpPr/>
+          <p:nvPr/>
+        </p:nvSpPr>
+        <p:spPr>
+          <a:xfrm>
+            <a:off x="0" y="0"/>
+            <a:ext cx="12191695" cy="6858000"/>
+          </a:xfrm>
+          <a:prstGeom prst="rect">
+            <a:avLst/>
+          </a:prstGeom>
+          <a:solidFill>
+            <a:srgbClr val="FFFFFF"/>
+          </a:solidFill>
+          <a:ln>
+            <a:noFill/>
+          </a:ln>
+          <a:effectLst/>
+        </p:spPr>
+        <p:style>
+          <a:lnRef idx="1">
+            <a:schemeClr val="accent1"/>
+          </a:lnRef>
+          <a:fillRef idx="3">
+            <a:schemeClr val="accent1"/>
+          </a:fillRef>
+          <a:effectRef idx="2">
+            <a:schemeClr val="accent1"/>
+          </a:effectRef>
+          <a:fontRef idx="minor">
+            <a:schemeClr val="lt1"/>
+          </a:fontRef>
+        </p:style>
+        <p:txBody>
+          <a:bodyPr rtlCol="0" anchor="ctr"/>
+          <a:lstStyle/>
+          <a:p>
+            <a:pPr algn="ctr"/>
+          </a:p>
+        </p:txBody>
+      </p:sp>
+      <p:sp>
+        <p:nvSpPr>
+          <p:cNvPr id="3" name="Rectangle 2"/>
+          <p:cNvSpPr/>
+          <p:nvPr/>
+        </p:nvSpPr>
+        <p:spPr>
+          <a:xfrm>
+            <a:off x="548640" y="475488"/>
+            <a:ext cx="457200" cy="54864"/>
+          </a:xfrm>
+          <a:prstGeom prst="rect">
+            <a:avLst/>
+          </a:prstGeom>
+          <a:solidFill>
+            <a:srgbClr val="1E5EF3"/>
+          </a:solidFill>
+          <a:ln>
+            <a:noFill/>
+          </a:ln>
+          <a:effectLst/>
+        </p:spPr>
+        <p:style>
+          <a:lnRef idx="1">
+            <a:schemeClr val="accent1"/>
+          </a:lnRef>
+          <a:fillRef idx="3">
+            <a:schemeClr val="accent1"/>
+          </a:fillRef>
+          <a:effectRef idx="2">
+            <a:schemeClr val="accent1"/>
+          </a:effectRef>
+          <a:fontRef idx="minor">
+            <a:schemeClr val="lt1"/>
+          </a:fontRef>
+        </p:style>
+        <p:txBody>
+          <a:bodyPr rtlCol="0" anchor="ctr"/>
+          <a:lstStyle/>
+          <a:p>
+            <a:pPr algn="ctr"/>
+          </a:p>
+        </p:txBody>
+      </p:sp>
+      <p:sp>
+        <p:nvSpPr>
+          <p:cNvPr id="4" name="TextBox 3"/>
+          <p:cNvSpPr txBox="1"/>
+          <p:nvPr/>
+        </p:nvSpPr>
+        <p:spPr>
+          <a:xfrm>
+            <a:off x="548640" y="603504"/>
+            <a:ext cx="11091672" cy="274320"/>
+          </a:xfrm>
+          <a:prstGeom prst="rect">
+            <a:avLst/>
+          </a:prstGeom>
+          <a:noFill/>
+        </p:spPr>
+        <p:txBody>
+          <a:bodyPr wrap="square">
+            <a:spAutoFit/>
+          </a:bodyPr>
+          <a:lstStyle/>
+          <a:p>
+            <a:pPr algn="l">
+              <a:spcAft>
+                <a:spcPts val="600"/>
+              </a:spcAft>
+              <a:buNone/>
+            </a:pPr>
+            <a:r>
+              <a:rPr sz="1100" b="1">
+                <a:solidFill>
+                  <a:srgbClr val="1E5EF3"/>
+                </a:solidFill>
+                <a:latin typeface="Arial"/>
+              </a:rPr>
+              <a:t>NOTEBOOK 03 - THE A/B/C EVAL SUITE</a:t>
+            </a:r>
+          </a:p>
+        </p:txBody>
+      </p:sp>
+      <p:sp>
+        <p:nvSpPr>
+          <p:cNvPr id="5" name="TextBox 4"/>
+          <p:cNvSpPr txBox="1"/>
+          <p:nvPr/>
+        </p:nvSpPr>
+        <p:spPr>
+          <a:xfrm>
+            <a:off x="548640" y="868680"/>
+            <a:ext cx="11091672" cy="777240"/>
+          </a:xfrm>
+          <a:prstGeom prst="rect">
+            <a:avLst/>
+          </a:prstGeom>
+          <a:noFill/>
+        </p:spPr>
+        <p:txBody>
+          <a:bodyPr wrap="square">
+            <a:spAutoFit/>
+          </a:bodyPr>
+          <a:lstStyle/>
+          <a:p>
+            <a:pPr algn="l">
+              <a:spcAft>
+                <a:spcPts val="0"/>
+              </a:spcAft>
+              <a:buNone/>
+            </a:pPr>
+            <a:r>
+              <a:rPr sz="2600" b="1">
+                <a:solidFill>
+                  <a:srgbClr val="0A2540"/>
+                </a:solidFill>
+                <a:latin typeface="Arial"/>
+              </a:rPr>
+              <a:t>One model, three harnesses: 21%, 100% and 93% of 14 cases</a:t>
+            </a:r>
+          </a:p>
+        </p:txBody>
+      </p:sp>
+      <p:sp>
+        <p:nvSpPr>
+          <p:cNvPr id="6" name="Rectangle 5"/>
+          <p:cNvSpPr/>
+          <p:nvPr/>
+        </p:nvSpPr>
+        <p:spPr>
+          <a:xfrm>
+            <a:off x="548640" y="1664208"/>
+            <a:ext cx="11091672" cy="12801"/>
+          </a:xfrm>
+          <a:prstGeom prst="rect">
+            <a:avLst/>
+          </a:prstGeom>
+          <a:solidFill>
+            <a:srgbClr val="B9D0FA"/>
+          </a:solidFill>
+          <a:ln>
+            <a:noFill/>
+          </a:ln>
+          <a:effectLst/>
+        </p:spPr>
+        <p:style>
+          <a:lnRef idx="1">
+            <a:schemeClr val="accent1"/>
+          </a:lnRef>
+          <a:fillRef idx="3">
+            <a:schemeClr val="accent1"/>
+          </a:fillRef>
+          <a:effectRef idx="2">
+            <a:schemeClr val="accent1"/>
+          </a:effectRef>
+          <a:fontRef idx="minor">
+            <a:schemeClr val="lt1"/>
+          </a:fontRef>
+        </p:style>
+        <p:txBody>
+          <a:bodyPr rtlCol="0" anchor="ctr"/>
+          <a:lstStyle/>
+          <a:p>
+            <a:pPr algn="ctr"/>
+          </a:p>
+        </p:txBody>
+      </p:sp>
+      <p:sp>
+        <p:nvSpPr>
+          <p:cNvPr id="7" name="TextBox 6"/>
+          <p:cNvSpPr txBox="1"/>
+          <p:nvPr/>
+        </p:nvSpPr>
+        <p:spPr>
+          <a:xfrm>
+            <a:off x="548640" y="1874519"/>
+            <a:ext cx="4297680" cy="4206240"/>
+          </a:xfrm>
+          <a:prstGeom prst="rect">
+            <a:avLst/>
+          </a:prstGeom>
+          <a:noFill/>
+        </p:spPr>
+        <p:txBody>
+          <a:bodyPr wrap="square">
+            <a:spAutoFit/>
+          </a:bodyPr>
+          <a:lstStyle/>
+          <a:p>
+            <a:pPr algn="l" indent="-228600" marL="228600">
+              <a:spcAft>
+                <a:spcPts val="800"/>
+              </a:spcAft>
+              <a:buClr>
+                <a:srgbClr val="1E5EF3"/>
+              </a:buClr>
+              <a:buChar char="—"/>
+            </a:pPr>
+            <a:r>
+              <a:rPr sz="1450" b="0">
+                <a:solidFill>
+                  <a:srgbClr val="202B38"/>
+                </a:solidFill>
+                <a:latin typeface="Arial"/>
+              </a:rPr>
+              <a:t>How to read it: one bar per configuration; top = cases passed, bottom = cost of the whole suite from real usage</a:t>
+            </a:r>
+          </a:p>
+          <a:p>
+            <a:pPr algn="l" indent="-228600" marL="228600">
+              <a:spcAft>
+                <a:spcPts val="800"/>
+              </a:spcAft>
+              <a:buClr>
+                <a:srgbClr val="1E5EF3"/>
+              </a:buClr>
+              <a:buChar char="—"/>
+            </a:pPr>
+            <a:r>
+              <a:rPr sz="1450" b="0">
+                <a:solidFill>
+                  <a:srgbClr val="202B38"/>
+                </a:solidFill>
+                <a:latin typeface="Arial"/>
+              </a:rPr>
+              <a:t>A, no tools: 3 of 14 (21%), 5,975 input tokens, $0.0645</a:t>
+            </a:r>
+          </a:p>
+          <a:p>
+            <a:pPr algn="l" indent="-228600" marL="228600">
+              <a:spcAft>
+                <a:spcPts val="800"/>
+              </a:spcAft>
+              <a:buClr>
+                <a:srgbClr val="1E5EF3"/>
+              </a:buClr>
+              <a:buChar char="—"/>
+            </a:pPr>
+            <a:r>
+              <a:rPr sz="1450" b="0">
+                <a:solidFill>
+                  <a:srgbClr val="202B38"/>
+                </a:solidFill>
+                <a:latin typeface="Arial"/>
+              </a:rPr>
+              <a:t>B, tools: 14 of 14 (100%), 177,804 input tokens, $0.9765</a:t>
+            </a:r>
+          </a:p>
+          <a:p>
+            <a:pPr algn="l" indent="-228600" marL="228600">
+              <a:spcAft>
+                <a:spcPts val="800"/>
+              </a:spcAft>
+              <a:buClr>
+                <a:srgbClr val="1E5EF3"/>
+              </a:buClr>
+              <a:buChar char="—"/>
+            </a:pPr>
+            <a:r>
+              <a:rPr sz="1450" b="0">
+                <a:solidFill>
+                  <a:srgbClr val="202B38"/>
+                </a:solidFill>
+                <a:latin typeface="Arial"/>
+              </a:rPr>
+              <a:t>C, tools + validator: 13 of 14 (93%), 207,336 input tokens, $1.1275</a:t>
+            </a:r>
+          </a:p>
+          <a:p>
+            <a:pPr algn="l" indent="-228600" marL="228600">
+              <a:spcAft>
+                <a:spcPts val="800"/>
+              </a:spcAft>
+              <a:buClr>
+                <a:srgbClr val="1E5EF3"/>
+              </a:buClr>
+              <a:buChar char="—"/>
+            </a:pPr>
+            <a:r>
+              <a:rPr sz="1450" b="0">
+                <a:solidFill>
+                  <a:srgbClr val="202B38"/>
+                </a:solidFill>
+                <a:latin typeface="Arial"/>
+              </a:rPr>
+              <a:t>Same claude-opus-5, same effort, output schema and max_turns=8; only the harness changed</a:t>
+            </a:r>
+          </a:p>
+          <a:p>
+            <a:pPr algn="l" indent="-228600" marL="228600">
+              <a:spcAft>
+                <a:spcPts val="800"/>
+              </a:spcAft>
+              <a:buClr>
+                <a:srgbClr val="1E5EF3"/>
+              </a:buClr>
+              <a:buChar char="—"/>
+            </a:pPr>
+            <a:r>
+              <a:rPr sz="1450" b="0">
+                <a:solidFill>
+                  <a:srgbClr val="202B38"/>
+                </a:solidFill>
+                <a:latin typeface="Arial"/>
+              </a:rPr>
+              <a:t>Suite wall clock 88 s, four cases at a time; output tokens 1,386 / 3,501 / 3,632</a:t>
+            </a:r>
+          </a:p>
+        </p:txBody>
+      </p:sp>
+      <p:pic>
+        <p:nvPicPr>
+          <p:cNvPr id="8" name="Picture 7" descr="s3_scoreboard.png"/>
+          <p:cNvPicPr>
+            <a:picLocks noChangeAspect="1"/>
+          </p:cNvPicPr>
+          <p:nvPr/>
+        </p:nvPicPr>
+        <p:blipFill>
+          <a:blip r:embed="rId2"/>
+          <a:stretch>
+            <a:fillRect/>
+          </a:stretch>
+        </p:blipFill>
+        <p:spPr>
+          <a:xfrm>
+            <a:off x="5120640" y="1874519"/>
+            <a:ext cx="6492240" cy="4036785"/>
+          </a:xfrm>
+          <a:prstGeom prst="rect">
+            <a:avLst/>
+          </a:prstGeom>
+        </p:spPr>
+      </p:pic>
+      <p:sp>
+        <p:nvSpPr>
+          <p:cNvPr id="9" name="TextBox 8"/>
+          <p:cNvSpPr txBox="1"/>
+          <p:nvPr/>
+        </p:nvSpPr>
+        <p:spPr>
+          <a:xfrm>
+            <a:off x="5120640" y="6062471"/>
+            <a:ext cx="6492240" cy="365760"/>
+          </a:xfrm>
+          <a:prstGeom prst="rect">
+            <a:avLst/>
+          </a:prstGeom>
+          <a:noFill/>
+        </p:spPr>
+        <p:txBody>
+          <a:bodyPr wrap="square">
+            <a:spAutoFit/>
+          </a:bodyPr>
+          <a:lstStyle/>
+          <a:p>
+            <a:pPr algn="ctr">
+              <a:spcAft>
+                <a:spcPts val="600"/>
+              </a:spcAft>
+              <a:buNone/>
+            </a:pPr>
+            <a:r>
+              <a:rPr sz="1100" b="0">
+                <a:solidFill>
+                  <a:srgbClr val="5B6774"/>
+                </a:solidFill>
+                <a:latin typeface="Arial"/>
+              </a:rPr>
+              <a:t>Notebook 03 section 4: compare() over evals/cases.yaml, 11 factual cases + 3 traps. Recorded run on claude-opus-5, 30 Sep 2026; live runs vary.</a:t>
+            </a:r>
+          </a:p>
+        </p:txBody>
+      </p:sp>
+      <p:sp>
+        <p:nvSpPr>
+          <p:cNvPr id="10" name="TextBox 9"/>
+          <p:cNvSpPr txBox="1"/>
+          <p:nvPr/>
+        </p:nvSpPr>
+        <p:spPr>
+          <a:xfrm>
+            <a:off x="548640" y="6473952"/>
+            <a:ext cx="7315200" cy="292608"/>
+          </a:xfrm>
+          <a:prstGeom prst="rect">
+            <a:avLst/>
+          </a:prstGeom>
+          <a:noFill/>
+        </p:spPr>
+        <p:txBody>
+          <a:bodyPr wrap="square">
+            <a:spAutoFit/>
+          </a:bodyPr>
+          <a:lstStyle/>
+          <a:p>
+            <a:pPr algn="l">
+              <a:spcAft>
+                <a:spcPts val="600"/>
+              </a:spcAft>
+              <a:buNone/>
+            </a:pPr>
+            <a:r>
+              <a:rPr sz="900" b="0">
+                <a:solidFill>
+                  <a:srgbClr val="5B6774"/>
+                </a:solidFill>
+                <a:latin typeface="Arial"/>
+              </a:rPr>
+              <a:t>M5 Session 3 - Building a Harness</a:t>
+            </a:r>
+          </a:p>
+        </p:txBody>
+      </p:sp>
+      <p:sp>
+        <p:nvSpPr>
+          <p:cNvPr id="11" name="TextBox 10"/>
           <p:cNvSpPr txBox="1"/>
           <p:nvPr/>
         </p:nvSpPr>
@@ -11165,6 +11980,1494 @@
             <a:avLst/>
           </a:prstGeom>
           <a:solidFill>
+            <a:srgbClr val="FFFFFF"/>
+          </a:solidFill>
+          <a:ln>
+            <a:noFill/>
+          </a:ln>
+          <a:effectLst/>
+        </p:spPr>
+        <p:style>
+          <a:lnRef idx="1">
+            <a:schemeClr val="accent1"/>
+          </a:lnRef>
+          <a:fillRef idx="3">
+            <a:schemeClr val="accent1"/>
+          </a:fillRef>
+          <a:effectRef idx="2">
+            <a:schemeClr val="accent1"/>
+          </a:effectRef>
+          <a:fontRef idx="minor">
+            <a:schemeClr val="lt1"/>
+          </a:fontRef>
+        </p:style>
+        <p:txBody>
+          <a:bodyPr rtlCol="0" anchor="ctr"/>
+          <a:lstStyle/>
+          <a:p>
+            <a:pPr algn="ctr"/>
+          </a:p>
+        </p:txBody>
+      </p:sp>
+      <p:sp>
+        <p:nvSpPr>
+          <p:cNvPr id="3" name="Rectangle 2"/>
+          <p:cNvSpPr/>
+          <p:nvPr/>
+        </p:nvSpPr>
+        <p:spPr>
+          <a:xfrm>
+            <a:off x="548640" y="475488"/>
+            <a:ext cx="457200" cy="54864"/>
+          </a:xfrm>
+          <a:prstGeom prst="rect">
+            <a:avLst/>
+          </a:prstGeom>
+          <a:solidFill>
+            <a:srgbClr val="1E5EF3"/>
+          </a:solidFill>
+          <a:ln>
+            <a:noFill/>
+          </a:ln>
+          <a:effectLst/>
+        </p:spPr>
+        <p:style>
+          <a:lnRef idx="1">
+            <a:schemeClr val="accent1"/>
+          </a:lnRef>
+          <a:fillRef idx="3">
+            <a:schemeClr val="accent1"/>
+          </a:fillRef>
+          <a:effectRef idx="2">
+            <a:schemeClr val="accent1"/>
+          </a:effectRef>
+          <a:fontRef idx="minor">
+            <a:schemeClr val="lt1"/>
+          </a:fontRef>
+        </p:style>
+        <p:txBody>
+          <a:bodyPr rtlCol="0" anchor="ctr"/>
+          <a:lstStyle/>
+          <a:p>
+            <a:pPr algn="ctr"/>
+          </a:p>
+        </p:txBody>
+      </p:sp>
+      <p:sp>
+        <p:nvSpPr>
+          <p:cNvPr id="4" name="TextBox 3"/>
+          <p:cNvSpPr txBox="1"/>
+          <p:nvPr/>
+        </p:nvSpPr>
+        <p:spPr>
+          <a:xfrm>
+            <a:off x="548640" y="603504"/>
+            <a:ext cx="11091672" cy="274320"/>
+          </a:xfrm>
+          <a:prstGeom prst="rect">
+            <a:avLst/>
+          </a:prstGeom>
+          <a:noFill/>
+        </p:spPr>
+        <p:txBody>
+          <a:bodyPr wrap="square">
+            <a:spAutoFit/>
+          </a:bodyPr>
+          <a:lstStyle/>
+          <a:p>
+            <a:pPr algn="l">
+              <a:spcAft>
+                <a:spcPts val="600"/>
+              </a:spcAft>
+              <a:buNone/>
+            </a:pPr>
+            <a:r>
+              <a:rPr sz="1100" b="1">
+                <a:solidFill>
+                  <a:srgbClr val="1E5EF3"/>
+                </a:solidFill>
+                <a:latin typeface="Arial"/>
+              </a:rPr>
+              <a:t>NOTEBOOK 03 - READING THE FAILURES</a:t>
+            </a:r>
+          </a:p>
+        </p:txBody>
+      </p:sp>
+      <p:sp>
+        <p:nvSpPr>
+          <p:cNvPr id="5" name="TextBox 4"/>
+          <p:cNvSpPr txBox="1"/>
+          <p:nvPr/>
+        </p:nvSpPr>
+        <p:spPr>
+          <a:xfrm>
+            <a:off x="548640" y="868680"/>
+            <a:ext cx="11091672" cy="777240"/>
+          </a:xfrm>
+          <a:prstGeom prst="rect">
+            <a:avLst/>
+          </a:prstGeom>
+          <a:noFill/>
+        </p:spPr>
+        <p:txBody>
+          <a:bodyPr wrap="square">
+            <a:spAutoFit/>
+          </a:bodyPr>
+          <a:lstStyle/>
+          <a:p>
+            <a:pPr algn="l">
+              <a:spcAft>
+                <a:spcPts val="0"/>
+              </a:spcAft>
+              <a:buNone/>
+            </a:pPr>
+            <a:r>
+              <a:rPr sz="2600" b="1">
+                <a:solidFill>
+                  <a:srgbClr val="0A2540"/>
+                </a:solidFill>
+                <a:latin typeface="Arial"/>
+              </a:rPr>
+              <a:t>The failures, one by one: honest ignorance and one trap</a:t>
+            </a:r>
+          </a:p>
+        </p:txBody>
+      </p:sp>
+      <p:sp>
+        <p:nvSpPr>
+          <p:cNvPr id="6" name="Rectangle 5"/>
+          <p:cNvSpPr/>
+          <p:nvPr/>
+        </p:nvSpPr>
+        <p:spPr>
+          <a:xfrm>
+            <a:off x="548640" y="1664208"/>
+            <a:ext cx="11091672" cy="12801"/>
+          </a:xfrm>
+          <a:prstGeom prst="rect">
+            <a:avLst/>
+          </a:prstGeom>
+          <a:solidFill>
+            <a:srgbClr val="B9D0FA"/>
+          </a:solidFill>
+          <a:ln>
+            <a:noFill/>
+          </a:ln>
+          <a:effectLst/>
+        </p:spPr>
+        <p:style>
+          <a:lnRef idx="1">
+            <a:schemeClr val="accent1"/>
+          </a:lnRef>
+          <a:fillRef idx="3">
+            <a:schemeClr val="accent1"/>
+          </a:fillRef>
+          <a:effectRef idx="2">
+            <a:schemeClr val="accent1"/>
+          </a:effectRef>
+          <a:fontRef idx="minor">
+            <a:schemeClr val="lt1"/>
+          </a:fontRef>
+        </p:style>
+        <p:txBody>
+          <a:bodyPr rtlCol="0" anchor="ctr"/>
+          <a:lstStyle/>
+          <a:p>
+            <a:pPr algn="ctr"/>
+          </a:p>
+        </p:txBody>
+      </p:sp>
+      <p:sp>
+        <p:nvSpPr>
+          <p:cNvPr id="7" name="Rectangle 6"/>
+          <p:cNvSpPr/>
+          <p:nvPr/>
+        </p:nvSpPr>
+        <p:spPr>
+          <a:xfrm>
+            <a:off x="548640" y="1874519"/>
+            <a:ext cx="5394960" cy="3977639"/>
+          </a:xfrm>
+          <a:prstGeom prst="rect">
+            <a:avLst/>
+          </a:prstGeom>
+          <a:solidFill>
+            <a:srgbClr val="EEF3FD"/>
+          </a:solidFill>
+          <a:ln>
+            <a:noFill/>
+          </a:ln>
+          <a:effectLst/>
+        </p:spPr>
+        <p:style>
+          <a:lnRef idx="1">
+            <a:schemeClr val="accent1"/>
+          </a:lnRef>
+          <a:fillRef idx="3">
+            <a:schemeClr val="accent1"/>
+          </a:fillRef>
+          <a:effectRef idx="2">
+            <a:schemeClr val="accent1"/>
+          </a:effectRef>
+          <a:fontRef idx="minor">
+            <a:schemeClr val="lt1"/>
+          </a:fontRef>
+        </p:style>
+        <p:txBody>
+          <a:bodyPr rtlCol="0" anchor="ctr"/>
+          <a:lstStyle/>
+          <a:p>
+            <a:pPr algn="ctr"/>
+          </a:p>
+        </p:txBody>
+      </p:sp>
+      <p:sp>
+        <p:nvSpPr>
+          <p:cNvPr id="8" name="TextBox 7"/>
+          <p:cNvSpPr txBox="1"/>
+          <p:nvPr/>
+        </p:nvSpPr>
+        <p:spPr>
+          <a:xfrm>
+            <a:off x="777240" y="2039111"/>
+            <a:ext cx="4937760" cy="365760"/>
+          </a:xfrm>
+          <a:prstGeom prst="rect">
+            <a:avLst/>
+          </a:prstGeom>
+          <a:noFill/>
+        </p:spPr>
+        <p:txBody>
+          <a:bodyPr wrap="square">
+            <a:spAutoFit/>
+          </a:bodyPr>
+          <a:lstStyle/>
+          <a:p>
+            <a:pPr algn="l">
+              <a:spcAft>
+                <a:spcPts val="600"/>
+              </a:spcAft>
+              <a:buNone/>
+            </a:pPr>
+            <a:r>
+              <a:rPr sz="1500" b="1">
+                <a:solidFill>
+                  <a:srgbClr val="0A2540"/>
+                </a:solidFill>
+                <a:latin typeface="Arial"/>
+              </a:rPr>
+              <a:t>A, no tools: 11 fails, 3 passes</a:t>
+            </a:r>
+          </a:p>
+        </p:txBody>
+      </p:sp>
+      <p:sp>
+        <p:nvSpPr>
+          <p:cNvPr id="9" name="TextBox 8"/>
+          <p:cNvSpPr txBox="1"/>
+          <p:nvPr/>
+        </p:nvSpPr>
+        <p:spPr>
+          <a:xfrm>
+            <a:off x="777240" y="2441447"/>
+            <a:ext cx="4937760" cy="3246119"/>
+          </a:xfrm>
+          <a:prstGeom prst="rect">
+            <a:avLst/>
+          </a:prstGeom>
+          <a:noFill/>
+        </p:spPr>
+        <p:txBody>
+          <a:bodyPr wrap="square">
+            <a:spAutoFit/>
+          </a:bodyPr>
+          <a:lstStyle/>
+          <a:p>
+            <a:pPr algn="l" indent="-228600" marL="228600">
+              <a:spcAft>
+                <a:spcPts val="600"/>
+              </a:spcAft>
+              <a:buClr>
+                <a:srgbClr val="1E5EF3"/>
+              </a:buClr>
+              <a:buChar char="—"/>
+            </a:pPr>
+            <a:r>
+              <a:rPr sz="1300" b="0">
+                <a:solidFill>
+                  <a:srgbClr val="202B38"/>
+                </a:solidFill>
+                <a:latin typeface="Arial"/>
+              </a:rPr>
+              <a:t>Every factual case: 1 turn, found=False, sources=[], "I cannot determine this without access to the repository"</a:t>
+            </a:r>
+          </a:p>
+          <a:p>
+            <a:pPr algn="l" indent="-228600" marL="228600">
+              <a:spcAft>
+                <a:spcPts val="600"/>
+              </a:spcAft>
+              <a:buClr>
+                <a:srgbClr val="1E5EF3"/>
+              </a:buClr>
+              <a:buChar char="—"/>
+            </a:pPr>
+            <a:r>
+              <a:rPr sz="1300" b="0">
+                <a:solidFill>
+                  <a:srgbClr val="202B38"/>
+                </a:solidFill>
+                <a:latin typeface="Arial"/>
+              </a:rPr>
+              <a:t>The grader wanted the fact and the file; the model was honest and still wrong - it has no way to reach the answer</a:t>
+            </a:r>
+          </a:p>
+          <a:p>
+            <a:pPr algn="l" indent="-228600" marL="228600">
+              <a:spcAft>
+                <a:spcPts val="600"/>
+              </a:spcAft>
+              <a:buClr>
+                <a:srgbClr val="1E5EF3"/>
+              </a:buClr>
+              <a:buChar char="—"/>
+            </a:pPr>
+            <a:r>
+              <a:rPr sz="1300" b="0">
+                <a:solidFill>
+                  <a:srgbClr val="202B38"/>
+                </a:solidFill>
+                <a:latin typeface="Arial"/>
+              </a:rPr>
+              <a:t>Its three passes are the traps, where found=False was the right answer</a:t>
+            </a:r>
+          </a:p>
+          <a:p>
+            <a:pPr algn="l" indent="-228600" marL="228600">
+              <a:spcAft>
+                <a:spcPts val="600"/>
+              </a:spcAft>
+              <a:buClr>
+                <a:srgbClr val="1E5EF3"/>
+              </a:buClr>
+              <a:buChar char="—"/>
+            </a:pPr>
+            <a:r>
+              <a:rPr sz="1300" b="0">
+                <a:solidFill>
+                  <a:srgbClr val="202B38"/>
+                </a:solidFill>
+                <a:latin typeface="Arial"/>
+              </a:rPr>
+              <a:t>In plain words: without tools, the model can only pass the questions whose answer is 'I do not know'</a:t>
+            </a:r>
+          </a:p>
+        </p:txBody>
+      </p:sp>
+      <p:sp>
+        <p:nvSpPr>
+          <p:cNvPr id="10" name="Rectangle 9"/>
+          <p:cNvSpPr/>
+          <p:nvPr/>
+        </p:nvSpPr>
+        <p:spPr>
+          <a:xfrm>
+            <a:off x="6245352" y="1874519"/>
+            <a:ext cx="5394960" cy="3977639"/>
+          </a:xfrm>
+          <a:prstGeom prst="rect">
+            <a:avLst/>
+          </a:prstGeom>
+          <a:solidFill>
+            <a:srgbClr val="EEF3FD"/>
+          </a:solidFill>
+          <a:ln>
+            <a:noFill/>
+          </a:ln>
+          <a:effectLst/>
+        </p:spPr>
+        <p:style>
+          <a:lnRef idx="1">
+            <a:schemeClr val="accent1"/>
+          </a:lnRef>
+          <a:fillRef idx="3">
+            <a:schemeClr val="accent1"/>
+          </a:fillRef>
+          <a:effectRef idx="2">
+            <a:schemeClr val="accent1"/>
+          </a:effectRef>
+          <a:fontRef idx="minor">
+            <a:schemeClr val="lt1"/>
+          </a:fontRef>
+        </p:style>
+        <p:txBody>
+          <a:bodyPr rtlCol="0" anchor="ctr"/>
+          <a:lstStyle/>
+          <a:p>
+            <a:pPr algn="ctr"/>
+          </a:p>
+        </p:txBody>
+      </p:sp>
+      <p:sp>
+        <p:nvSpPr>
+          <p:cNvPr id="11" name="TextBox 10"/>
+          <p:cNvSpPr txBox="1"/>
+          <p:nvPr/>
+        </p:nvSpPr>
+        <p:spPr>
+          <a:xfrm>
+            <a:off x="6473952" y="2039111"/>
+            <a:ext cx="4937760" cy="365760"/>
+          </a:xfrm>
+          <a:prstGeom prst="rect">
+            <a:avLst/>
+          </a:prstGeom>
+          <a:noFill/>
+        </p:spPr>
+        <p:txBody>
+          <a:bodyPr wrap="square">
+            <a:spAutoFit/>
+          </a:bodyPr>
+          <a:lstStyle/>
+          <a:p>
+            <a:pPr algn="l">
+              <a:spcAft>
+                <a:spcPts val="600"/>
+              </a:spcAft>
+              <a:buNone/>
+            </a:pPr>
+            <a:r>
+              <a:rPr sz="1500" b="1">
+                <a:solidFill>
+                  <a:srgbClr val="0A2540"/>
+                </a:solidFill>
+                <a:latin typeface="Arial"/>
+              </a:rPr>
+              <a:t>C, tools + validator: 1 fail, trap-grade</a:t>
+            </a:r>
+          </a:p>
+        </p:txBody>
+      </p:sp>
+      <p:sp>
+        <p:nvSpPr>
+          <p:cNvPr id="12" name="TextBox 11"/>
+          <p:cNvSpPr txBox="1"/>
+          <p:nvPr/>
+        </p:nvSpPr>
+        <p:spPr>
+          <a:xfrm>
+            <a:off x="6473952" y="2441447"/>
+            <a:ext cx="4937760" cy="3246119"/>
+          </a:xfrm>
+          <a:prstGeom prst="rect">
+            <a:avLst/>
+          </a:prstGeom>
+          <a:noFill/>
+        </p:spPr>
+        <p:txBody>
+          <a:bodyPr wrap="square">
+            <a:spAutoFit/>
+          </a:bodyPr>
+          <a:lstStyle/>
+          <a:p>
+            <a:pPr algn="l" indent="-228600" marL="228600">
+              <a:spcAft>
+                <a:spcPts val="600"/>
+              </a:spcAft>
+              <a:buClr>
+                <a:srgbClr val="1E5EF3"/>
+              </a:buClr>
+              <a:buChar char="—"/>
+            </a:pPr>
+            <a:r>
+              <a:rPr sz="1300" b="0">
+                <a:solidFill>
+                  <a:srgbClr val="202B38"/>
+                </a:solidFill>
+                <a:latin typeface="Arial"/>
+              </a:rPr>
+              <a:t>'What grade did the course receive?' - 8 turns, stopped max_turns, no structured answer, $0.5191</a:t>
+            </a:r>
+          </a:p>
+          <a:p>
+            <a:pPr algn="l" indent="-228600" marL="228600">
+              <a:spcAft>
+                <a:spcPts val="600"/>
+              </a:spcAft>
+              <a:buClr>
+                <a:srgbClr val="1E5EF3"/>
+              </a:buClr>
+              <a:buChar char="—"/>
+            </a:pPr>
+            <a:r>
+              <a:rPr sz="1300" b="0">
+                <a:solidFill>
+                  <a:srgbClr val="202B38"/>
+                </a:solidFill>
+                <a:latin typeface="Arial"/>
+              </a:rPr>
+              <a:t>B on the same case: also 8 turns, found=False on the last turn, $0.5341 - the dearest case in both suites</a:t>
+            </a:r>
+          </a:p>
+          <a:p>
+            <a:pPr algn="l" indent="-228600" marL="228600">
+              <a:spcAft>
+                <a:spcPts val="600"/>
+              </a:spcAft>
+              <a:buClr>
+                <a:srgbClr val="1E5EF3"/>
+              </a:buClr>
+              <a:buChar char="—"/>
+            </a:pPr>
+            <a:r>
+              <a:rPr sz="1300" b="0">
+                <a:solidFill>
+                  <a:srgbClr val="202B38"/>
+                </a:solidFill>
+                <a:latin typeface="Arial"/>
+              </a:rPr>
+              <a:t>The model kept searching a repository that holds no grade; whether it speaks before turn eight is luck, not design</a:t>
+            </a:r>
+          </a:p>
+          <a:p>
+            <a:pPr algn="l" indent="-228600" marL="228600">
+              <a:spcAft>
+                <a:spcPts val="600"/>
+              </a:spcAft>
+              <a:buClr>
+                <a:srgbClr val="1E5EF3"/>
+              </a:buClr>
+              <a:buChar char="—"/>
+            </a:pPr>
+            <a:r>
+              <a:rPr sz="1300" b="0">
+                <a:solidFill>
+                  <a:srgbClr val="202B38"/>
+                </a:solidFill>
+                <a:latin typeface="Arial"/>
+              </a:rPr>
+              <a:t>The failure print shows no trace, so we cannot say whether the validator fired; the seatbelt is what we can see</a:t>
+            </a:r>
+          </a:p>
+          <a:p>
+            <a:pPr algn="l" indent="-228600" marL="228600">
+              <a:spcAft>
+                <a:spcPts val="600"/>
+              </a:spcAft>
+              <a:buClr>
+                <a:srgbClr val="1E5EF3"/>
+              </a:buClr>
+              <a:buChar char="—"/>
+            </a:pPr>
+            <a:r>
+              <a:rPr sz="1300" b="0">
+                <a:solidFill>
+                  <a:srgbClr val="202B38"/>
+                </a:solidFill>
+                <a:latin typeface="Arial"/>
+              </a:rPr>
+              <a:t>Fix in the harness, not the model: a tighter max_turns or a system prompt that says when to stop looking</a:t>
+            </a:r>
+          </a:p>
+        </p:txBody>
+      </p:sp>
+      <p:sp>
+        <p:nvSpPr>
+          <p:cNvPr id="13" name="TextBox 12"/>
+          <p:cNvSpPr txBox="1"/>
+          <p:nvPr/>
+        </p:nvSpPr>
+        <p:spPr>
+          <a:xfrm>
+            <a:off x="548640" y="6053328"/>
+            <a:ext cx="11091672" cy="502920"/>
+          </a:xfrm>
+          <a:prstGeom prst="rect">
+            <a:avLst/>
+          </a:prstGeom>
+          <a:noFill/>
+        </p:spPr>
+        <p:txBody>
+          <a:bodyPr wrap="square">
+            <a:spAutoFit/>
+          </a:bodyPr>
+          <a:lstStyle/>
+          <a:p>
+            <a:pPr algn="l">
+              <a:spcAft>
+                <a:spcPts val="600"/>
+              </a:spcAft>
+              <a:buNone/>
+            </a:pPr>
+            <a:r>
+              <a:rPr sz="1200" b="0">
+                <a:solidFill>
+                  <a:srgbClr val="1E5EF3"/>
+                </a:solidFill>
+                <a:latin typeface="Arial"/>
+              </a:rPr>
+              <a:t>Notebook 03 section 4, 'The failures, one by one'. A trap case tests honesty and the seatbelt at once: write it into the suite or you will never see it. Recorded run, 30 Sep 2026; live runs vary.</a:t>
+            </a:r>
+          </a:p>
+        </p:txBody>
+      </p:sp>
+      <p:sp>
+        <p:nvSpPr>
+          <p:cNvPr id="14" name="TextBox 13"/>
+          <p:cNvSpPr txBox="1"/>
+          <p:nvPr/>
+        </p:nvSpPr>
+        <p:spPr>
+          <a:xfrm>
+            <a:off x="548640" y="6473952"/>
+            <a:ext cx="7315200" cy="292608"/>
+          </a:xfrm>
+          <a:prstGeom prst="rect">
+            <a:avLst/>
+          </a:prstGeom>
+          <a:noFill/>
+        </p:spPr>
+        <p:txBody>
+          <a:bodyPr wrap="square">
+            <a:spAutoFit/>
+          </a:bodyPr>
+          <a:lstStyle/>
+          <a:p>
+            <a:pPr algn="l">
+              <a:spcAft>
+                <a:spcPts val="600"/>
+              </a:spcAft>
+              <a:buNone/>
+            </a:pPr>
+            <a:r>
+              <a:rPr sz="900" b="0">
+                <a:solidFill>
+                  <a:srgbClr val="5B6774"/>
+                </a:solidFill>
+                <a:latin typeface="Arial"/>
+              </a:rPr>
+              <a:t>M5 Session 3 - Building a Harness</a:t>
+            </a:r>
+          </a:p>
+        </p:txBody>
+      </p:sp>
+      <p:sp>
+        <p:nvSpPr>
+          <p:cNvPr id="15" name="TextBox 14"/>
+          <p:cNvSpPr txBox="1"/>
+          <p:nvPr/>
+        </p:nvSpPr>
+        <p:spPr>
+          <a:xfrm>
+            <a:off x="11292840" y="6473952"/>
+            <a:ext cx="548640" cy="292608"/>
+          </a:xfrm>
+          <a:prstGeom prst="rect">
+            <a:avLst/>
+          </a:prstGeom>
+          <a:noFill/>
+        </p:spPr>
+        <p:txBody>
+          <a:bodyPr wrap="square">
+            <a:spAutoFit/>
+          </a:bodyPr>
+          <a:lstStyle/>
+          <a:p>
+            <a:pPr algn="r">
+              <a:spcAft>
+                <a:spcPts val="600"/>
+              </a:spcAft>
+              <a:buNone/>
+            </a:pPr>
+            <a:r>
+              <a:rPr sz="900" b="0">
+                <a:solidFill>
+                  <a:srgbClr val="5B6774"/>
+                </a:solidFill>
+                <a:latin typeface="Arial"/>
+              </a:rPr>
+              <a:t>20</a:t>
+            </a:r>
+          </a:p>
+        </p:txBody>
+      </p:sp>
+    </p:spTree>
+  </p:cSld>
+  <p:clrMapOvr>
+    <a:masterClrMapping/>
+  </p:clrMapOvr>
+</p:sld>
+</file>
+
+<file path=ppt/slides/slide21.xml><?xml version="1.0" encoding="utf-8"?>
+<p:sld xmlns:a="http://schemas.openxmlformats.org/drawingml/2006/main" xmlns:p="http://schemas.openxmlformats.org/presentationml/2006/main" xmlns:r="http://schemas.openxmlformats.org/officeDocument/2006/relationships">
+  <p:cSld>
+    <p:spTree>
+      <p:nvGrpSpPr>
+        <p:cNvPr id="1" name=""/>
+        <p:cNvGrpSpPr/>
+        <p:nvPr/>
+      </p:nvGrpSpPr>
+      <p:grpSpPr/>
+      <p:sp>
+        <p:nvSpPr>
+          <p:cNvPr id="2" name="Rectangle 1"/>
+          <p:cNvSpPr/>
+          <p:nvPr/>
+        </p:nvSpPr>
+        <p:spPr>
+          <a:xfrm>
+            <a:off x="0" y="0"/>
+            <a:ext cx="12191695" cy="6858000"/>
+          </a:xfrm>
+          <a:prstGeom prst="rect">
+            <a:avLst/>
+          </a:prstGeom>
+          <a:solidFill>
+            <a:srgbClr val="FFFFFF"/>
+          </a:solidFill>
+          <a:ln>
+            <a:noFill/>
+          </a:ln>
+          <a:effectLst/>
+        </p:spPr>
+        <p:style>
+          <a:lnRef idx="1">
+            <a:schemeClr val="accent1"/>
+          </a:lnRef>
+          <a:fillRef idx="3">
+            <a:schemeClr val="accent1"/>
+          </a:fillRef>
+          <a:effectRef idx="2">
+            <a:schemeClr val="accent1"/>
+          </a:effectRef>
+          <a:fontRef idx="minor">
+            <a:schemeClr val="lt1"/>
+          </a:fontRef>
+        </p:style>
+        <p:txBody>
+          <a:bodyPr rtlCol="0" anchor="ctr"/>
+          <a:lstStyle/>
+          <a:p>
+            <a:pPr algn="ctr"/>
+          </a:p>
+        </p:txBody>
+      </p:sp>
+      <p:sp>
+        <p:nvSpPr>
+          <p:cNvPr id="3" name="Rectangle 2"/>
+          <p:cNvSpPr/>
+          <p:nvPr/>
+        </p:nvSpPr>
+        <p:spPr>
+          <a:xfrm>
+            <a:off x="548640" y="475488"/>
+            <a:ext cx="457200" cy="54864"/>
+          </a:xfrm>
+          <a:prstGeom prst="rect">
+            <a:avLst/>
+          </a:prstGeom>
+          <a:solidFill>
+            <a:srgbClr val="1E5EF3"/>
+          </a:solidFill>
+          <a:ln>
+            <a:noFill/>
+          </a:ln>
+          <a:effectLst/>
+        </p:spPr>
+        <p:style>
+          <a:lnRef idx="1">
+            <a:schemeClr val="accent1"/>
+          </a:lnRef>
+          <a:fillRef idx="3">
+            <a:schemeClr val="accent1"/>
+          </a:fillRef>
+          <a:effectRef idx="2">
+            <a:schemeClr val="accent1"/>
+          </a:effectRef>
+          <a:fontRef idx="minor">
+            <a:schemeClr val="lt1"/>
+          </a:fontRef>
+        </p:style>
+        <p:txBody>
+          <a:bodyPr rtlCol="0" anchor="ctr"/>
+          <a:lstStyle/>
+          <a:p>
+            <a:pPr algn="ctr"/>
+          </a:p>
+        </p:txBody>
+      </p:sp>
+      <p:sp>
+        <p:nvSpPr>
+          <p:cNvPr id="4" name="TextBox 3"/>
+          <p:cNvSpPr txBox="1"/>
+          <p:nvPr/>
+        </p:nvSpPr>
+        <p:spPr>
+          <a:xfrm>
+            <a:off x="548640" y="603504"/>
+            <a:ext cx="11091672" cy="274320"/>
+          </a:xfrm>
+          <a:prstGeom prst="rect">
+            <a:avLst/>
+          </a:prstGeom>
+          <a:noFill/>
+        </p:spPr>
+        <p:txBody>
+          <a:bodyPr wrap="square">
+            <a:spAutoFit/>
+          </a:bodyPr>
+          <a:lstStyle/>
+          <a:p>
+            <a:pPr algn="l">
+              <a:spcAft>
+                <a:spcPts val="600"/>
+              </a:spcAft>
+              <a:buNone/>
+            </a:pPr>
+            <a:r>
+              <a:rPr sz="1100" b="1">
+                <a:solidFill>
+                  <a:srgbClr val="1E5EF3"/>
+                </a:solidFill>
+                <a:latin typeface="Arial"/>
+              </a:rPr>
+              <a:t>NOTEBOOK 03 - .GITHUB/WORKFLOWS/HARNESS.YML</a:t>
+            </a:r>
+          </a:p>
+        </p:txBody>
+      </p:sp>
+      <p:sp>
+        <p:nvSpPr>
+          <p:cNvPr id="5" name="TextBox 4"/>
+          <p:cNvSpPr txBox="1"/>
+          <p:nvPr/>
+        </p:nvSpPr>
+        <p:spPr>
+          <a:xfrm>
+            <a:off x="548640" y="868680"/>
+            <a:ext cx="11091672" cy="777240"/>
+          </a:xfrm>
+          <a:prstGeom prst="rect">
+            <a:avLst/>
+          </a:prstGeom>
+          <a:noFill/>
+        </p:spPr>
+        <p:txBody>
+          <a:bodyPr wrap="square">
+            <a:spAutoFit/>
+          </a:bodyPr>
+          <a:lstStyle/>
+          <a:p>
+            <a:pPr algn="l">
+              <a:spcAft>
+                <a:spcPts val="0"/>
+              </a:spcAft>
+              <a:buNone/>
+            </a:pPr>
+            <a:r>
+              <a:rPr sz="2600" b="1">
+                <a:solidFill>
+                  <a:srgbClr val="0A2540"/>
+                </a:solidFill>
+                <a:latin typeface="Arial"/>
+              </a:rPr>
+              <a:t>Evals as CI: unit tests always, the eval suite only with the secret</a:t>
+            </a:r>
+          </a:p>
+        </p:txBody>
+      </p:sp>
+      <p:sp>
+        <p:nvSpPr>
+          <p:cNvPr id="6" name="Rectangle 5"/>
+          <p:cNvSpPr/>
+          <p:nvPr/>
+        </p:nvSpPr>
+        <p:spPr>
+          <a:xfrm>
+            <a:off x="548640" y="1664208"/>
+            <a:ext cx="11091672" cy="12801"/>
+          </a:xfrm>
+          <a:prstGeom prst="rect">
+            <a:avLst/>
+          </a:prstGeom>
+          <a:solidFill>
+            <a:srgbClr val="B9D0FA"/>
+          </a:solidFill>
+          <a:ln>
+            <a:noFill/>
+          </a:ln>
+          <a:effectLst/>
+        </p:spPr>
+        <p:style>
+          <a:lnRef idx="1">
+            <a:schemeClr val="accent1"/>
+          </a:lnRef>
+          <a:fillRef idx="3">
+            <a:schemeClr val="accent1"/>
+          </a:fillRef>
+          <a:effectRef idx="2">
+            <a:schemeClr val="accent1"/>
+          </a:effectRef>
+          <a:fontRef idx="minor">
+            <a:schemeClr val="lt1"/>
+          </a:fontRef>
+        </p:style>
+        <p:txBody>
+          <a:bodyPr rtlCol="0" anchor="ctr"/>
+          <a:lstStyle/>
+          <a:p>
+            <a:pPr algn="ctr"/>
+          </a:p>
+        </p:txBody>
+      </p:sp>
+      <p:sp>
+        <p:nvSpPr>
+          <p:cNvPr id="7" name="Rectangle 6"/>
+          <p:cNvSpPr/>
+          <p:nvPr/>
+        </p:nvSpPr>
+        <p:spPr>
+          <a:xfrm>
+            <a:off x="548640" y="1874519"/>
+            <a:ext cx="5394960" cy="3977639"/>
+          </a:xfrm>
+          <a:prstGeom prst="rect">
+            <a:avLst/>
+          </a:prstGeom>
+          <a:solidFill>
+            <a:srgbClr val="EEF3FD"/>
+          </a:solidFill>
+          <a:ln>
+            <a:noFill/>
+          </a:ln>
+          <a:effectLst/>
+        </p:spPr>
+        <p:style>
+          <a:lnRef idx="1">
+            <a:schemeClr val="accent1"/>
+          </a:lnRef>
+          <a:fillRef idx="3">
+            <a:schemeClr val="accent1"/>
+          </a:fillRef>
+          <a:effectRef idx="2">
+            <a:schemeClr val="accent1"/>
+          </a:effectRef>
+          <a:fontRef idx="minor">
+            <a:schemeClr val="lt1"/>
+          </a:fontRef>
+        </p:style>
+        <p:txBody>
+          <a:bodyPr rtlCol="0" anchor="ctr"/>
+          <a:lstStyle/>
+          <a:p>
+            <a:pPr algn="ctr"/>
+          </a:p>
+        </p:txBody>
+      </p:sp>
+      <p:sp>
+        <p:nvSpPr>
+          <p:cNvPr id="8" name="TextBox 7"/>
+          <p:cNvSpPr txBox="1"/>
+          <p:nvPr/>
+        </p:nvSpPr>
+        <p:spPr>
+          <a:xfrm>
+            <a:off x="777240" y="2039111"/>
+            <a:ext cx="4937760" cy="365760"/>
+          </a:xfrm>
+          <a:prstGeom prst="rect">
+            <a:avLst/>
+          </a:prstGeom>
+          <a:noFill/>
+        </p:spPr>
+        <p:txBody>
+          <a:bodyPr wrap="square">
+            <a:spAutoFit/>
+          </a:bodyPr>
+          <a:lstStyle/>
+          <a:p>
+            <a:pPr algn="l">
+              <a:spcAft>
+                <a:spcPts val="600"/>
+              </a:spcAft>
+              <a:buNone/>
+            </a:pPr>
+            <a:r>
+              <a:rPr sz="1500" b="1">
+                <a:solidFill>
+                  <a:srgbClr val="0A2540"/>
+                </a:solidFill>
+                <a:latin typeface="Arial"/>
+              </a:rPr>
+              <a:t>Job unit: no key, always runs</a:t>
+            </a:r>
+          </a:p>
+        </p:txBody>
+      </p:sp>
+      <p:sp>
+        <p:nvSpPr>
+          <p:cNvPr id="9" name="TextBox 8"/>
+          <p:cNvSpPr txBox="1"/>
+          <p:nvPr/>
+        </p:nvSpPr>
+        <p:spPr>
+          <a:xfrm>
+            <a:off x="777240" y="2441447"/>
+            <a:ext cx="4937760" cy="3246119"/>
+          </a:xfrm>
+          <a:prstGeom prst="rect">
+            <a:avLst/>
+          </a:prstGeom>
+          <a:noFill/>
+        </p:spPr>
+        <p:txBody>
+          <a:bodyPr wrap="square">
+            <a:spAutoFit/>
+          </a:bodyPr>
+          <a:lstStyle/>
+          <a:p>
+            <a:pPr algn="l" indent="-228600" marL="228600">
+              <a:spcAft>
+                <a:spcPts val="600"/>
+              </a:spcAft>
+              <a:buClr>
+                <a:srgbClr val="1E5EF3"/>
+              </a:buClr>
+              <a:buChar char="—"/>
+            </a:pPr>
+            <a:r>
+              <a:rPr sz="1300" b="0">
+                <a:solidFill>
+                  <a:srgbClr val="202B38"/>
+                </a:solidFill>
+                <a:latin typeface="Arial"/>
+              </a:rPr>
+              <a:t>Runs on every pull request that touches harness/, evals/, tests/ or the workflow file; permissions: contents: read</a:t>
+            </a:r>
+          </a:p>
+          <a:p>
+            <a:pPr algn="l" indent="-228600" marL="228600">
+              <a:spcAft>
+                <a:spcPts val="600"/>
+              </a:spcAft>
+              <a:buClr>
+                <a:srgbClr val="1E5EF3"/>
+              </a:buClr>
+              <a:buChar char="—"/>
+            </a:pPr>
+            <a:r>
+              <a:rPr sz="1300" b="0">
+                <a:solidFill>
+                  <a:srgbClr val="202B38"/>
+                </a:solidFill>
+                <a:latin typeface="Arial"/>
+              </a:rPr>
+              <a:t>actions/checkout@v7, actions/setup-python@v7 with Python 3.12 and a pip cache</a:t>
+            </a:r>
+          </a:p>
+          <a:p>
+            <a:pPr algn="l" indent="-228600" marL="228600">
+              <a:spcAft>
+                <a:spcPts val="600"/>
+              </a:spcAft>
+              <a:buClr>
+                <a:srgbClr val="1E5EF3"/>
+              </a:buClr>
+              <a:buChar char="—"/>
+            </a:pPr>
+            <a:r>
+              <a:rPr sz="1300" b="0">
+                <a:solidFill>
+                  <a:srgbClr val="202B38"/>
+                </a:solidFill>
+                <a:latin typeface="Arial"/>
+              </a:rPr>
+              <a:t>pip install anthropic python-dotenv pyyaml pydantic pandas pytest ruff; then ruff check harness tests; python -m pytest tests -q</a:t>
+            </a:r>
+          </a:p>
+          <a:p>
+            <a:pPr algn="l" indent="-228600" marL="228600">
+              <a:spcAft>
+                <a:spcPts val="600"/>
+              </a:spcAft>
+              <a:buClr>
+                <a:srgbClr val="1E5EF3"/>
+              </a:buClr>
+              <a:buChar char="—"/>
+            </a:pPr>
+            <a:r>
+              <a:rPr sz="1300" b="0">
+                <a:solidFill>
+                  <a:srgbClr val="202B38"/>
+                </a:solidFill>
+                <a:latin typeface="Arial"/>
+              </a:rPr>
+              <a:t>The tests replay canned API responses through a stub client in tests/conftest.py: engineering practice, never a teaching device</a:t>
+            </a:r>
+          </a:p>
+        </p:txBody>
+      </p:sp>
+      <p:sp>
+        <p:nvSpPr>
+          <p:cNvPr id="10" name="Rectangle 9"/>
+          <p:cNvSpPr/>
+          <p:nvPr/>
+        </p:nvSpPr>
+        <p:spPr>
+          <a:xfrm>
+            <a:off x="6245352" y="1874519"/>
+            <a:ext cx="5394960" cy="3977639"/>
+          </a:xfrm>
+          <a:prstGeom prst="rect">
+            <a:avLst/>
+          </a:prstGeom>
+          <a:solidFill>
+            <a:srgbClr val="EEF3FD"/>
+          </a:solidFill>
+          <a:ln>
+            <a:noFill/>
+          </a:ln>
+          <a:effectLst/>
+        </p:spPr>
+        <p:style>
+          <a:lnRef idx="1">
+            <a:schemeClr val="accent1"/>
+          </a:lnRef>
+          <a:fillRef idx="3">
+            <a:schemeClr val="accent1"/>
+          </a:fillRef>
+          <a:effectRef idx="2">
+            <a:schemeClr val="accent1"/>
+          </a:effectRef>
+          <a:fontRef idx="minor">
+            <a:schemeClr val="lt1"/>
+          </a:fontRef>
+        </p:style>
+        <p:txBody>
+          <a:bodyPr rtlCol="0" anchor="ctr"/>
+          <a:lstStyle/>
+          <a:p>
+            <a:pPr algn="ctr"/>
+          </a:p>
+        </p:txBody>
+      </p:sp>
+      <p:sp>
+        <p:nvSpPr>
+          <p:cNvPr id="11" name="TextBox 10"/>
+          <p:cNvSpPr txBox="1"/>
+          <p:nvPr/>
+        </p:nvSpPr>
+        <p:spPr>
+          <a:xfrm>
+            <a:off x="6473952" y="2039111"/>
+            <a:ext cx="4937760" cy="365760"/>
+          </a:xfrm>
+          <a:prstGeom prst="rect">
+            <a:avLst/>
+          </a:prstGeom>
+          <a:noFill/>
+        </p:spPr>
+        <p:txBody>
+          <a:bodyPr wrap="square">
+            <a:spAutoFit/>
+          </a:bodyPr>
+          <a:lstStyle/>
+          <a:p>
+            <a:pPr algn="l">
+              <a:spcAft>
+                <a:spcPts val="600"/>
+              </a:spcAft>
+              <a:buNone/>
+            </a:pPr>
+            <a:r>
+              <a:rPr sz="1500" b="1">
+                <a:solidFill>
+                  <a:srgbClr val="0A2540"/>
+                </a:solidFill>
+                <a:latin typeface="Arial"/>
+              </a:rPr>
+              <a:t>Job evals: needs ANTHROPIC_API_KEY</a:t>
+            </a:r>
+          </a:p>
+        </p:txBody>
+      </p:sp>
+      <p:sp>
+        <p:nvSpPr>
+          <p:cNvPr id="12" name="TextBox 11"/>
+          <p:cNvSpPr txBox="1"/>
+          <p:nvPr/>
+        </p:nvSpPr>
+        <p:spPr>
+          <a:xfrm>
+            <a:off x="6473952" y="2441447"/>
+            <a:ext cx="4937760" cy="3246119"/>
+          </a:xfrm>
+          <a:prstGeom prst="rect">
+            <a:avLst/>
+          </a:prstGeom>
+          <a:noFill/>
+        </p:spPr>
+        <p:txBody>
+          <a:bodyPr wrap="square">
+            <a:spAutoFit/>
+          </a:bodyPr>
+          <a:lstStyle/>
+          <a:p>
+            <a:pPr algn="l" indent="-228600" marL="228600">
+              <a:spcAft>
+                <a:spcPts val="600"/>
+              </a:spcAft>
+              <a:buClr>
+                <a:srgbClr val="1E5EF3"/>
+              </a:buClr>
+              <a:buChar char="—"/>
+            </a:pPr>
+            <a:r>
+              <a:rPr sz="1300" b="0">
+                <a:solidFill>
+                  <a:srgbClr val="202B38"/>
+                </a:solidFill>
+                <a:latin typeface="Arial"/>
+              </a:rPr>
+              <a:t>needs: unit; env ANTHROPIC_API_KEY from the repository secret; every step guarded by if: env.ANTHROPIC_API_KEY != ''</a:t>
+            </a:r>
+          </a:p>
+          <a:p>
+            <a:pPr algn="l" indent="-228600" marL="228600">
+              <a:spcAft>
+                <a:spcPts val="600"/>
+              </a:spcAft>
+              <a:buClr>
+                <a:srgbClr val="1E5EF3"/>
+              </a:buClr>
+              <a:buChar char="—"/>
+            </a:pPr>
+            <a:r>
+              <a:rPr sz="1300" b="0">
+                <a:solidFill>
+                  <a:srgbClr val="202B38"/>
+                </a:solidFill>
+                <a:latin typeface="Arial"/>
+              </a:rPr>
+              <a:t>python -m harness eval evals/cases.yaml --config all --out results.json</a:t>
+            </a:r>
+          </a:p>
+          <a:p>
+            <a:pPr algn="l" indent="-228600" marL="228600">
+              <a:spcAft>
+                <a:spcPts val="600"/>
+              </a:spcAft>
+              <a:buClr>
+                <a:srgbClr val="1E5EF3"/>
+              </a:buClr>
+              <a:buChar char="—"/>
+            </a:pPr>
+            <a:r>
+              <a:rPr sz="1300" b="0">
+                <a:solidFill>
+                  <a:srgbClr val="202B38"/>
+                </a:solidFill>
+                <a:latin typeface="Arial"/>
+              </a:rPr>
+              <a:t>python -m harness show results.json goes to $GITHUB_STEP_SUMMARY; results.json uploaded as artifact harness-eval-results</a:t>
+            </a:r>
+          </a:p>
+          <a:p>
+            <a:pPr algn="l" indent="-228600" marL="228600">
+              <a:spcAft>
+                <a:spcPts val="600"/>
+              </a:spcAft>
+              <a:buClr>
+                <a:srgbClr val="1E5EF3"/>
+              </a:buClr>
+              <a:buChar char="—"/>
+            </a:pPr>
+            <a:r>
+              <a:rPr sz="1300" b="0">
+                <a:solidFill>
+                  <a:srgbClr val="202B38"/>
+                </a:solidFill>
+                <a:latin typeface="Arial"/>
+              </a:rPr>
+              <a:t>No secret (forks, Dependabot): one step writes 'Eval suite not run' to the summary and the job still passes</a:t>
+            </a:r>
+          </a:p>
+          <a:p>
+            <a:pPr algn="l" indent="-228600" marL="228600">
+              <a:spcAft>
+                <a:spcPts val="600"/>
+              </a:spcAft>
+              <a:buClr>
+                <a:srgbClr val="1E5EF3"/>
+              </a:buClr>
+              <a:buChar char="—"/>
+            </a:pPr>
+            <a:r>
+              <a:rPr sz="1300" b="0">
+                <a:solidFill>
+                  <a:srgbClr val="202B38"/>
+                </a:solidFill>
+                <a:latin typeface="Arial"/>
+              </a:rPr>
+              <a:t>The recorded suite: 42 eval runs, $2.1685 - small change next to a developer's hour, so it can run on every pull request</a:t>
+            </a:r>
+          </a:p>
+        </p:txBody>
+      </p:sp>
+      <p:sp>
+        <p:nvSpPr>
+          <p:cNvPr id="13" name="TextBox 12"/>
+          <p:cNvSpPr txBox="1"/>
+          <p:nvPr/>
+        </p:nvSpPr>
+        <p:spPr>
+          <a:xfrm>
+            <a:off x="548640" y="6053328"/>
+            <a:ext cx="11091672" cy="502920"/>
+          </a:xfrm>
+          <a:prstGeom prst="rect">
+            <a:avLst/>
+          </a:prstGeom>
+          <a:noFill/>
+        </p:spPr>
+        <p:txBody>
+          <a:bodyPr wrap="square">
+            <a:spAutoFit/>
+          </a:bodyPr>
+          <a:lstStyle/>
+          <a:p>
+            <a:pPr algn="l">
+              <a:spcAft>
+                <a:spcPts val="600"/>
+              </a:spcAft>
+              <a:buNone/>
+            </a:pPr>
+            <a:r>
+              <a:rPr sz="1200" b="0">
+                <a:solidFill>
+                  <a:srgbClr val="1E5EF3"/>
+                </a:solidFill>
+                <a:latin typeface="Arial"/>
+              </a:rPr>
+              <a:t>Workflow as read by the notebook (section 5). Bill of the recorded run: 27 single runs $0.3722 + 42 eval runs $2.1685 = $2.5407 on 30 Sep 2026; live runs vary.</a:t>
+            </a:r>
+          </a:p>
+        </p:txBody>
+      </p:sp>
+      <p:sp>
+        <p:nvSpPr>
+          <p:cNvPr id="14" name="TextBox 13"/>
+          <p:cNvSpPr txBox="1"/>
+          <p:nvPr/>
+        </p:nvSpPr>
+        <p:spPr>
+          <a:xfrm>
+            <a:off x="548640" y="6473952"/>
+            <a:ext cx="7315200" cy="292608"/>
+          </a:xfrm>
+          <a:prstGeom prst="rect">
+            <a:avLst/>
+          </a:prstGeom>
+          <a:noFill/>
+        </p:spPr>
+        <p:txBody>
+          <a:bodyPr wrap="square">
+            <a:spAutoFit/>
+          </a:bodyPr>
+          <a:lstStyle/>
+          <a:p>
+            <a:pPr algn="l">
+              <a:spcAft>
+                <a:spcPts val="600"/>
+              </a:spcAft>
+              <a:buNone/>
+            </a:pPr>
+            <a:r>
+              <a:rPr sz="900" b="0">
+                <a:solidFill>
+                  <a:srgbClr val="5B6774"/>
+                </a:solidFill>
+                <a:latin typeface="Arial"/>
+              </a:rPr>
+              <a:t>M5 Session 3 - Building a Harness</a:t>
+            </a:r>
+          </a:p>
+        </p:txBody>
+      </p:sp>
+      <p:sp>
+        <p:nvSpPr>
+          <p:cNvPr id="15" name="TextBox 14"/>
+          <p:cNvSpPr txBox="1"/>
+          <p:nvPr/>
+        </p:nvSpPr>
+        <p:spPr>
+          <a:xfrm>
+            <a:off x="11292840" y="6473952"/>
+            <a:ext cx="548640" cy="292608"/>
+          </a:xfrm>
+          <a:prstGeom prst="rect">
+            <a:avLst/>
+          </a:prstGeom>
+          <a:noFill/>
+        </p:spPr>
+        <p:txBody>
+          <a:bodyPr wrap="square">
+            <a:spAutoFit/>
+          </a:bodyPr>
+          <a:lstStyle/>
+          <a:p>
+            <a:pPr algn="r">
+              <a:spcAft>
+                <a:spcPts val="600"/>
+              </a:spcAft>
+              <a:buNone/>
+            </a:pPr>
+            <a:r>
+              <a:rPr sz="900" b="0">
+                <a:solidFill>
+                  <a:srgbClr val="5B6774"/>
+                </a:solidFill>
+                <a:latin typeface="Arial"/>
+              </a:rPr>
+              <a:t>21</a:t>
+            </a:r>
+          </a:p>
+        </p:txBody>
+      </p:sp>
+    </p:spTree>
+  </p:cSld>
+  <p:clrMapOvr>
+    <a:masterClrMapping/>
+  </p:clrMapOvr>
+</p:sld>
+</file>
+
+<file path=ppt/slides/slide22.xml><?xml version="1.0" encoding="utf-8"?>
+<p:sld xmlns:a="http://schemas.openxmlformats.org/drawingml/2006/main" xmlns:p="http://schemas.openxmlformats.org/presentationml/2006/main" xmlns:r="http://schemas.openxmlformats.org/officeDocument/2006/relationships">
+  <p:cSld>
+    <p:spTree>
+      <p:nvGrpSpPr>
+        <p:cNvPr id="1" name=""/>
+        <p:cNvGrpSpPr/>
+        <p:nvPr/>
+      </p:nvGrpSpPr>
+      <p:grpSpPr/>
+      <p:sp>
+        <p:nvSpPr>
+          <p:cNvPr id="2" name="Rectangle 1"/>
+          <p:cNvSpPr/>
+          <p:nvPr/>
+        </p:nvSpPr>
+        <p:spPr>
+          <a:xfrm>
+            <a:off x="0" y="0"/>
+            <a:ext cx="12191695" cy="6858000"/>
+          </a:xfrm>
+          <a:prstGeom prst="rect">
+            <a:avLst/>
+          </a:prstGeom>
+          <a:solidFill>
             <a:srgbClr val="0A2540"/>
           </a:solidFill>
           <a:ln>
@@ -11272,7 +13575,7 @@
                 </a:solidFill>
                 <a:latin typeface="Arial"/>
               </a:rPr>
-              <a:t>The loop: gather context, take action, verify work, repeat - with three exits</a:t>
+              <a:t>The loop: gather context, take action, verify work, repeat - with exits in your code</a:t>
             </a:r>
           </a:p>
           <a:p>
@@ -11332,7 +13635,7 @@
                 </a:solidFill>
                 <a:latin typeface="Arial"/>
               </a:rPr>
-              <a:t>An eval = task + grader + outcome; a suite gives a pass rate you can compare</a:t>
+              <a:t>An eval = task + grader + outcome; a suite gives a pass rate and a price</a:t>
             </a:r>
           </a:p>
           <a:p>
@@ -11352,7 +13655,7 @@
                 </a:solidFill>
                 <a:latin typeface="Arial"/>
               </a:rPr>
-              <a:t>A trace records every call and token; cost = tokens x price</a:t>
+              <a:t>A trace records every call with the tokens the API returned; cost = usage x price</a:t>
             </a:r>
           </a:p>
           <a:p>
@@ -11372,7 +13675,7 @@
                 </a:solidFill>
                 <a:latin typeface="Arial"/>
               </a:rPr>
-              <a:t>Notebook 03: 0% -&gt; 91.7% -&gt; 100%, verification at 2.1x the tokens</a:t>
+              <a:t>Notebook 03: 3, 14 and 13 of 14 cases for one model; the full harness failed one trap</a:t>
             </a:r>
           </a:p>
           <a:p>
@@ -11512,7 +13815,7 @@
                 </a:solidFill>
                 <a:latin typeface="Arial"/>
               </a:rPr>
-              <a:t>20</a:t>
+              <a:t>22</a:t>
             </a:r>
           </a:p>
         </p:txBody>
@@ -11865,7 +14168,7 @@
                 </a:solidFill>
                 <a:latin typeface="Arial"/>
               </a:rPr>
-              <a:t>Three exits: done, max turns, budget - a loop without exits is a runaway car</a:t>
+              <a:t>Three exits in your code: done, max_turns, budget - a loop without exits is a runaway car</a:t>
             </a:r>
           </a:p>
           <a:p>
@@ -11885,7 +14188,7 @@
                 </a:solidFill>
                 <a:latin typeface="Arial"/>
               </a:rPr>
-              <a:t>Our library: Agent.run() is about 30 lines that do exactly this</a:t>
+              <a:t>The harness package: Agent.run() in loop.py is about forty lines that do exactly this</a:t>
             </a:r>
           </a:p>
         </p:txBody>
@@ -11949,7 +14252,7 @@
                 </a:solidFill>
                 <a:latin typeface="Arial"/>
               </a:rPr>
-              <a:t>Illustration. Loop steps as named by Anthropic, Claude Agent SDK, Sep 2025. Exits as implemented in the course library (harness.agent).</a:t>
+              <a:t>Illustration. Loop steps as named by Anthropic, Claude Agent SDK, Sep 2025. Exits as implemented in harness/loop.py (stopped_because); refusal and max_tokens come from the API.</a:t>
             </a:r>
           </a:p>
         </p:txBody>
@@ -12362,7 +14665,7 @@
                 </a:solidFill>
                 <a:latin typeface="Arial"/>
               </a:rPr>
-              <a:t>Checkpoint 3, after the answer: validate format and citations; retry on failure</a:t>
+              <a:t>Checkpoint 3, after the answer: validate format and sources; retry once on failure</a:t>
             </a:r>
           </a:p>
           <a:p>
@@ -12402,7 +14705,7 @@
                 </a:solidFill>
                 <a:latin typeface="Arial"/>
               </a:rPr>
-              <a:t>Our library: run_python is 'danger', denied by default; Hooks.validate_answer retries</a:t>
+              <a:t>The harness package: run_shell is risk 'danger', denied by default; Hooks.validate_answer retries once</a:t>
             </a:r>
           </a:p>
         </p:txBody>
@@ -14318,7 +16621,7 @@
                           </a:solidFill>
                           <a:latin typeface="Arial"/>
                         </a:rPr>
-                        <a:t>Course example (notebook 03)</a:t>
+                        <a:t>Notebook 03 example</a:t>
                       </a:r>
                     </a:p>
                   </a:txBody>
@@ -14404,7 +16707,7 @@
                           </a:solidFill>
                           <a:latin typeface="Arial"/>
                         </a:rPr>
-                        <a:t>outline -&gt; draft -&gt; citation check</a:t>
+                        <a:t>researcher, then a judge with a pass/reason schema</a:t>
                       </a:r>
                     </a:p>
                   </a:txBody>
@@ -14490,7 +16793,7 @@
                           </a:solidFill>
                           <a:latin typeface="Arial"/>
                         </a:rPr>
-                        <a:t>calculation vs research vs general</a:t>
+                        <a:t>router enum: calculator or researcher</a:t>
                       </a:r>
                     </a:p>
                   </a:txBody>
@@ -14576,7 +16879,7 @@
                           </a:solidFill>
                           <a:latin typeface="Arial"/>
                         </a:rPr>
-                        <a:t>three sub-questions at once; three judges</a:t>
+                        <a:t>three sub-questions, three workers in a thread pool</a:t>
                       </a:r>
                     </a:p>
                   </a:txBody>
@@ -14662,7 +16965,7 @@
                           </a:solidFill>
                           <a:latin typeface="Arial"/>
                         </a:rPr>
-                        <a:t>compound question split into 3, ~6,000 tokens</a:t>
+                        <a:t>planner lists the subtasks, workers answer, synthesizer merges</a:t>
                       </a:r>
                     </a:p>
                   </a:txBody>
@@ -14748,7 +17051,7 @@
                           </a:solidFill>
                           <a:latin typeface="Arial"/>
                         </a:rPr>
-                        <a:t>generator + judge: bare fails twice, research passes round 1</a:t>
+                        <a:t>SECURITY.md summary: draft, review, revise, two rounds max</a:t>
                       </a:r>
                     </a:p>
                   </a:txBody>
@@ -14834,7 +17137,7 @@
                           </a:solidFill>
                           <a:latin typeface="Arial"/>
                         </a:rPr>
-                        <a:t>the research loop: search, read, check, answer</a:t>
+                        <a:t>the researcher loop: list_files, read_file, answer</a:t>
                       </a:r>
                     </a:p>
                   </a:txBody>
@@ -15277,7 +17580,7 @@
                 </a:solidFill>
                 <a:latin typeface="Arial"/>
               </a:rPr>
-              <a:t>Code graders first: contains, cites, used_tool. LLM judges must be calibrated against humans</a:t>
+              <a:t>Code graders first: contains, source_file, found, used_tool, max_turns. LLM judges must be calibrated against humans</a:t>
             </a:r>
           </a:p>
           <a:p>
@@ -15381,7 +17684,7 @@
                 </a:solidFill>
                 <a:latin typeface="Arial"/>
               </a:rPr>
-              <a:t>Illustration. Anthropic, Demystifying evals for AI agents, Jan 2026. Grader names as in the course library (harness.evals).</a:t>
+              <a:t>Illustration. Anthropic, Demystifying evals for AI agents, Jan 2026. Grader names as in harness/evals.py and evals/cases.yaml.</a:t>
             </a:r>
           </a:p>
         </p:txBody>
@@ -15818,7 +18121,7 @@
                 </a:solidFill>
                 <a:latin typeface="Arial"/>
               </a:rPr>
-              <a:t>Every model call, with the estimated tokens it was sent</a:t>
+              <a:t>Every model call, with the real input and output tokens from response.usage</a:t>
             </a:r>
           </a:p>
           <a:p>
@@ -15858,7 +18161,7 @@
                 </a:solidFill>
                 <a:latin typeface="Arial"/>
               </a:rPr>
-              <a:t>Denials, compactions, validator notes, the final answer</a:t>
+              <a:t>Denials, budget stops, validator notes, the final answer</a:t>
             </a:r>
           </a:p>
           <a:p>
@@ -16025,7 +18328,7 @@
                 </a:solidFill>
                 <a:latin typeface="Arial"/>
               </a:rPr>
-              <a:t>Cost accounting: tokens times price per million - trace.cost(3.0)</a:t>
+              <a:t>Cost accounting: tokens times the model's price per million - cost_usd(usage, model)</a:t>
             </a:r>
           </a:p>
           <a:p>
@@ -16145,7 +18448,7 @@
                 </a:solidFill>
                 <a:latin typeface="Arial"/>
               </a:rPr>
-              <a:t>Anthropic, Demystifying evals for AI agents, Jan 2026; Claude Agent SDK, Sep 2025. Trace, Event and cost as in the course library (harness.trace).</a:t>
+              <a:t>Anthropic, Demystifying evals for AI agents, Jan 2026; Claude Agent SDK, Sep 2025. Trace and Event as in harness/trace.py; PRICES and cost_usd in harness/client.py.</a:t>
             </a:r>
           </a:p>
         </p:txBody>

--- a/presentations/m5-session-3-building-a-harness.pptx
+++ b/presentations/m5-session-3-building-a-harness.pptx
@@ -943,7 +943,7 @@
           <a:lstStyle/>
           <a:p>
             <a:r>
-              <a:t>Left: the researcher lists the workflows folder, reads notebooks.yml and answers on turn three - Python 3.12, nine notebooks, the file path - so the loop returns done; 3,536 input tokens in all because every turn re-sends the whole conversation. Middle: the same agent with max_turns=2 spends both turns on tools and the harness cuts it with an empty answer; that is the seatbelt working. Right: a 3,000-token budget; after README.md comes back, count_tokens says the next call would carry 7,342 tokens, so the harness stops before sending it and nothing is billed for that call. Class question: which of the two cut runs would you rather explain to the person paying the bill, and why? Figures on this slide are quoted from the recorded run of notebook 03 on 30 Sep 2026 (claude-opus-5 main agents, claude-sonnet-5 workers); live runs vary, so compare shapes and reasons, not digits.</a:t>
+              <a:t>Left: the researcher lists the workflows folder, reads notebooks.yml and answers on turn three - Python 3.12, nine notebooks, the file path - so the loop returns done; 3,536 input tokens in all because every turn re-sends the whole conversation. Middle: the same agent with max_turns=2 spends both turns on tools and the harness cuts it with an empty answer; that is the seatbelt working. Right: a 3,000-token budget; after README.md comes back, count_tokens says the next call would carry 7,341 tokens, so the harness stops before sending it: one model call made, turns=1, nothing billed for the call that was counted. Turns count model calls, not tool calls, so the budget run has one turn. Class question: which of the two cut runs would you rather explain to the person paying the bill, and why? Figures on this slide are quoted from the recorded run of notebook 03 on 30 Sep 2026 (claude-opus-5 main agents, claude-sonnet-5 workers); live runs vary, so compare shapes and reasons, not digits.</a:t>
             </a:r>
           </a:p>
         </p:txBody>
@@ -1363,7 +1363,7 @@
           <a:lstStyle/>
           <a:p>
             <a:r>
-              <a:t>A scoreboard hides the interesting part. The left column is not a hallucination story: A never invented a fact, it said it could not know, eleven times, and the grader rightly failed it because the fact is in the repository. The right column is the surprise: the only failure of the full harness is a trap, and the same trap was the most expensive case for B as well. Eight turns of listing and reading for a grade that does not exist. B happened to answer on its last turn; C was still calling tools when the seatbelt engaged. Class question: how would you change the system prompt so the model stops searching after two empty looks - and how would you test that it worked? Figures on this slide are quoted from the recorded run of notebook 03 on 30 Sep 2026 (claude-opus-5 main agents, claude-sonnet-5 workers); live runs vary, so compare shapes and reasons, not digits.</a:t>
+              <a:t>A scoreboard hides the interesting part. The left column is not a hallucination story: A never invented a fact, it said it could not know, eleven times, and the grader rightly failed it because the fact is in the repository. The right column is the surprise: the only failure of the full harness is a trap, and the same trap was the most expensive case for B as well. The system prompt says never guess, so the model tries to prove that no grade exists by reading file after file; nothing tells it when to stop. B happened to answer on its last turn; C was still calling tools when the seatbelt engaged, so the grader found no structured output. Say it plainly: the validator caught nothing and cost nothing in this run, which is why evals run again and again. The notebook also records a grader bug fixed before this run - lstrip('./') strips characters, not a prefix - with a regression test: the suite tests the harness, the unit tests test the graders. Class question: how would you change the system prompt so the model stops searching after two empty looks - and how would you test that it worked? Figures on this slide are quoted from the recorded run of notebook 03 on 30 Sep 2026 (claude-opus-5 main agents, claude-sonnet-5 workers); live runs vary, so compare shapes and reasons, not digits.</a:t>
             </a:r>
           </a:p>
         </p:txBody>
@@ -12319,7 +12319,7 @@
                 </a:solidFill>
                 <a:latin typeface="Arial"/>
               </a:rPr>
-              <a:t>The grader wanted the fact and the file; the model was honest and still wrong - it has no way to reach the answer</a:t>
+              <a:t>Honest and useless at the same time: the grader asks for the fact and its source, and no fact was invented</a:t>
             </a:r>
           </a:p>
           <a:p>
@@ -12339,7 +12339,7 @@
                 </a:solidFill>
                 <a:latin typeface="Arial"/>
               </a:rPr>
-              <a:t>Its three passes are the traps, where found=False was the right answer</a:t>
+              <a:t>Its three passes are the traps, where 'the repository does not contain it' happens to be right</a:t>
             </a:r>
           </a:p>
           <a:p>
@@ -12359,7 +12359,7 @@
                 </a:solidFill>
                 <a:latin typeface="Arial"/>
               </a:rPr>
-              <a:t>In plain words: without tools, the model can only pass the questions whose answer is 'I do not know'</a:t>
+              <a:t>In plain words: a model without tools cannot do a task that requires reading</a:t>
             </a:r>
           </a:p>
         </p:txBody>
@@ -12506,7 +12506,7 @@
                 </a:solidFill>
                 <a:latin typeface="Arial"/>
               </a:rPr>
-              <a:t>B on the same case: also 8 turns, found=False on the last turn, $0.5341 - the dearest case in both suites</a:t>
+              <a:t>B on the same case: also 8 turns, found=False on the last turn, $0.5341 - 'never guess' makes the model prove a negative, file after file</a:t>
             </a:r>
           </a:p>
           <a:p>
@@ -12526,7 +12526,7 @@
                 </a:solidFill>
                 <a:latin typeface="Arial"/>
               </a:rPr>
-              <a:t>The model kept searching a repository that holds no grade; whether it speaks before turn eight is luck, not design</a:t>
+              <a:t>The validator never fired: require_sources did not fire once in 14 cases, so C's lower score and higher cost are not its doing</a:t>
             </a:r>
           </a:p>
           <a:p>
@@ -12546,7 +12546,7 @@
                 </a:solidFill>
                 <a:latin typeface="Arial"/>
               </a:rPr>
-              <a:t>The failure print shows no trace, so we cannot say whether the validator fired; the seatbelt is what we can see</a:t>
+              <a:t>Same model, same question, two runs: a result from one run is a reading, not a verdict</a:t>
             </a:r>
           </a:p>
           <a:p>
@@ -12566,7 +12566,7 @@
                 </a:solidFill>
                 <a:latin typeface="Arial"/>
               </a:rPr>
-              <a:t>Fix in the harness, not the model: a tighter max_turns or a system prompt that says when to stop looking</a:t>
+              <a:t>Change next, cheapest first: tell the model when to stop searching; count a max_turns stop with no answer as found=False; add a max_input_tokens budget</a:t>
             </a:r>
           </a:p>
         </p:txBody>
@@ -12606,7 +12606,7 @@
                 </a:solidFill>
                 <a:latin typeface="Arial"/>
               </a:rPr>
-              <a:t>Notebook 03 section 4, 'The failures, one by one'. A trap case tests honesty and the seatbelt at once: write it into the suite or you will never see it. Recorded run, 30 Sep 2026; live runs vary.</a:t>
+              <a:t>Notebook 03 section 4, 'Reading the failures honestly'. Proving a negative is the most expensive thing you can ask an agent to do. Recorded run, 30 Sep 2026; live runs vary.</a:t>
             </a:r>
           </a:p>
         </p:txBody>
